--- a/decks/ai-web-testing-review/build/ai-web-testing-v4.pptx
+++ b/decks/ai-web-testing-review/build/ai-web-testing-v4.pptx
@@ -21,6 +21,7 @@
     <p:sldId id="269" r:id="rId20"/>
     <p:sldId id="270" r:id="rId21"/>
     <p:sldId id="271" r:id="rId22"/>
+    <p:sldId id="272" r:id="rId23"/>
   </p:sldIdLst>
   <p:sldSz cx="12191695" cy="6858000" type="screen4x3"/>
   <p:notesSz cx="6858000" cy="9144000"/>
@@ -3277,7 +3278,7 @@
                 <a:ea typeface="Microsoft YaHei"/>
                 <a:cs typeface="Microsoft YaHei"/>
               </a:rPr>
-              <a:t>封面使用真实工作台截图，强调项目已形成可演示产品链路。</a:t>
+              <a:t>封面使用真实工作台截图，强调项目已形成可演示产品链路。GitHub 仓库地址放在底部技术栈下方。</a:t>
             </a:r>
           </a:p>
         </p:txBody>
@@ -3380,6 +3381,50 @@
                 <a:cs typeface="Microsoft YaHei Light"/>
               </a:rPr>
               <a:t>FastAPI  ·  React/Vite  ·  Playwright  ·  AI DSL  ·  DOM Locator</a:t>
+            </a:r>
+          </a:p>
+        </p:txBody>
+      </p:sp>
+      <p:sp>
+        <p:nvSpPr>
+          <p:cNvPr id="9" name="TextBox 8"/>
+          <p:cNvSpPr txBox="1"/>
+          <p:nvPr/>
+        </p:nvSpPr>
+        <p:spPr>
+          <a:xfrm>
+            <a:off x="502920" y="6309360"/>
+            <a:ext cx="5486400" cy="274320"/>
+          </a:xfrm>
+          <a:prstGeom prst="rect">
+            <a:avLst/>
+          </a:prstGeom>
+          <a:noFill/>
+          <a:ln>
+            <a:noFill/>
+          </a:ln>
+        </p:spPr>
+        <p:txBody>
+          <a:bodyPr wrap="square" lIns="137160" rIns="137160" tIns="137160" bIns="137160" anchor="t">
+            <a:spAutoFit/>
+          </a:bodyPr>
+          <a:lstStyle/>
+          <a:p>
+            <a:pPr algn="l">
+              <a:spcAft>
+                <a:spcPts val="300"/>
+              </a:spcAft>
+            </a:pPr>
+            <a:r>
+              <a:rPr sz="1100" b="0" lang="zh-CN">
+                <a:solidFill>
+                  <a:srgbClr val="2563EB"/>
+                </a:solidFill>
+                <a:latin typeface="Microsoft YaHei Light"/>
+                <a:ea typeface="Microsoft YaHei Light"/>
+                <a:cs typeface="Microsoft YaHei Light"/>
+              </a:rPr>
+              <a:t>GitHub: https://github.com/Asukadaisiki/AI_Web_Testing</a:t>
             </a:r>
           </a:p>
         </p:txBody>
@@ -3484,7 +3529,7 @@
                 <a:ea typeface="Microsoft YaHei"/>
                 <a:cs typeface="Microsoft YaHei"/>
               </a:rPr>
-              <a:t>功能证据 5：步骤级证据报告</a:t>
+              <a:t>技术创新点：混合定位系统降低 UI 自动化脆弱性</a:t>
             </a:r>
           </a:p>
         </p:txBody>
@@ -3528,7 +3573,7 @@
                 <a:ea typeface="Microsoft YaHei Light"/>
                 <a:cs typeface="Microsoft YaHei Light"/>
               </a:rPr>
-              <a:t>每一步都有截图和执行上下文，失败后可以复盘、定位和归因。</a:t>
+              <a:t>定位链路采用 DOM 优先、视觉兜底、人工修正沉淀，而不是单一 CSS/XPath 或纯视觉 Agent。</a:t>
             </a:r>
           </a:p>
         </p:txBody>
@@ -3572,52 +3617,683 @@
                 <a:ea typeface="Microsoft YaHei"/>
                 <a:cs typeface="Microsoft YaHei"/>
               </a:rPr>
-              <a:t>10/16</a:t>
-            </a:r>
-          </a:p>
-        </p:txBody>
-      </p:sp>
-      <p:pic>
-        <p:nvPicPr>
-          <p:cNvPr id="6" name="Picture 5" descr="Snipaste_2026-05-13_19-49-22.png"/>
-          <p:cNvPicPr>
-            <a:picLocks noChangeAspect="1"/>
-          </p:cNvPicPr>
-          <p:nvPr/>
-        </p:nvPicPr>
-        <p:blipFill>
-          <a:blip r:embed="rId2"/>
-          <a:stretch>
-            <a:fillRect/>
-          </a:stretch>
-        </p:blipFill>
-        <p:spPr>
-          <a:xfrm>
-            <a:off x="502920" y="1683505"/>
-            <a:ext cx="5928503" cy="3445269"/>
-          </a:xfrm>
-          <a:prstGeom prst="rect">
-            <a:avLst/>
-          </a:prstGeom>
-          <a:ln w="12700">
-            <a:solidFill>
-              <a:srgbClr val="E5E7EB"/>
-            </a:solidFill>
-          </a:ln>
-        </p:spPr>
-      </p:pic>
-      <p:sp>
-        <p:nvSpPr>
-          <p:cNvPr id="7" name="Rounded Rectangle 6"/>
+              <a:t>10/17</a:t>
+            </a:r>
+          </a:p>
+        </p:txBody>
+      </p:sp>
+      <p:graphicFrame>
+        <p:nvGraphicFramePr>
+          <p:cNvPr id="6" name="Table 5"/>
+          <p:cNvGraphicFramePr>
+            <a:graphicFrameLocks noGrp="1"/>
+          </p:cNvGraphicFramePr>
+          <p:nvPr/>
+        </p:nvGraphicFramePr>
+        <p:xfrm>
+          <a:off x="502920" y="1371600"/>
+          <a:ext cx="11185854" cy="2926080"/>
+        </p:xfrm>
+        <a:graphic>
+          <a:graphicData uri="http://schemas.openxmlformats.org/drawingml/2006/table">
+            <a:tbl>
+              <a:tblPr firstRow="1" bandRow="1">
+                <a:tableStyleId>{5C22544A-7EE6-4342-B048-85BDC9FD1C3A}</a:tableStyleId>
+              </a:tblPr>
+              <a:tblGrid>
+                <a:gridCol w="1454161"/>
+                <a:gridCol w="2460888"/>
+                <a:gridCol w="3803190"/>
+                <a:gridCol w="3467615"/>
+              </a:tblGrid>
+              <a:tr h="487680">
+                <a:tc>
+                  <a:txBody>
+                    <a:bodyPr lIns="73152" rIns="73152" wrap="square"/>
+                    <a:lstStyle/>
+                    <a:p>
+                      <a:r>
+                        <a:rPr sz="1100" b="1" lang="zh-CN">
+                          <a:solidFill>
+                            <a:srgbClr val="FFFFFF"/>
+                          </a:solidFill>
+                          <a:latin typeface="Microsoft YaHei"/>
+                          <a:ea typeface="Microsoft YaHei"/>
+                          <a:cs typeface="Microsoft YaHei"/>
+                        </a:rPr>
+                        <a:t>层级</a:t>
+                      </a:r>
+                    </a:p>
+                  </a:txBody>
+                  <a:tcPr>
+                    <a:solidFill>
+                      <a:srgbClr val="11122A"/>
+                    </a:solidFill>
+                  </a:tcPr>
+                </a:tc>
+                <a:tc>
+                  <a:txBody>
+                    <a:bodyPr lIns="73152" rIns="73152" wrap="square"/>
+                    <a:lstStyle/>
+                    <a:p>
+                      <a:r>
+                        <a:rPr sz="1100" b="1" lang="zh-CN">
+                          <a:solidFill>
+                            <a:srgbClr val="FFFFFF"/>
+                          </a:solidFill>
+                          <a:latin typeface="Microsoft YaHei"/>
+                          <a:ea typeface="Microsoft YaHei"/>
+                          <a:cs typeface="Microsoft YaHei"/>
+                        </a:rPr>
+                        <a:t>策略</a:t>
+                      </a:r>
+                    </a:p>
+                  </a:txBody>
+                  <a:tcPr>
+                    <a:solidFill>
+                      <a:srgbClr val="11122A"/>
+                    </a:solidFill>
+                  </a:tcPr>
+                </a:tc>
+                <a:tc>
+                  <a:txBody>
+                    <a:bodyPr lIns="73152" rIns="73152" wrap="square"/>
+                    <a:lstStyle/>
+                    <a:p>
+                      <a:r>
+                        <a:rPr sz="1100" b="1" lang="zh-CN">
+                          <a:solidFill>
+                            <a:srgbClr val="FFFFFF"/>
+                          </a:solidFill>
+                          <a:latin typeface="Microsoft YaHei"/>
+                          <a:ea typeface="Microsoft YaHei"/>
+                          <a:cs typeface="Microsoft YaHei"/>
+                        </a:rPr>
+                        <a:t>作用</a:t>
+                      </a:r>
+                    </a:p>
+                  </a:txBody>
+                  <a:tcPr>
+                    <a:solidFill>
+                      <a:srgbClr val="11122A"/>
+                    </a:solidFill>
+                  </a:tcPr>
+                </a:tc>
+                <a:tc>
+                  <a:txBody>
+                    <a:bodyPr lIns="73152" rIns="73152" wrap="square"/>
+                    <a:lstStyle/>
+                    <a:p>
+                      <a:r>
+                        <a:rPr sz="1100" b="1" lang="zh-CN">
+                          <a:solidFill>
+                            <a:srgbClr val="FFFFFF"/>
+                          </a:solidFill>
+                          <a:latin typeface="Microsoft YaHei"/>
+                          <a:ea typeface="Microsoft YaHei"/>
+                          <a:cs typeface="Microsoft YaHei"/>
+                        </a:rPr>
+                        <a:t>创新价值</a:t>
+                      </a:r>
+                    </a:p>
+                  </a:txBody>
+                  <a:tcPr>
+                    <a:solidFill>
+                      <a:srgbClr val="11122A"/>
+                    </a:solidFill>
+                  </a:tcPr>
+                </a:tc>
+              </a:tr>
+              <a:tr h="487680">
+                <a:tc>
+                  <a:txBody>
+                    <a:bodyPr lIns="73152" rIns="73152" tIns="36576" bIns="36576" wrap="square"/>
+                    <a:lstStyle/>
+                    <a:p>
+                      <a:r>
+                        <a:rPr sz="1000" b="0" lang="zh-CN">
+                          <a:solidFill>
+                            <a:srgbClr val="111827"/>
+                          </a:solidFill>
+                          <a:latin typeface="Microsoft YaHei"/>
+                          <a:ea typeface="Microsoft YaHei"/>
+                          <a:cs typeface="Microsoft YaHei"/>
+                        </a:rPr>
+                        <a:t>Tier 0</a:t>
+                      </a:r>
+                    </a:p>
+                  </a:txBody>
+                  <a:tcPr>
+                    <a:solidFill>
+                      <a:srgbClr val="FFFFFF"/>
+                    </a:solidFill>
+                  </a:tcPr>
+                </a:tc>
+                <a:tc>
+                  <a:txBody>
+                    <a:bodyPr lIns="73152" rIns="73152" tIns="36576" bIns="36576" wrap="square"/>
+                    <a:lstStyle/>
+                    <a:p>
+                      <a:r>
+                        <a:rPr sz="1000" b="0" lang="zh-CN">
+                          <a:solidFill>
+                            <a:srgbClr val="111827"/>
+                          </a:solidFill>
+                          <a:latin typeface="Microsoft YaHei"/>
+                          <a:ea typeface="Microsoft YaHei"/>
+                          <a:cs typeface="Microsoft YaHei"/>
+                        </a:rPr>
+                        <a:t>人工修正记录</a:t>
+                      </a:r>
+                    </a:p>
+                  </a:txBody>
+                  <a:tcPr>
+                    <a:solidFill>
+                      <a:srgbClr val="FFFFFF"/>
+                    </a:solidFill>
+                  </a:tcPr>
+                </a:tc>
+                <a:tc>
+                  <a:txBody>
+                    <a:bodyPr lIns="73152" rIns="73152" tIns="36576" bIns="36576" wrap="square"/>
+                    <a:lstStyle/>
+                    <a:p>
+                      <a:r>
+                        <a:rPr sz="1000" b="0" lang="zh-CN">
+                          <a:solidFill>
+                            <a:srgbClr val="111827"/>
+                          </a:solidFill>
+                          <a:latin typeface="Microsoft YaHei"/>
+                          <a:ea typeface="Microsoft YaHei"/>
+                          <a:cs typeface="Microsoft YaHei"/>
+                        </a:rPr>
+                        <a:t>优先复用历史确认过的 selector</a:t>
+                      </a:r>
+                    </a:p>
+                  </a:txBody>
+                  <a:tcPr>
+                    <a:solidFill>
+                      <a:srgbClr val="FFFFFF"/>
+                    </a:solidFill>
+                  </a:tcPr>
+                </a:tc>
+                <a:tc>
+                  <a:txBody>
+                    <a:bodyPr lIns="73152" rIns="73152" tIns="36576" bIns="36576" wrap="square"/>
+                    <a:lstStyle/>
+                    <a:p>
+                      <a:r>
+                        <a:rPr sz="1000" b="0" lang="zh-CN">
+                          <a:solidFill>
+                            <a:srgbClr val="111827"/>
+                          </a:solidFill>
+                          <a:latin typeface="Microsoft YaHei"/>
+                          <a:ea typeface="Microsoft YaHei"/>
+                          <a:cs typeface="Microsoft YaHei"/>
+                        </a:rPr>
+                        <a:t>把一次人工修复变成长期资产</a:t>
+                      </a:r>
+                    </a:p>
+                  </a:txBody>
+                  <a:tcPr>
+                    <a:solidFill>
+                      <a:srgbClr val="FFFFFF"/>
+                    </a:solidFill>
+                  </a:tcPr>
+                </a:tc>
+              </a:tr>
+              <a:tr h="487680">
+                <a:tc>
+                  <a:txBody>
+                    <a:bodyPr lIns="73152" rIns="73152" tIns="36576" bIns="36576" wrap="square"/>
+                    <a:lstStyle/>
+                    <a:p>
+                      <a:r>
+                        <a:rPr sz="1000" b="0" lang="zh-CN">
+                          <a:solidFill>
+                            <a:srgbClr val="111827"/>
+                          </a:solidFill>
+                          <a:latin typeface="Microsoft YaHei"/>
+                          <a:ea typeface="Microsoft YaHei"/>
+                          <a:cs typeface="Microsoft YaHei"/>
+                        </a:rPr>
+                        <a:t>Tier 1</a:t>
+                      </a:r>
+                    </a:p>
+                  </a:txBody>
+                  <a:tcPr>
+                    <a:solidFill>
+                      <a:srgbClr val="F5F7FA"/>
+                    </a:solidFill>
+                  </a:tcPr>
+                </a:tc>
+                <a:tc>
+                  <a:txBody>
+                    <a:bodyPr lIns="73152" rIns="73152" tIns="36576" bIns="36576" wrap="square"/>
+                    <a:lstStyle/>
+                    <a:p>
+                      <a:r>
+                        <a:rPr sz="1000" b="0" lang="zh-CN">
+                          <a:solidFill>
+                            <a:srgbClr val="111827"/>
+                          </a:solidFill>
+                          <a:latin typeface="Microsoft YaHei"/>
+                          <a:ea typeface="Microsoft YaHei"/>
+                          <a:cs typeface="Microsoft YaHei"/>
+                        </a:rPr>
+                        <a:t>DOM 语义定位</a:t>
+                      </a:r>
+                    </a:p>
+                  </a:txBody>
+                  <a:tcPr>
+                    <a:solidFill>
+                      <a:srgbClr val="F5F7FA"/>
+                    </a:solidFill>
+                  </a:tcPr>
+                </a:tc>
+                <a:tc>
+                  <a:txBody>
+                    <a:bodyPr lIns="73152" rIns="73152" tIns="36576" bIns="36576" wrap="square"/>
+                    <a:lstStyle/>
+                    <a:p>
+                      <a:r>
+                        <a:rPr sz="1000" b="0" lang="zh-CN">
+                          <a:solidFill>
+                            <a:srgbClr val="111827"/>
+                          </a:solidFill>
+                          <a:latin typeface="Microsoft YaHei"/>
+                          <a:ea typeface="Microsoft YaHei"/>
+                          <a:cs typeface="Microsoft YaHei"/>
+                        </a:rPr>
+                        <a:t>基于 role、label、placeholder、text、aria 等召回候选</a:t>
+                      </a:r>
+                    </a:p>
+                  </a:txBody>
+                  <a:tcPr>
+                    <a:solidFill>
+                      <a:srgbClr val="F5F7FA"/>
+                    </a:solidFill>
+                  </a:tcPr>
+                </a:tc>
+                <a:tc>
+                  <a:txBody>
+                    <a:bodyPr lIns="73152" rIns="73152" tIns="36576" bIns="36576" wrap="square"/>
+                    <a:lstStyle/>
+                    <a:p>
+                      <a:r>
+                        <a:rPr sz="1000" b="0" lang="zh-CN">
+                          <a:solidFill>
+                            <a:srgbClr val="111827"/>
+                          </a:solidFill>
+                          <a:latin typeface="Microsoft YaHei"/>
+                          <a:ea typeface="Microsoft YaHei"/>
+                          <a:cs typeface="Microsoft YaHei"/>
+                        </a:rPr>
+                        <a:t>成本低、速度快、可解释</a:t>
+                      </a:r>
+                    </a:p>
+                  </a:txBody>
+                  <a:tcPr>
+                    <a:solidFill>
+                      <a:srgbClr val="F5F7FA"/>
+                    </a:solidFill>
+                  </a:tcPr>
+                </a:tc>
+              </a:tr>
+              <a:tr h="487680">
+                <a:tc>
+                  <a:txBody>
+                    <a:bodyPr lIns="73152" rIns="73152" tIns="36576" bIns="36576" wrap="square"/>
+                    <a:lstStyle/>
+                    <a:p>
+                      <a:r>
+                        <a:rPr sz="1000" b="0" lang="zh-CN">
+                          <a:solidFill>
+                            <a:srgbClr val="111827"/>
+                          </a:solidFill>
+                          <a:latin typeface="Microsoft YaHei"/>
+                          <a:ea typeface="Microsoft YaHei"/>
+                          <a:cs typeface="Microsoft YaHei"/>
+                        </a:rPr>
+                        <a:t>Tier 1.5/2</a:t>
+                      </a:r>
+                    </a:p>
+                  </a:txBody>
+                  <a:tcPr>
+                    <a:solidFill>
+                      <a:srgbClr val="FFFFFF"/>
+                    </a:solidFill>
+                  </a:tcPr>
+                </a:tc>
+                <a:tc>
+                  <a:txBody>
+                    <a:bodyPr lIns="73152" rIns="73152" tIns="36576" bIns="36576" wrap="square"/>
+                    <a:lstStyle/>
+                    <a:p>
+                      <a:r>
+                        <a:rPr sz="1000" b="0" lang="zh-CN">
+                          <a:solidFill>
+                            <a:srgbClr val="111827"/>
+                          </a:solidFill>
+                          <a:latin typeface="Microsoft YaHei"/>
+                          <a:ea typeface="Microsoft YaHei"/>
+                          <a:cs typeface="Microsoft YaHei"/>
+                        </a:rPr>
+                        <a:t>上下文增强定位</a:t>
+                      </a:r>
+                    </a:p>
+                  </a:txBody>
+                  <a:tcPr>
+                    <a:solidFill>
+                      <a:srgbClr val="FFFFFF"/>
+                    </a:solidFill>
+                  </a:tcPr>
+                </a:tc>
+                <a:tc>
+                  <a:txBody>
+                    <a:bodyPr lIns="73152" rIns="73152" tIns="36576" bIns="36576" wrap="square"/>
+                    <a:lstStyle/>
+                    <a:p>
+                      <a:r>
+                        <a:rPr sz="1000" b="0" lang="zh-CN">
+                          <a:solidFill>
+                            <a:srgbClr val="111827"/>
+                          </a:solidFill>
+                          <a:latin typeface="Microsoft YaHei"/>
+                          <a:ea typeface="Microsoft YaHei"/>
+                          <a:cs typeface="Microsoft YaHei"/>
+                        </a:rPr>
+                        <a:t>支持“商品附近按钮”等语义关系</a:t>
+                      </a:r>
+                    </a:p>
+                  </a:txBody>
+                  <a:tcPr>
+                    <a:solidFill>
+                      <a:srgbClr val="FFFFFF"/>
+                    </a:solidFill>
+                  </a:tcPr>
+                </a:tc>
+                <a:tc>
+                  <a:txBody>
+                    <a:bodyPr lIns="73152" rIns="73152" tIns="36576" bIns="36576" wrap="square"/>
+                    <a:lstStyle/>
+                    <a:p>
+                      <a:r>
+                        <a:rPr sz="1000" b="0" lang="zh-CN">
+                          <a:solidFill>
+                            <a:srgbClr val="111827"/>
+                          </a:solidFill>
+                          <a:latin typeface="Microsoft YaHei"/>
+                          <a:ea typeface="Microsoft YaHei"/>
+                          <a:cs typeface="Microsoft YaHei"/>
+                        </a:rPr>
+                        <a:t>解决同名按钮和列表场景</a:t>
+                      </a:r>
+                    </a:p>
+                  </a:txBody>
+                  <a:tcPr>
+                    <a:solidFill>
+                      <a:srgbClr val="FFFFFF"/>
+                    </a:solidFill>
+                  </a:tcPr>
+                </a:tc>
+              </a:tr>
+              <a:tr h="487680">
+                <a:tc>
+                  <a:txBody>
+                    <a:bodyPr lIns="73152" rIns="73152" tIns="36576" bIns="36576" wrap="square"/>
+                    <a:lstStyle/>
+                    <a:p>
+                      <a:r>
+                        <a:rPr sz="1000" b="0" lang="zh-CN">
+                          <a:solidFill>
+                            <a:srgbClr val="111827"/>
+                          </a:solidFill>
+                          <a:latin typeface="Microsoft YaHei"/>
+                          <a:ea typeface="Microsoft YaHei"/>
+                          <a:cs typeface="Microsoft YaHei"/>
+                        </a:rPr>
+                        <a:t>Tier 3</a:t>
+                      </a:r>
+                    </a:p>
+                  </a:txBody>
+                  <a:tcPr>
+                    <a:solidFill>
+                      <a:srgbClr val="F5F7FA"/>
+                    </a:solidFill>
+                  </a:tcPr>
+                </a:tc>
+                <a:tc>
+                  <a:txBody>
+                    <a:bodyPr lIns="73152" rIns="73152" tIns="36576" bIns="36576" wrap="square"/>
+                    <a:lstStyle/>
+                    <a:p>
+                      <a:r>
+                        <a:rPr sz="1000" b="0" lang="zh-CN">
+                          <a:solidFill>
+                            <a:srgbClr val="111827"/>
+                          </a:solidFill>
+                          <a:latin typeface="Microsoft YaHei"/>
+                          <a:ea typeface="Microsoft YaHei"/>
+                          <a:cs typeface="Microsoft YaHei"/>
+                        </a:rPr>
+                        <a:t>AI visual 兜底</a:t>
+                      </a:r>
+                    </a:p>
+                  </a:txBody>
+                  <a:tcPr>
+                    <a:solidFill>
+                      <a:srgbClr val="F5F7FA"/>
+                    </a:solidFill>
+                  </a:tcPr>
+                </a:tc>
+                <a:tc>
+                  <a:txBody>
+                    <a:bodyPr lIns="73152" rIns="73152" tIns="36576" bIns="36576" wrap="square"/>
+                    <a:lstStyle/>
+                    <a:p>
+                      <a:r>
+                        <a:rPr sz="1000" b="0" lang="zh-CN">
+                          <a:solidFill>
+                            <a:srgbClr val="111827"/>
+                          </a:solidFill>
+                          <a:latin typeface="Microsoft YaHei"/>
+                          <a:ea typeface="Microsoft YaHei"/>
+                          <a:cs typeface="Microsoft YaHei"/>
+                        </a:rPr>
+                        <a:t>截图交给 VLM 返回 bbox，再反查 DOM</a:t>
+                      </a:r>
+                    </a:p>
+                  </a:txBody>
+                  <a:tcPr>
+                    <a:solidFill>
+                      <a:srgbClr val="F5F7FA"/>
+                    </a:solidFill>
+                  </a:tcPr>
+                </a:tc>
+                <a:tc>
+                  <a:txBody>
+                    <a:bodyPr lIns="73152" rIns="73152" tIns="36576" bIns="36576" wrap="square"/>
+                    <a:lstStyle/>
+                    <a:p>
+                      <a:r>
+                        <a:rPr sz="1000" b="0" lang="zh-CN">
+                          <a:solidFill>
+                            <a:srgbClr val="111827"/>
+                          </a:solidFill>
+                          <a:latin typeface="Microsoft YaHei"/>
+                          <a:ea typeface="Microsoft YaHei"/>
+                          <a:cs typeface="Microsoft YaHei"/>
+                        </a:rPr>
+                        <a:t>处理 DOM 信息不足的疑难场景</a:t>
+                      </a:r>
+                    </a:p>
+                  </a:txBody>
+                  <a:tcPr>
+                    <a:solidFill>
+                      <a:srgbClr val="F5F7FA"/>
+                    </a:solidFill>
+                  </a:tcPr>
+                </a:tc>
+              </a:tr>
+              <a:tr h="487680">
+                <a:tc>
+                  <a:txBody>
+                    <a:bodyPr lIns="73152" rIns="73152" tIns="36576" bIns="36576" wrap="square"/>
+                    <a:lstStyle/>
+                    <a:p>
+                      <a:r>
+                        <a:rPr sz="1000" b="0" lang="zh-CN">
+                          <a:solidFill>
+                            <a:srgbClr val="111827"/>
+                          </a:solidFill>
+                          <a:latin typeface="Microsoft YaHei"/>
+                          <a:ea typeface="Microsoft YaHei"/>
+                          <a:cs typeface="Microsoft YaHei"/>
+                        </a:rPr>
+                        <a:t>Tier 4</a:t>
+                      </a:r>
+                    </a:p>
+                  </a:txBody>
+                  <a:tcPr>
+                    <a:solidFill>
+                      <a:srgbClr val="FFFFFF"/>
+                    </a:solidFill>
+                  </a:tcPr>
+                </a:tc>
+                <a:tc>
+                  <a:txBody>
+                    <a:bodyPr lIns="73152" rIns="73152" tIns="36576" bIns="36576" wrap="square"/>
+                    <a:lstStyle/>
+                    <a:p>
+                      <a:r>
+                        <a:rPr sz="1000" b="0" lang="zh-CN">
+                          <a:solidFill>
+                            <a:srgbClr val="111827"/>
+                          </a:solidFill>
+                          <a:latin typeface="Microsoft YaHei"/>
+                          <a:ea typeface="Microsoft YaHei"/>
+                          <a:cs typeface="Microsoft YaHei"/>
+                        </a:rPr>
+                        <a:t>人工干预</a:t>
+                      </a:r>
+                    </a:p>
+                  </a:txBody>
+                  <a:tcPr>
+                    <a:solidFill>
+                      <a:srgbClr val="FFFFFF"/>
+                    </a:solidFill>
+                  </a:tcPr>
+                </a:tc>
+                <a:tc>
+                  <a:txBody>
+                    <a:bodyPr lIns="73152" rIns="73152" tIns="36576" bIns="36576" wrap="square"/>
+                    <a:lstStyle/>
+                    <a:p>
+                      <a:r>
+                        <a:rPr sz="1000" b="0" lang="zh-CN">
+                          <a:solidFill>
+                            <a:srgbClr val="111827"/>
+                          </a:solidFill>
+                          <a:latin typeface="Microsoft YaHei"/>
+                          <a:ea typeface="Microsoft YaHei"/>
+                          <a:cs typeface="Microsoft YaHei"/>
+                        </a:rPr>
+                        <a:t>记录截图、URL、DOM、候选与失败原因</a:t>
+                      </a:r>
+                    </a:p>
+                  </a:txBody>
+                  <a:tcPr>
+                    <a:solidFill>
+                      <a:srgbClr val="FFFFFF"/>
+                    </a:solidFill>
+                  </a:tcPr>
+                </a:tc>
+                <a:tc>
+                  <a:txBody>
+                    <a:bodyPr lIns="73152" rIns="73152" tIns="36576" bIns="36576" wrap="square"/>
+                    <a:lstStyle/>
+                    <a:p>
+                      <a:r>
+                        <a:rPr sz="1000" b="0" lang="zh-CN">
+                          <a:solidFill>
+                            <a:srgbClr val="111827"/>
+                          </a:solidFill>
+                          <a:latin typeface="Microsoft YaHei"/>
+                          <a:ea typeface="Microsoft YaHei"/>
+                          <a:cs typeface="Microsoft YaHei"/>
+                        </a:rPr>
+                        <a:t>为复盘和后续修正提供证据</a:t>
+                      </a:r>
+                    </a:p>
+                  </a:txBody>
+                  <a:tcPr>
+                    <a:solidFill>
+                      <a:srgbClr val="FFFFFF"/>
+                    </a:solidFill>
+                  </a:tcPr>
+                </a:tc>
+              </a:tr>
+            </a:tbl>
+          </a:graphicData>
+        </a:graphic>
+      </p:graphicFrame>
+      <p:sp>
+        <p:nvSpPr>
+          <p:cNvPr id="7" name="TextBox 6"/>
+          <p:cNvSpPr txBox="1"/>
+          <p:nvPr/>
+        </p:nvSpPr>
+        <p:spPr>
+          <a:xfrm>
+            <a:off x="502920" y="4343400"/>
+            <a:ext cx="11185855" cy="228600"/>
+          </a:xfrm>
+          <a:prstGeom prst="rect">
+            <a:avLst/>
+          </a:prstGeom>
+          <a:noFill/>
+          <a:ln>
+            <a:noFill/>
+          </a:ln>
+        </p:spPr>
+        <p:txBody>
+          <a:bodyPr wrap="square" lIns="137160" rIns="137160" tIns="137160" bIns="137160" anchor="t">
+            <a:spAutoFit/>
+          </a:bodyPr>
+          <a:lstStyle/>
+          <a:p>
+            <a:pPr algn="l">
+              <a:spcAft>
+                <a:spcPts val="300"/>
+              </a:spcAft>
+            </a:pPr>
+            <a:r>
+              <a:rPr sz="1000" b="0" lang="zh-CN">
+                <a:solidFill>
+                  <a:srgbClr val="4B5563"/>
+                </a:solidFill>
+                <a:latin typeface="Microsoft YaHei Light"/>
+                <a:ea typeface="Microsoft YaHei Light"/>
+                <a:cs typeface="Microsoft YaHei Light"/>
+              </a:rPr>
+              <a:t>来源：docs/hybrid-locate-and-intervention-design.md 与后端 locators/runners 模块设计。</a:t>
+            </a:r>
+          </a:p>
+        </p:txBody>
+      </p:sp>
+      <p:sp>
+        <p:nvSpPr>
+          <p:cNvPr id="8" name="Rectangle 7"/>
           <p:cNvSpPr/>
           <p:nvPr/>
         </p:nvSpPr>
         <p:spPr>
           <a:xfrm>
-            <a:off x="6705743" y="1371600"/>
-            <a:ext cx="4983031" cy="1051560"/>
-          </a:xfrm>
-          <a:prstGeom prst="roundRect">
+            <a:off x="502920" y="5943600"/>
+            <a:ext cx="11185855" cy="411480"/>
+          </a:xfrm>
+          <a:prstGeom prst="rect">
             <a:avLst/>
           </a:prstGeom>
           <a:solidFill>
@@ -3653,14 +4329,14 @@
       </p:sp>
       <p:sp>
         <p:nvSpPr>
-          <p:cNvPr id="8" name="TextBox 7"/>
+          <p:cNvPr id="9" name="TextBox 8"/>
           <p:cNvSpPr txBox="1"/>
           <p:nvPr/>
         </p:nvSpPr>
         <p:spPr>
           <a:xfrm>
-            <a:off x="6842903" y="1463040"/>
-            <a:ext cx="4708711" cy="320040"/>
+            <a:off x="640080" y="5989320"/>
+            <a:ext cx="10911535" cy="320040"/>
           </a:xfrm>
           <a:prstGeom prst="rect">
             <a:avLst/>
@@ -3671,336 +4347,26 @@
           </a:ln>
         </p:spPr>
         <p:txBody>
-          <a:bodyPr wrap="square" lIns="137160" rIns="137160" tIns="137160" bIns="137160" anchor="t">
+          <a:bodyPr wrap="square" lIns="137160" rIns="137160" tIns="137160" bIns="137160" anchor="ctr">
             <a:spAutoFit/>
           </a:bodyPr>
           <a:lstStyle/>
           <a:p>
-            <a:pPr algn="l">
+            <a:pPr algn="ctr">
               <a:spcAft>
                 <a:spcPts val="300"/>
               </a:spcAft>
             </a:pPr>
             <a:r>
-              <a:rPr sz="1500" b="1" lang="zh-CN">
-                <a:solidFill>
-                  <a:srgbClr val="2563EB"/>
+              <a:rPr sz="1400" b="1" lang="zh-CN">
+                <a:solidFill>
+                  <a:srgbClr val="11122A"/>
                 </a:solidFill>
                 <a:latin typeface="Microsoft YaHei"/>
                 <a:ea typeface="Microsoft YaHei"/>
                 <a:cs typeface="Microsoft YaHei"/>
               </a:rPr>
-              <a:t>证据内容</a:t>
-            </a:r>
-          </a:p>
-        </p:txBody>
-      </p:sp>
-      <p:sp>
-        <p:nvSpPr>
-          <p:cNvPr id="9" name="TextBox 8"/>
-          <p:cNvSpPr txBox="1"/>
-          <p:nvPr/>
-        </p:nvSpPr>
-        <p:spPr>
-          <a:xfrm>
-            <a:off x="6842903" y="1828800"/>
-            <a:ext cx="4708711" cy="548639"/>
-          </a:xfrm>
-          <a:prstGeom prst="rect">
-            <a:avLst/>
-          </a:prstGeom>
-          <a:noFill/>
-          <a:ln>
-            <a:noFill/>
-          </a:ln>
-        </p:spPr>
-        <p:txBody>
-          <a:bodyPr wrap="square" lIns="137160" rIns="137160" tIns="137160" bIns="137160" anchor="t">
-            <a:spAutoFit/>
-          </a:bodyPr>
-          <a:lstStyle/>
-          <a:p>
-            <a:pPr algn="l">
-              <a:spcAft>
-                <a:spcPts val="300"/>
-              </a:spcAft>
-            </a:pPr>
-            <a:r>
-              <a:rPr sz="1100" b="0" lang="zh-CN">
-                <a:solidFill>
-                  <a:srgbClr val="4B5563"/>
-                </a:solidFill>
-                <a:latin typeface="Microsoft YaHei Light"/>
-                <a:ea typeface="Microsoft YaHei Light"/>
-                <a:cs typeface="Microsoft YaHei Light"/>
-              </a:rPr>
-              <a:t>步骤编号、动作类型、目标文本、耗时、截图、断言结果和页面状态。</a:t>
-            </a:r>
-          </a:p>
-        </p:txBody>
-      </p:sp>
-      <p:sp>
-        <p:nvSpPr>
-          <p:cNvPr id="10" name="Rounded Rectangle 9"/>
-          <p:cNvSpPr/>
-          <p:nvPr/>
-        </p:nvSpPr>
-        <p:spPr>
-          <a:xfrm>
-            <a:off x="6705743" y="2532888"/>
-            <a:ext cx="4983031" cy="1051560"/>
-          </a:xfrm>
-          <a:prstGeom prst="roundRect">
-            <a:avLst/>
-          </a:prstGeom>
-          <a:solidFill>
-            <a:srgbClr val="FFFFFF"/>
-          </a:solidFill>
-          <a:ln w="10160">
-            <a:solidFill>
-              <a:srgbClr val="E5E7EB"/>
-            </a:solidFill>
-          </a:ln>
-        </p:spPr>
-        <p:style>
-          <a:lnRef idx="1">
-            <a:schemeClr val="accent1"/>
-          </a:lnRef>
-          <a:fillRef idx="3">
-            <a:schemeClr val="accent1"/>
-          </a:fillRef>
-          <a:effectRef idx="2">
-            <a:schemeClr val="accent1"/>
-          </a:effectRef>
-          <a:fontRef idx="minor">
-            <a:schemeClr val="lt1"/>
-          </a:fontRef>
-        </p:style>
-        <p:txBody>
-          <a:bodyPr rtlCol="0" anchor="ctr"/>
-          <a:lstStyle/>
-          <a:p>
-            <a:pPr algn="ctr"/>
-          </a:p>
-        </p:txBody>
-      </p:sp>
-      <p:sp>
-        <p:nvSpPr>
-          <p:cNvPr id="11" name="TextBox 10"/>
-          <p:cNvSpPr txBox="1"/>
-          <p:nvPr/>
-        </p:nvSpPr>
-        <p:spPr>
-          <a:xfrm>
-            <a:off x="6842903" y="2624328"/>
-            <a:ext cx="4708711" cy="320040"/>
-          </a:xfrm>
-          <a:prstGeom prst="rect">
-            <a:avLst/>
-          </a:prstGeom>
-          <a:noFill/>
-          <a:ln>
-            <a:noFill/>
-          </a:ln>
-        </p:spPr>
-        <p:txBody>
-          <a:bodyPr wrap="square" lIns="137160" rIns="137160" tIns="137160" bIns="137160" anchor="t">
-            <a:spAutoFit/>
-          </a:bodyPr>
-          <a:lstStyle/>
-          <a:p>
-            <a:pPr algn="l">
-              <a:spcAft>
-                <a:spcPts val="300"/>
-              </a:spcAft>
-            </a:pPr>
-            <a:r>
-              <a:rPr sz="1500" b="1" lang="zh-CN">
-                <a:solidFill>
-                  <a:srgbClr val="16A34A"/>
-                </a:solidFill>
-                <a:latin typeface="Microsoft YaHei"/>
-                <a:ea typeface="Microsoft YaHei"/>
-                <a:cs typeface="Microsoft YaHei"/>
-              </a:rPr>
-              <a:t>排障价值</a:t>
-            </a:r>
-          </a:p>
-        </p:txBody>
-      </p:sp>
-      <p:sp>
-        <p:nvSpPr>
-          <p:cNvPr id="12" name="TextBox 11"/>
-          <p:cNvSpPr txBox="1"/>
-          <p:nvPr/>
-        </p:nvSpPr>
-        <p:spPr>
-          <a:xfrm>
-            <a:off x="6842903" y="2990088"/>
-            <a:ext cx="4708711" cy="548639"/>
-          </a:xfrm>
-          <a:prstGeom prst="rect">
-            <a:avLst/>
-          </a:prstGeom>
-          <a:noFill/>
-          <a:ln>
-            <a:noFill/>
-          </a:ln>
-        </p:spPr>
-        <p:txBody>
-          <a:bodyPr wrap="square" lIns="137160" rIns="137160" tIns="137160" bIns="137160" anchor="t">
-            <a:spAutoFit/>
-          </a:bodyPr>
-          <a:lstStyle/>
-          <a:p>
-            <a:pPr algn="l">
-              <a:spcAft>
-                <a:spcPts val="300"/>
-              </a:spcAft>
-            </a:pPr>
-            <a:r>
-              <a:rPr sz="1100" b="0" lang="zh-CN">
-                <a:solidFill>
-                  <a:srgbClr val="4B5563"/>
-                </a:solidFill>
-                <a:latin typeface="Microsoft YaHei Light"/>
-                <a:ea typeface="Microsoft YaHei Light"/>
-                <a:cs typeface="Microsoft YaHei Light"/>
-              </a:rPr>
-              <a:t>失败时可以看到发生在哪一步、页面实际长什么样、断言目标是否匹配。</a:t>
-            </a:r>
-          </a:p>
-        </p:txBody>
-      </p:sp>
-      <p:sp>
-        <p:nvSpPr>
-          <p:cNvPr id="13" name="Rounded Rectangle 12"/>
-          <p:cNvSpPr/>
-          <p:nvPr/>
-        </p:nvSpPr>
-        <p:spPr>
-          <a:xfrm>
-            <a:off x="6705743" y="3694176"/>
-            <a:ext cx="4983031" cy="1051560"/>
-          </a:xfrm>
-          <a:prstGeom prst="roundRect">
-            <a:avLst/>
-          </a:prstGeom>
-          <a:solidFill>
-            <a:srgbClr val="FFFFFF"/>
-          </a:solidFill>
-          <a:ln w="10160">
-            <a:solidFill>
-              <a:srgbClr val="E5E7EB"/>
-            </a:solidFill>
-          </a:ln>
-        </p:spPr>
-        <p:style>
-          <a:lnRef idx="1">
-            <a:schemeClr val="accent1"/>
-          </a:lnRef>
-          <a:fillRef idx="3">
-            <a:schemeClr val="accent1"/>
-          </a:fillRef>
-          <a:effectRef idx="2">
-            <a:schemeClr val="accent1"/>
-          </a:effectRef>
-          <a:fontRef idx="minor">
-            <a:schemeClr val="lt1"/>
-          </a:fontRef>
-        </p:style>
-        <p:txBody>
-          <a:bodyPr rtlCol="0" anchor="ctr"/>
-          <a:lstStyle/>
-          <a:p>
-            <a:pPr algn="ctr"/>
-          </a:p>
-        </p:txBody>
-      </p:sp>
-      <p:sp>
-        <p:nvSpPr>
-          <p:cNvPr id="14" name="TextBox 13"/>
-          <p:cNvSpPr txBox="1"/>
-          <p:nvPr/>
-        </p:nvSpPr>
-        <p:spPr>
-          <a:xfrm>
-            <a:off x="6842903" y="3785615"/>
-            <a:ext cx="4708711" cy="320040"/>
-          </a:xfrm>
-          <a:prstGeom prst="rect">
-            <a:avLst/>
-          </a:prstGeom>
-          <a:noFill/>
-          <a:ln>
-            <a:noFill/>
-          </a:ln>
-        </p:spPr>
-        <p:txBody>
-          <a:bodyPr wrap="square" lIns="137160" rIns="137160" tIns="137160" bIns="137160" anchor="t">
-            <a:spAutoFit/>
-          </a:bodyPr>
-          <a:lstStyle/>
-          <a:p>
-            <a:pPr algn="l">
-              <a:spcAft>
-                <a:spcPts val="300"/>
-              </a:spcAft>
-            </a:pPr>
-            <a:r>
-              <a:rPr sz="1500" b="1" lang="zh-CN">
-                <a:solidFill>
-                  <a:srgbClr val="D97706"/>
-                </a:solidFill>
-                <a:latin typeface="Microsoft YaHei"/>
-                <a:ea typeface="Microsoft YaHei"/>
-                <a:cs typeface="Microsoft YaHei"/>
-              </a:rPr>
-              <a:t>AI 分析基础</a:t>
-            </a:r>
-          </a:p>
-        </p:txBody>
-      </p:sp>
-      <p:sp>
-        <p:nvSpPr>
-          <p:cNvPr id="15" name="TextBox 14"/>
-          <p:cNvSpPr txBox="1"/>
-          <p:nvPr/>
-        </p:nvSpPr>
-        <p:spPr>
-          <a:xfrm>
-            <a:off x="6842903" y="4151376"/>
-            <a:ext cx="4708711" cy="548639"/>
-          </a:xfrm>
-          <a:prstGeom prst="rect">
-            <a:avLst/>
-          </a:prstGeom>
-          <a:noFill/>
-          <a:ln>
-            <a:noFill/>
-          </a:ln>
-        </p:spPr>
-        <p:txBody>
-          <a:bodyPr wrap="square" lIns="137160" rIns="137160" tIns="137160" bIns="137160" anchor="t">
-            <a:spAutoFit/>
-          </a:bodyPr>
-          <a:lstStyle/>
-          <a:p>
-            <a:pPr algn="l">
-              <a:spcAft>
-                <a:spcPts val="300"/>
-              </a:spcAft>
-            </a:pPr>
-            <a:r>
-              <a:rPr sz="1100" b="0" lang="zh-CN">
-                <a:solidFill>
-                  <a:srgbClr val="4B5563"/>
-                </a:solidFill>
-                <a:latin typeface="Microsoft YaHei Light"/>
-                <a:ea typeface="Microsoft YaHei Light"/>
-                <a:cs typeface="Microsoft YaHei Light"/>
-              </a:rPr>
-              <a:t>结构化报告未来可输入 AI 失败分析模块，自动判断数据、定位、断言或环境问题。</a:t>
+              <a:t>相比纯脚本定位，它更能适应页面变化；相比纯视觉定位，它更低成本、更可解释、更适合测试工程。</a:t>
             </a:r>
           </a:p>
         </p:txBody>
@@ -4105,7 +4471,7 @@
                 <a:ea typeface="Microsoft YaHei"/>
                 <a:cs typeface="Microsoft YaHei"/>
               </a:rPr>
-              <a:t>功能证据 6：项目级报告中心</a:t>
+              <a:t>功能证据 5：步骤级证据报告</a:t>
             </a:r>
           </a:p>
         </p:txBody>
@@ -4149,7 +4515,7 @@
                 <a:ea typeface="Microsoft YaHei Light"/>
                 <a:cs typeface="Microsoft YaHei Light"/>
               </a:rPr>
-              <a:t>从单次执行上升到项目维度质量观察。</a:t>
+              <a:t>每一步都有截图和执行上下文，失败后可以复盘、定位和归因。</a:t>
             </a:r>
           </a:p>
         </p:txBody>
@@ -4193,14 +4559,14 @@
                 <a:ea typeface="Microsoft YaHei"/>
                 <a:cs typeface="Microsoft YaHei"/>
               </a:rPr>
-              <a:t>11/16</a:t>
+              <a:t>11/17</a:t>
             </a:r>
           </a:p>
         </p:txBody>
       </p:sp>
       <p:pic>
         <p:nvPicPr>
-          <p:cNvPr id="6" name="Picture 5" descr="Snipaste_2026-05-13_19-48-46.png"/>
+          <p:cNvPr id="6" name="Picture 5" descr="Snipaste_2026-05-13_19-49-22.png"/>
           <p:cNvPicPr>
             <a:picLocks noChangeAspect="1"/>
           </p:cNvPicPr>
@@ -4214,8 +4580,8 @@
         </p:blipFill>
         <p:spPr>
           <a:xfrm>
-            <a:off x="5760271" y="1841771"/>
-            <a:ext cx="5928503" cy="3128737"/>
+            <a:off x="502920" y="1683505"/>
+            <a:ext cx="5928503" cy="3445269"/>
           </a:xfrm>
           <a:prstGeom prst="rect">
             <a:avLst/>
@@ -4235,7 +4601,7 @@
         </p:nvSpPr>
         <p:spPr>
           <a:xfrm>
-            <a:off x="502920" y="1371600"/>
+            <a:off x="6705743" y="1371600"/>
             <a:ext cx="4983031" cy="1051560"/>
           </a:xfrm>
           <a:prstGeom prst="roundRect">
@@ -4280,7 +4646,7 @@
         </p:nvSpPr>
         <p:spPr>
           <a:xfrm>
-            <a:off x="640080" y="1463040"/>
+            <a:off x="6842903" y="1463040"/>
             <a:ext cx="4708711" cy="320040"/>
           </a:xfrm>
           <a:prstGeom prst="rect">
@@ -4311,7 +4677,7 @@
                 <a:ea typeface="Microsoft YaHei"/>
                 <a:cs typeface="Microsoft YaHei"/>
               </a:rPr>
-              <a:t>当前能力</a:t>
+              <a:t>证据内容</a:t>
             </a:r>
           </a:p>
         </p:txBody>
@@ -4324,7 +4690,7 @@
         </p:nvSpPr>
         <p:spPr>
           <a:xfrm>
-            <a:off x="640080" y="1828800"/>
+            <a:off x="6842903" y="1828800"/>
             <a:ext cx="4708711" cy="548639"/>
           </a:xfrm>
           <a:prstGeom prst="rect">
@@ -4355,7 +4721,7 @@
                 <a:ea typeface="Microsoft YaHei Light"/>
                 <a:cs typeface="Microsoft YaHei Light"/>
               </a:rPr>
-              <a:t>项目级统计、执行列表、失败类型标签、历史执行记录和详情跳转。</a:t>
+              <a:t>步骤编号、动作类型、目标文本、耗时、截图、断言结果和页面状态。</a:t>
             </a:r>
           </a:p>
         </p:txBody>
@@ -4368,7 +4734,7 @@
         </p:nvSpPr>
         <p:spPr>
           <a:xfrm>
-            <a:off x="502920" y="2532888"/>
+            <a:off x="6705743" y="2532888"/>
             <a:ext cx="4983031" cy="1051560"/>
           </a:xfrm>
           <a:prstGeom prst="roundRect">
@@ -4413,7 +4779,7 @@
         </p:nvSpPr>
         <p:spPr>
           <a:xfrm>
-            <a:off x="640080" y="2624328"/>
+            <a:off x="6842903" y="2624328"/>
             <a:ext cx="4708711" cy="320040"/>
           </a:xfrm>
           <a:prstGeom prst="rect">
@@ -4444,7 +4810,7 @@
                 <a:ea typeface="Microsoft YaHei"/>
                 <a:cs typeface="Microsoft YaHei"/>
               </a:rPr>
-              <a:t>管理价值</a:t>
+              <a:t>排障价值</a:t>
             </a:r>
           </a:p>
         </p:txBody>
@@ -4457,7 +4823,7 @@
         </p:nvSpPr>
         <p:spPr>
           <a:xfrm>
-            <a:off x="640080" y="2990088"/>
+            <a:off x="6842903" y="2990088"/>
             <a:ext cx="4708711" cy="548639"/>
           </a:xfrm>
           <a:prstGeom prst="rect">
@@ -4488,7 +4854,7 @@
                 <a:ea typeface="Microsoft YaHei Light"/>
                 <a:cs typeface="Microsoft YaHei Light"/>
               </a:rPr>
-              <a:t>团队可以从执行历史中观察回归稳定性，而不只是查看单次脚本输出。</a:t>
+              <a:t>失败时可以看到发生在哪一步、页面实际长什么样、断言目标是否匹配。</a:t>
             </a:r>
           </a:p>
         </p:txBody>
@@ -4501,7 +4867,7 @@
         </p:nvSpPr>
         <p:spPr>
           <a:xfrm>
-            <a:off x="502920" y="3694176"/>
+            <a:off x="6705743" y="3694176"/>
             <a:ext cx="4983031" cy="1051560"/>
           </a:xfrm>
           <a:prstGeom prst="roundRect">
@@ -4546,7 +4912,7 @@
         </p:nvSpPr>
         <p:spPr>
           <a:xfrm>
-            <a:off x="640080" y="3785615"/>
+            <a:off x="6842903" y="3785615"/>
             <a:ext cx="4708711" cy="320040"/>
           </a:xfrm>
           <a:prstGeom prst="rect">
@@ -4577,7 +4943,7 @@
                 <a:ea typeface="Microsoft YaHei"/>
                 <a:cs typeface="Microsoft YaHei"/>
               </a:rPr>
-              <a:t>扩展方向</a:t>
+              <a:t>AI 分析基础</a:t>
             </a:r>
           </a:p>
         </p:txBody>
@@ -4590,7 +4956,7 @@
         </p:nvSpPr>
         <p:spPr>
           <a:xfrm>
-            <a:off x="640080" y="4151376"/>
+            <a:off x="6842903" y="4151376"/>
             <a:ext cx="4708711" cy="548639"/>
           </a:xfrm>
           <a:prstGeom prst="rect">
@@ -4621,7 +4987,7 @@
                 <a:ea typeface="Microsoft YaHei Light"/>
                 <a:cs typeface="Microsoft YaHei Light"/>
               </a:rPr>
-              <a:t>后续可加入趋势图、失败原因聚合、AI 失败分析和批量回归编排。</a:t>
+              <a:t>结构化报告未来可输入 AI 失败分析模块，自动判断数据、定位、断言或环境问题。</a:t>
             </a:r>
           </a:p>
         </p:txBody>
@@ -4726,7 +5092,7 @@
                 <a:ea typeface="Microsoft YaHei"/>
                 <a:cs typeface="Microsoft YaHei"/>
               </a:rPr>
-              <a:t>应用场景与推广计划</a:t>
+              <a:t>功能证据 6：项目级报告中心</a:t>
             </a:r>
           </a:p>
         </p:txBody>
@@ -4770,7 +5136,7 @@
                 <a:ea typeface="Microsoft YaHei Light"/>
                 <a:cs typeface="Microsoft YaHei Light"/>
               </a:rPr>
-              <a:t>先服务高频 Web 回归，再沉淀行业模板和企业化能力。</a:t>
+              <a:t>从单次执行上升到项目维度质量观察。</a:t>
             </a:r>
           </a:p>
         </p:txBody>
@@ -4814,7 +5180,628 @@
                 <a:ea typeface="Microsoft YaHei"/>
                 <a:cs typeface="Microsoft YaHei"/>
               </a:rPr>
-              <a:t>12/16</a:t>
+              <a:t>12/17</a:t>
+            </a:r>
+          </a:p>
+        </p:txBody>
+      </p:sp>
+      <p:pic>
+        <p:nvPicPr>
+          <p:cNvPr id="6" name="Picture 5" descr="Snipaste_2026-05-13_19-48-46.png"/>
+          <p:cNvPicPr>
+            <a:picLocks noChangeAspect="1"/>
+          </p:cNvPicPr>
+          <p:nvPr/>
+        </p:nvPicPr>
+        <p:blipFill>
+          <a:blip r:embed="rId2"/>
+          <a:stretch>
+            <a:fillRect/>
+          </a:stretch>
+        </p:blipFill>
+        <p:spPr>
+          <a:xfrm>
+            <a:off x="5760271" y="1841771"/>
+            <a:ext cx="5928503" cy="3128737"/>
+          </a:xfrm>
+          <a:prstGeom prst="rect">
+            <a:avLst/>
+          </a:prstGeom>
+          <a:ln w="12700">
+            <a:solidFill>
+              <a:srgbClr val="E5E7EB"/>
+            </a:solidFill>
+          </a:ln>
+        </p:spPr>
+      </p:pic>
+      <p:sp>
+        <p:nvSpPr>
+          <p:cNvPr id="7" name="Rounded Rectangle 6"/>
+          <p:cNvSpPr/>
+          <p:nvPr/>
+        </p:nvSpPr>
+        <p:spPr>
+          <a:xfrm>
+            <a:off x="502920" y="1371600"/>
+            <a:ext cx="4983031" cy="1051560"/>
+          </a:xfrm>
+          <a:prstGeom prst="roundRect">
+            <a:avLst/>
+          </a:prstGeom>
+          <a:solidFill>
+            <a:srgbClr val="FFFFFF"/>
+          </a:solidFill>
+          <a:ln w="10160">
+            <a:solidFill>
+              <a:srgbClr val="E5E7EB"/>
+            </a:solidFill>
+          </a:ln>
+        </p:spPr>
+        <p:style>
+          <a:lnRef idx="1">
+            <a:schemeClr val="accent1"/>
+          </a:lnRef>
+          <a:fillRef idx="3">
+            <a:schemeClr val="accent1"/>
+          </a:fillRef>
+          <a:effectRef idx="2">
+            <a:schemeClr val="accent1"/>
+          </a:effectRef>
+          <a:fontRef idx="minor">
+            <a:schemeClr val="lt1"/>
+          </a:fontRef>
+        </p:style>
+        <p:txBody>
+          <a:bodyPr rtlCol="0" anchor="ctr"/>
+          <a:lstStyle/>
+          <a:p>
+            <a:pPr algn="ctr"/>
+          </a:p>
+        </p:txBody>
+      </p:sp>
+      <p:sp>
+        <p:nvSpPr>
+          <p:cNvPr id="8" name="TextBox 7"/>
+          <p:cNvSpPr txBox="1"/>
+          <p:nvPr/>
+        </p:nvSpPr>
+        <p:spPr>
+          <a:xfrm>
+            <a:off x="640080" y="1463040"/>
+            <a:ext cx="4708711" cy="320040"/>
+          </a:xfrm>
+          <a:prstGeom prst="rect">
+            <a:avLst/>
+          </a:prstGeom>
+          <a:noFill/>
+          <a:ln>
+            <a:noFill/>
+          </a:ln>
+        </p:spPr>
+        <p:txBody>
+          <a:bodyPr wrap="square" lIns="137160" rIns="137160" tIns="137160" bIns="137160" anchor="t">
+            <a:spAutoFit/>
+          </a:bodyPr>
+          <a:lstStyle/>
+          <a:p>
+            <a:pPr algn="l">
+              <a:spcAft>
+                <a:spcPts val="300"/>
+              </a:spcAft>
+            </a:pPr>
+            <a:r>
+              <a:rPr sz="1500" b="1" lang="zh-CN">
+                <a:solidFill>
+                  <a:srgbClr val="2563EB"/>
+                </a:solidFill>
+                <a:latin typeface="Microsoft YaHei"/>
+                <a:ea typeface="Microsoft YaHei"/>
+                <a:cs typeface="Microsoft YaHei"/>
+              </a:rPr>
+              <a:t>当前能力</a:t>
+            </a:r>
+          </a:p>
+        </p:txBody>
+      </p:sp>
+      <p:sp>
+        <p:nvSpPr>
+          <p:cNvPr id="9" name="TextBox 8"/>
+          <p:cNvSpPr txBox="1"/>
+          <p:nvPr/>
+        </p:nvSpPr>
+        <p:spPr>
+          <a:xfrm>
+            <a:off x="640080" y="1828800"/>
+            <a:ext cx="4708711" cy="548639"/>
+          </a:xfrm>
+          <a:prstGeom prst="rect">
+            <a:avLst/>
+          </a:prstGeom>
+          <a:noFill/>
+          <a:ln>
+            <a:noFill/>
+          </a:ln>
+        </p:spPr>
+        <p:txBody>
+          <a:bodyPr wrap="square" lIns="137160" rIns="137160" tIns="137160" bIns="137160" anchor="t">
+            <a:spAutoFit/>
+          </a:bodyPr>
+          <a:lstStyle/>
+          <a:p>
+            <a:pPr algn="l">
+              <a:spcAft>
+                <a:spcPts val="300"/>
+              </a:spcAft>
+            </a:pPr>
+            <a:r>
+              <a:rPr sz="1100" b="0" lang="zh-CN">
+                <a:solidFill>
+                  <a:srgbClr val="4B5563"/>
+                </a:solidFill>
+                <a:latin typeface="Microsoft YaHei Light"/>
+                <a:ea typeface="Microsoft YaHei Light"/>
+                <a:cs typeface="Microsoft YaHei Light"/>
+              </a:rPr>
+              <a:t>项目级统计、执行列表、失败类型标签、历史执行记录和详情跳转。</a:t>
+            </a:r>
+          </a:p>
+        </p:txBody>
+      </p:sp>
+      <p:sp>
+        <p:nvSpPr>
+          <p:cNvPr id="10" name="Rounded Rectangle 9"/>
+          <p:cNvSpPr/>
+          <p:nvPr/>
+        </p:nvSpPr>
+        <p:spPr>
+          <a:xfrm>
+            <a:off x="502920" y="2532888"/>
+            <a:ext cx="4983031" cy="1051560"/>
+          </a:xfrm>
+          <a:prstGeom prst="roundRect">
+            <a:avLst/>
+          </a:prstGeom>
+          <a:solidFill>
+            <a:srgbClr val="FFFFFF"/>
+          </a:solidFill>
+          <a:ln w="10160">
+            <a:solidFill>
+              <a:srgbClr val="E5E7EB"/>
+            </a:solidFill>
+          </a:ln>
+        </p:spPr>
+        <p:style>
+          <a:lnRef idx="1">
+            <a:schemeClr val="accent1"/>
+          </a:lnRef>
+          <a:fillRef idx="3">
+            <a:schemeClr val="accent1"/>
+          </a:fillRef>
+          <a:effectRef idx="2">
+            <a:schemeClr val="accent1"/>
+          </a:effectRef>
+          <a:fontRef idx="minor">
+            <a:schemeClr val="lt1"/>
+          </a:fontRef>
+        </p:style>
+        <p:txBody>
+          <a:bodyPr rtlCol="0" anchor="ctr"/>
+          <a:lstStyle/>
+          <a:p>
+            <a:pPr algn="ctr"/>
+          </a:p>
+        </p:txBody>
+      </p:sp>
+      <p:sp>
+        <p:nvSpPr>
+          <p:cNvPr id="11" name="TextBox 10"/>
+          <p:cNvSpPr txBox="1"/>
+          <p:nvPr/>
+        </p:nvSpPr>
+        <p:spPr>
+          <a:xfrm>
+            <a:off x="640080" y="2624328"/>
+            <a:ext cx="4708711" cy="320040"/>
+          </a:xfrm>
+          <a:prstGeom prst="rect">
+            <a:avLst/>
+          </a:prstGeom>
+          <a:noFill/>
+          <a:ln>
+            <a:noFill/>
+          </a:ln>
+        </p:spPr>
+        <p:txBody>
+          <a:bodyPr wrap="square" lIns="137160" rIns="137160" tIns="137160" bIns="137160" anchor="t">
+            <a:spAutoFit/>
+          </a:bodyPr>
+          <a:lstStyle/>
+          <a:p>
+            <a:pPr algn="l">
+              <a:spcAft>
+                <a:spcPts val="300"/>
+              </a:spcAft>
+            </a:pPr>
+            <a:r>
+              <a:rPr sz="1500" b="1" lang="zh-CN">
+                <a:solidFill>
+                  <a:srgbClr val="16A34A"/>
+                </a:solidFill>
+                <a:latin typeface="Microsoft YaHei"/>
+                <a:ea typeface="Microsoft YaHei"/>
+                <a:cs typeface="Microsoft YaHei"/>
+              </a:rPr>
+              <a:t>管理价值</a:t>
+            </a:r>
+          </a:p>
+        </p:txBody>
+      </p:sp>
+      <p:sp>
+        <p:nvSpPr>
+          <p:cNvPr id="12" name="TextBox 11"/>
+          <p:cNvSpPr txBox="1"/>
+          <p:nvPr/>
+        </p:nvSpPr>
+        <p:spPr>
+          <a:xfrm>
+            <a:off x="640080" y="2990088"/>
+            <a:ext cx="4708711" cy="548639"/>
+          </a:xfrm>
+          <a:prstGeom prst="rect">
+            <a:avLst/>
+          </a:prstGeom>
+          <a:noFill/>
+          <a:ln>
+            <a:noFill/>
+          </a:ln>
+        </p:spPr>
+        <p:txBody>
+          <a:bodyPr wrap="square" lIns="137160" rIns="137160" tIns="137160" bIns="137160" anchor="t">
+            <a:spAutoFit/>
+          </a:bodyPr>
+          <a:lstStyle/>
+          <a:p>
+            <a:pPr algn="l">
+              <a:spcAft>
+                <a:spcPts val="300"/>
+              </a:spcAft>
+            </a:pPr>
+            <a:r>
+              <a:rPr sz="1100" b="0" lang="zh-CN">
+                <a:solidFill>
+                  <a:srgbClr val="4B5563"/>
+                </a:solidFill>
+                <a:latin typeface="Microsoft YaHei Light"/>
+                <a:ea typeface="Microsoft YaHei Light"/>
+                <a:cs typeface="Microsoft YaHei Light"/>
+              </a:rPr>
+              <a:t>团队可以从执行历史中观察回归稳定性，而不只是查看单次脚本输出。</a:t>
+            </a:r>
+          </a:p>
+        </p:txBody>
+      </p:sp>
+      <p:sp>
+        <p:nvSpPr>
+          <p:cNvPr id="13" name="Rounded Rectangle 12"/>
+          <p:cNvSpPr/>
+          <p:nvPr/>
+        </p:nvSpPr>
+        <p:spPr>
+          <a:xfrm>
+            <a:off x="502920" y="3694176"/>
+            <a:ext cx="4983031" cy="1051560"/>
+          </a:xfrm>
+          <a:prstGeom prst="roundRect">
+            <a:avLst/>
+          </a:prstGeom>
+          <a:solidFill>
+            <a:srgbClr val="FFFFFF"/>
+          </a:solidFill>
+          <a:ln w="10160">
+            <a:solidFill>
+              <a:srgbClr val="E5E7EB"/>
+            </a:solidFill>
+          </a:ln>
+        </p:spPr>
+        <p:style>
+          <a:lnRef idx="1">
+            <a:schemeClr val="accent1"/>
+          </a:lnRef>
+          <a:fillRef idx="3">
+            <a:schemeClr val="accent1"/>
+          </a:fillRef>
+          <a:effectRef idx="2">
+            <a:schemeClr val="accent1"/>
+          </a:effectRef>
+          <a:fontRef idx="minor">
+            <a:schemeClr val="lt1"/>
+          </a:fontRef>
+        </p:style>
+        <p:txBody>
+          <a:bodyPr rtlCol="0" anchor="ctr"/>
+          <a:lstStyle/>
+          <a:p>
+            <a:pPr algn="ctr"/>
+          </a:p>
+        </p:txBody>
+      </p:sp>
+      <p:sp>
+        <p:nvSpPr>
+          <p:cNvPr id="14" name="TextBox 13"/>
+          <p:cNvSpPr txBox="1"/>
+          <p:nvPr/>
+        </p:nvSpPr>
+        <p:spPr>
+          <a:xfrm>
+            <a:off x="640080" y="3785615"/>
+            <a:ext cx="4708711" cy="320040"/>
+          </a:xfrm>
+          <a:prstGeom prst="rect">
+            <a:avLst/>
+          </a:prstGeom>
+          <a:noFill/>
+          <a:ln>
+            <a:noFill/>
+          </a:ln>
+        </p:spPr>
+        <p:txBody>
+          <a:bodyPr wrap="square" lIns="137160" rIns="137160" tIns="137160" bIns="137160" anchor="t">
+            <a:spAutoFit/>
+          </a:bodyPr>
+          <a:lstStyle/>
+          <a:p>
+            <a:pPr algn="l">
+              <a:spcAft>
+                <a:spcPts val="300"/>
+              </a:spcAft>
+            </a:pPr>
+            <a:r>
+              <a:rPr sz="1500" b="1" lang="zh-CN">
+                <a:solidFill>
+                  <a:srgbClr val="D97706"/>
+                </a:solidFill>
+                <a:latin typeface="Microsoft YaHei"/>
+                <a:ea typeface="Microsoft YaHei"/>
+                <a:cs typeface="Microsoft YaHei"/>
+              </a:rPr>
+              <a:t>扩展方向</a:t>
+            </a:r>
+          </a:p>
+        </p:txBody>
+      </p:sp>
+      <p:sp>
+        <p:nvSpPr>
+          <p:cNvPr id="15" name="TextBox 14"/>
+          <p:cNvSpPr txBox="1"/>
+          <p:nvPr/>
+        </p:nvSpPr>
+        <p:spPr>
+          <a:xfrm>
+            <a:off x="640080" y="4151376"/>
+            <a:ext cx="4708711" cy="548639"/>
+          </a:xfrm>
+          <a:prstGeom prst="rect">
+            <a:avLst/>
+          </a:prstGeom>
+          <a:noFill/>
+          <a:ln>
+            <a:noFill/>
+          </a:ln>
+        </p:spPr>
+        <p:txBody>
+          <a:bodyPr wrap="square" lIns="137160" rIns="137160" tIns="137160" bIns="137160" anchor="t">
+            <a:spAutoFit/>
+          </a:bodyPr>
+          <a:lstStyle/>
+          <a:p>
+            <a:pPr algn="l">
+              <a:spcAft>
+                <a:spcPts val="300"/>
+              </a:spcAft>
+            </a:pPr>
+            <a:r>
+              <a:rPr sz="1100" b="0" lang="zh-CN">
+                <a:solidFill>
+                  <a:srgbClr val="4B5563"/>
+                </a:solidFill>
+                <a:latin typeface="Microsoft YaHei Light"/>
+                <a:ea typeface="Microsoft YaHei Light"/>
+                <a:cs typeface="Microsoft YaHei Light"/>
+              </a:rPr>
+              <a:t>后续可加入趋势图、失败原因聚合、AI 失败分析和批量回归编排。</a:t>
+            </a:r>
+          </a:p>
+        </p:txBody>
+      </p:sp>
+    </p:spTree>
+  </p:cSld>
+  <p:clrMapOvr>
+    <a:masterClrMapping/>
+  </p:clrMapOvr>
+</p:sld>
+</file>
+
+<file path=ppt/slides/slide13.xml><?xml version="1.0" encoding="utf-8"?>
+<p:sld xmlns:a="http://schemas.openxmlformats.org/drawingml/2006/main" xmlns:p="http://schemas.openxmlformats.org/presentationml/2006/main" xmlns:r="http://schemas.openxmlformats.org/officeDocument/2006/relationships">
+  <p:cSld>
+    <p:spTree>
+      <p:nvGrpSpPr>
+        <p:cNvPr id="1" name=""/>
+        <p:cNvGrpSpPr/>
+        <p:nvPr/>
+      </p:nvGrpSpPr>
+      <p:grpSpPr/>
+      <p:sp>
+        <p:nvSpPr>
+          <p:cNvPr id="2" name="Rectangle 1"/>
+          <p:cNvSpPr/>
+          <p:nvPr/>
+        </p:nvSpPr>
+        <p:spPr>
+          <a:xfrm>
+            <a:off x="0" y="0"/>
+            <a:ext cx="12191695" cy="6858000"/>
+          </a:xfrm>
+          <a:prstGeom prst="rect">
+            <a:avLst/>
+          </a:prstGeom>
+          <a:solidFill>
+            <a:srgbClr val="F8FAFC"/>
+          </a:solidFill>
+          <a:ln>
+            <a:noFill/>
+          </a:ln>
+        </p:spPr>
+        <p:style>
+          <a:lnRef idx="1">
+            <a:schemeClr val="accent1"/>
+          </a:lnRef>
+          <a:fillRef idx="3">
+            <a:schemeClr val="accent1"/>
+          </a:fillRef>
+          <a:effectRef idx="2">
+            <a:schemeClr val="accent1"/>
+          </a:effectRef>
+          <a:fontRef idx="minor">
+            <a:schemeClr val="lt1"/>
+          </a:fontRef>
+        </p:style>
+        <p:txBody>
+          <a:bodyPr rtlCol="0" anchor="ctr"/>
+          <a:lstStyle/>
+          <a:p>
+            <a:pPr algn="ctr"/>
+          </a:p>
+        </p:txBody>
+      </p:sp>
+      <p:sp>
+        <p:nvSpPr>
+          <p:cNvPr id="3" name="TextBox 2"/>
+          <p:cNvSpPr txBox="1"/>
+          <p:nvPr/>
+        </p:nvSpPr>
+        <p:spPr>
+          <a:xfrm>
+            <a:off x="502920" y="320040"/>
+            <a:ext cx="10408615" cy="457200"/>
+          </a:xfrm>
+          <a:prstGeom prst="rect">
+            <a:avLst/>
+          </a:prstGeom>
+          <a:noFill/>
+          <a:ln>
+            <a:noFill/>
+          </a:ln>
+        </p:spPr>
+        <p:txBody>
+          <a:bodyPr wrap="square" lIns="137160" rIns="137160" tIns="137160" bIns="137160" anchor="t">
+            <a:spAutoFit/>
+          </a:bodyPr>
+          <a:lstStyle/>
+          <a:p>
+            <a:pPr algn="l">
+              <a:spcAft>
+                <a:spcPts val="300"/>
+              </a:spcAft>
+            </a:pPr>
+            <a:r>
+              <a:rPr sz="2800" b="1" lang="zh-CN">
+                <a:solidFill>
+                  <a:srgbClr val="111827"/>
+                </a:solidFill>
+                <a:latin typeface="Microsoft YaHei"/>
+                <a:ea typeface="Microsoft YaHei"/>
+                <a:cs typeface="Microsoft YaHei"/>
+              </a:rPr>
+              <a:t>应用场景与推广计划</a:t>
+            </a:r>
+          </a:p>
+        </p:txBody>
+      </p:sp>
+      <p:sp>
+        <p:nvSpPr>
+          <p:cNvPr id="4" name="TextBox 3"/>
+          <p:cNvSpPr txBox="1"/>
+          <p:nvPr/>
+        </p:nvSpPr>
+        <p:spPr>
+          <a:xfrm>
+            <a:off x="521208" y="777240"/>
+            <a:ext cx="10271455" cy="320040"/>
+          </a:xfrm>
+          <a:prstGeom prst="rect">
+            <a:avLst/>
+          </a:prstGeom>
+          <a:noFill/>
+          <a:ln>
+            <a:noFill/>
+          </a:ln>
+        </p:spPr>
+        <p:txBody>
+          <a:bodyPr wrap="square" lIns="137160" rIns="137160" tIns="137160" bIns="137160" anchor="t">
+            <a:spAutoFit/>
+          </a:bodyPr>
+          <a:lstStyle/>
+          <a:p>
+            <a:pPr algn="l">
+              <a:spcAft>
+                <a:spcPts val="300"/>
+              </a:spcAft>
+            </a:pPr>
+            <a:r>
+              <a:rPr sz="1500" b="0" lang="zh-CN">
+                <a:solidFill>
+                  <a:srgbClr val="4B5563"/>
+                </a:solidFill>
+                <a:latin typeface="Microsoft YaHei Light"/>
+                <a:ea typeface="Microsoft YaHei Light"/>
+                <a:cs typeface="Microsoft YaHei Light"/>
+              </a:rPr>
+              <a:t>先服务高频 Web 回归，再沉淀行业模板和企业化能力。</a:t>
+            </a:r>
+          </a:p>
+        </p:txBody>
+      </p:sp>
+      <p:sp>
+        <p:nvSpPr>
+          <p:cNvPr id="5" name="TextBox 4"/>
+          <p:cNvSpPr txBox="1"/>
+          <p:nvPr/>
+        </p:nvSpPr>
+        <p:spPr>
+          <a:xfrm>
+            <a:off x="10957255" y="365759"/>
+            <a:ext cx="731520" cy="228600"/>
+          </a:xfrm>
+          <a:prstGeom prst="rect">
+            <a:avLst/>
+          </a:prstGeom>
+          <a:noFill/>
+          <a:ln>
+            <a:noFill/>
+          </a:ln>
+        </p:spPr>
+        <p:txBody>
+          <a:bodyPr wrap="square" lIns="137160" rIns="137160" tIns="137160" bIns="137160" anchor="t">
+            <a:spAutoFit/>
+          </a:bodyPr>
+          <a:lstStyle/>
+          <a:p>
+            <a:pPr algn="r">
+              <a:spcAft>
+                <a:spcPts val="300"/>
+              </a:spcAft>
+            </a:pPr>
+            <a:r>
+              <a:rPr sz="1000" b="0" lang="zh-CN">
+                <a:solidFill>
+                  <a:srgbClr val="4B5563"/>
+                </a:solidFill>
+                <a:latin typeface="Microsoft YaHei"/>
+                <a:ea typeface="Microsoft YaHei"/>
+                <a:cs typeface="Microsoft YaHei"/>
+              </a:rPr>
+              <a:t>13/17</a:t>
             </a:r>
           </a:p>
         </p:txBody>
@@ -5478,7 +6465,7 @@
 </p:sld>
 </file>
 
-<file path=ppt/slides/slide13.xml><?xml version="1.0" encoding="utf-8"?>
+<file path=ppt/slides/slide14.xml><?xml version="1.0" encoding="utf-8"?>
 <p:sld xmlns:a="http://schemas.openxmlformats.org/drawingml/2006/main" xmlns:p="http://schemas.openxmlformats.org/presentationml/2006/main" xmlns:r="http://schemas.openxmlformats.org/officeDocument/2006/relationships">
   <p:cSld>
     <p:spTree>
@@ -5658,7 +6645,7 @@
                 <a:ea typeface="Microsoft YaHei"/>
                 <a:cs typeface="Microsoft YaHei"/>
               </a:rPr>
-              <a:t>13/16</a:t>
+              <a:t>14/17</a:t>
             </a:r>
           </a:p>
         </p:txBody>
@@ -6275,7 +7262,7 @@
 </p:sld>
 </file>
 
-<file path=ppt/slides/slide14.xml><?xml version="1.0" encoding="utf-8"?>
+<file path=ppt/slides/slide15.xml><?xml version="1.0" encoding="utf-8"?>
 <p:sld xmlns:a="http://schemas.openxmlformats.org/drawingml/2006/main" xmlns:p="http://schemas.openxmlformats.org/presentationml/2006/main" xmlns:r="http://schemas.openxmlformats.org/officeDocument/2006/relationships">
   <p:cSld>
     <p:spTree>
@@ -6411,7 +7398,7 @@
                 <a:ea typeface="Microsoft YaHei Light"/>
                 <a:cs typeface="Microsoft YaHei Light"/>
               </a:rPr>
-              <a:t>价值来自减少重复回归、降低脚本维护和缩短失败排查时间。</a:t>
+              <a:t>AI 测试自动化市场 2025 年已达 $8.81B，预计 2032 年 $35.96B（CAGR 22.3%）。价值来自减少重复回归、降低脚本维护和缩短失败排查时间。</a:t>
             </a:r>
           </a:p>
         </p:txBody>
@@ -6455,7 +7442,7 @@
                 <a:ea typeface="Microsoft YaHei"/>
                 <a:cs typeface="Microsoft YaHei"/>
               </a:rPr>
-              <a:t>14/16</a:t>
+              <a:t>15/17</a:t>
             </a:r>
           </a:p>
         </p:txBody>
@@ -6479,9 +7466,9 @@
                 <a:tableStyleId>{5C22544A-7EE6-4342-B048-85BDC9FD1C3A}</a:tableStyleId>
               </a:tblPr>
               <a:tblGrid>
-                <a:gridCol w="2013453"/>
+                <a:gridCol w="1789736"/>
                 <a:gridCol w="5369210"/>
-                <a:gridCol w="3803190"/>
+                <a:gridCol w="4026907"/>
               </a:tblGrid>
               <a:tr h="484632">
                 <a:tc>
@@ -6522,7 +7509,7 @@
                           <a:ea typeface="Microsoft YaHei"/>
                           <a:cs typeface="Microsoft YaHei"/>
                         </a:rPr>
-                        <a:t>示例/假设</a:t>
+                        <a:t>行业数据</a:t>
                       </a:r>
                     </a:p>
                   </a:txBody>
@@ -6546,7 +7533,7 @@
                           <a:ea typeface="Microsoft YaHei"/>
                           <a:cs typeface="Microsoft YaHei"/>
                         </a:rPr>
-                        <a:t>收益判断</a:t>
+                        <a:t>本项目收益判断</a:t>
                       </a:r>
                     </a:p>
                   </a:txBody>
@@ -6572,7 +7559,7 @@
                           <a:ea typeface="Microsoft YaHei"/>
                           <a:cs typeface="Microsoft YaHei"/>
                         </a:rPr>
-                        <a:t>人工回归</a:t>
+                        <a:t>人工回归成本</a:t>
                       </a:r>
                     </a:p>
                   </a:txBody>
@@ -6596,7 +7583,7 @@
                           <a:ea typeface="Microsoft YaHei"/>
                           <a:cs typeface="Microsoft YaHei"/>
                         </a:rPr>
-                        <a:t>团队每月 4 次发布，每次核心回归 2 人天，按 800 元/人天估算，月度人工回归约 6400 元</a:t>
+                        <a:t>Virtuoso (2025)：中型团队月度手动回归成本约 $50K-93K；企业级年损耗 $1M+</a:t>
                       </a:r>
                     </a:p>
                   </a:txBody>
@@ -6620,7 +7607,7 @@
                           <a:ea typeface="Microsoft YaHei"/>
                           <a:cs typeface="Microsoft YaHei"/>
                         </a:rPr>
-                        <a:t>若平台覆盖 50%-70% 重复回归，每月可节省约 3200-4480 元</a:t>
+                        <a:t>若平台覆盖 50%-70% 重复回归，每月可节省约 ¥3200-4480 元（小团队口径）</a:t>
                       </a:r>
                     </a:p>
                   </a:txBody>
@@ -6646,7 +7633,7 @@
                           <a:ea typeface="Microsoft YaHei"/>
                           <a:cs typeface="Microsoft YaHei"/>
                         </a:rPr>
-                        <a:t>脚本维护</a:t>
+                        <a:t>脚本维护负担</a:t>
                       </a:r>
                     </a:p>
                   </a:txBody>
@@ -6670,7 +7657,7 @@
                           <a:ea typeface="Microsoft YaHei"/>
                           <a:cs typeface="Microsoft YaHei"/>
                         </a:rPr>
-                        <a:t>页面改版、同名按钮、动态内容导致定位失效</a:t>
+                        <a:t>传统自动化 60% 的 QA 工作量花在维护上；AI 自愈定位可将维护降至 ~5%</a:t>
                       </a:r>
                     </a:p>
                   </a:txBody>
@@ -6694,7 +7681,7 @@
                           <a:ea typeface="Microsoft YaHei"/>
                           <a:cs typeface="Microsoft YaHei"/>
                         </a:rPr>
-                        <a:t>混合定位和人工修正沉淀可减少重复维护</a:t>
+                        <a:t>混合定位 Tier 0 人工修正沉淀 + DOM 语义定位，减少页面变更导致的重复维护</a:t>
                       </a:r>
                     </a:p>
                   </a:txBody>
@@ -6720,7 +7707,7 @@
                           <a:ea typeface="Microsoft YaHei"/>
                           <a:cs typeface="Microsoft YaHei"/>
                         </a:rPr>
-                        <a:t>失败排查</a:t>
+                        <a:t>失败排查效率</a:t>
                       </a:r>
                     </a:p>
                   </a:txBody>
@@ -6744,7 +7731,7 @@
                           <a:ea typeface="Microsoft YaHei"/>
                           <a:cs typeface="Microsoft YaHei"/>
                         </a:rPr>
-                        <a:t>传统报告只给 pass/fail，定位失败原因依赖人工复现</a:t>
+                        <a:t>Forge-Quality (2025)：每次失败平均排障 30+ 分钟；年浪费 $67K-89K 在误报排查上</a:t>
                       </a:r>
                     </a:p>
                   </a:txBody>
@@ -6768,7 +7755,7 @@
                           <a:ea typeface="Microsoft YaHei"/>
                           <a:cs typeface="Microsoft YaHei"/>
                         </a:rPr>
-                        <a:t>步骤级证据让问题更快归因到数据、断言、定位或环境</a:t>
+                        <a:t>步骤级证据（截图+DOM+候选定位+日志）让问题更快归因到数据、断言、定位或环境</a:t>
                       </a:r>
                     </a:p>
                   </a:txBody>
@@ -6794,7 +7781,7 @@
                           <a:ea typeface="Microsoft YaHei"/>
                           <a:cs typeface="Microsoft YaHei"/>
                         </a:rPr>
-                        <a:t>商业模式</a:t>
+                        <a:t>商业落地路径</a:t>
                       </a:r>
                     </a:p>
                   </a:txBody>
@@ -6818,7 +7805,7 @@
                           <a:ea typeface="Microsoft YaHei"/>
                           <a:cs typeface="Microsoft YaHei"/>
                         </a:rPr>
-                        <a:t>SaaS 订阅、私有化部署、测试服务套餐、CI/CD 集成</a:t>
+                        <a:t>已落地案例：Wix 用 AI 视觉测试将 QA 从 70h 降至 5h；TreviPay 维护减半扩至 1000+ 用例</a:t>
                       </a:r>
                     </a:p>
                   </a:txBody>
@@ -6842,7 +7829,7 @@
                           <a:ea typeface="Microsoft YaHei"/>
                           <a:cs typeface="Microsoft YaHei"/>
                         </a:rPr>
-                        <a:t>适合从中小团队试用和测试服务交付切入</a:t>
+                        <a:t>适合从中小团队 SaaS 订阅、测试服务套餐和 CI/CD 集成切入</a:t>
                       </a:r>
                     </a:p>
                   </a:txBody>
@@ -6896,7 +7883,7 @@
                 <a:ea typeface="Microsoft YaHei Light"/>
                 <a:cs typeface="Microsoft YaHei Light"/>
               </a:rPr>
-              <a:t>说明：ROI 为示例测算，用于展示评估方法；真实 ROI 需结合团队人力单价与回归频率。</a:t>
+              <a:t>数据来源：MarketsandMarkets AI Test Automation Report (2025)、VirtuosoQA ROI Calculator (2025)、Forge-Quality AI Testing Report (2025)。</a:t>
             </a:r>
           </a:p>
         </p:txBody>
@@ -6986,1004 +7973,6 @@
                 <a:cs typeface="Microsoft YaHei"/>
               </a:rPr>
               <a:t>当团队存在稳定 Web 产品、频繁发布和重复回归时，本项目具备清晰投入回报逻辑。</a:t>
-            </a:r>
-          </a:p>
-        </p:txBody>
-      </p:sp>
-    </p:spTree>
-  </p:cSld>
-  <p:clrMapOvr>
-    <a:masterClrMapping/>
-  </p:clrMapOvr>
-</p:sld>
-</file>
-
-<file path=ppt/slides/slide15.xml><?xml version="1.0" encoding="utf-8"?>
-<p:sld xmlns:a="http://schemas.openxmlformats.org/drawingml/2006/main" xmlns:p="http://schemas.openxmlformats.org/presentationml/2006/main" xmlns:r="http://schemas.openxmlformats.org/officeDocument/2006/relationships">
-  <p:cSld>
-    <p:spTree>
-      <p:nvGrpSpPr>
-        <p:cNvPr id="1" name=""/>
-        <p:cNvGrpSpPr/>
-        <p:nvPr/>
-      </p:nvGrpSpPr>
-      <p:grpSpPr/>
-      <p:sp>
-        <p:nvSpPr>
-          <p:cNvPr id="2" name="Rectangle 1"/>
-          <p:cNvSpPr/>
-          <p:nvPr/>
-        </p:nvSpPr>
-        <p:spPr>
-          <a:xfrm>
-            <a:off x="0" y="0"/>
-            <a:ext cx="12191695" cy="6858000"/>
-          </a:xfrm>
-          <a:prstGeom prst="rect">
-            <a:avLst/>
-          </a:prstGeom>
-          <a:solidFill>
-            <a:srgbClr val="F8FAFC"/>
-          </a:solidFill>
-          <a:ln>
-            <a:noFill/>
-          </a:ln>
-        </p:spPr>
-        <p:style>
-          <a:lnRef idx="1">
-            <a:schemeClr val="accent1"/>
-          </a:lnRef>
-          <a:fillRef idx="3">
-            <a:schemeClr val="accent1"/>
-          </a:fillRef>
-          <a:effectRef idx="2">
-            <a:schemeClr val="accent1"/>
-          </a:effectRef>
-          <a:fontRef idx="minor">
-            <a:schemeClr val="lt1"/>
-          </a:fontRef>
-        </p:style>
-        <p:txBody>
-          <a:bodyPr rtlCol="0" anchor="ctr"/>
-          <a:lstStyle/>
-          <a:p>
-            <a:pPr algn="ctr"/>
-          </a:p>
-        </p:txBody>
-      </p:sp>
-      <p:sp>
-        <p:nvSpPr>
-          <p:cNvPr id="3" name="TextBox 2"/>
-          <p:cNvSpPr txBox="1"/>
-          <p:nvPr/>
-        </p:nvSpPr>
-        <p:spPr>
-          <a:xfrm>
-            <a:off x="502920" y="320040"/>
-            <a:ext cx="10408615" cy="457200"/>
-          </a:xfrm>
-          <a:prstGeom prst="rect">
-            <a:avLst/>
-          </a:prstGeom>
-          <a:noFill/>
-          <a:ln>
-            <a:noFill/>
-          </a:ln>
-        </p:spPr>
-        <p:txBody>
-          <a:bodyPr wrap="square" lIns="137160" rIns="137160" tIns="137160" bIns="137160" anchor="t">
-            <a:spAutoFit/>
-          </a:bodyPr>
-          <a:lstStyle/>
-          <a:p>
-            <a:pPr algn="l">
-              <a:spcAft>
-                <a:spcPts val="300"/>
-              </a:spcAft>
-            </a:pPr>
-            <a:r>
-              <a:rPr sz="2800" b="1" lang="zh-CN">
-                <a:solidFill>
-                  <a:srgbClr val="111827"/>
-                </a:solidFill>
-                <a:latin typeface="Microsoft YaHei"/>
-                <a:ea typeface="Microsoft YaHei"/>
-                <a:cs typeface="Microsoft YaHei"/>
-              </a:rPr>
-              <a:t>后续路线图：从可演示闭环走向团队级质量平台</a:t>
-            </a:r>
-          </a:p>
-        </p:txBody>
-      </p:sp>
-      <p:sp>
-        <p:nvSpPr>
-          <p:cNvPr id="4" name="TextBox 3"/>
-          <p:cNvSpPr txBox="1"/>
-          <p:nvPr/>
-        </p:nvSpPr>
-        <p:spPr>
-          <a:xfrm>
-            <a:off x="521208" y="777240"/>
-            <a:ext cx="10271455" cy="320040"/>
-          </a:xfrm>
-          <a:prstGeom prst="rect">
-            <a:avLst/>
-          </a:prstGeom>
-          <a:noFill/>
-          <a:ln>
-            <a:noFill/>
-          </a:ln>
-        </p:spPr>
-        <p:txBody>
-          <a:bodyPr wrap="square" lIns="137160" rIns="137160" tIns="137160" bIns="137160" anchor="t">
-            <a:spAutoFit/>
-          </a:bodyPr>
-          <a:lstStyle/>
-          <a:p>
-            <a:pPr algn="l">
-              <a:spcAft>
-                <a:spcPts val="300"/>
-              </a:spcAft>
-            </a:pPr>
-            <a:r>
-              <a:rPr sz="1500" b="0" lang="zh-CN">
-                <a:solidFill>
-                  <a:srgbClr val="4B5563"/>
-                </a:solidFill>
-                <a:latin typeface="Microsoft YaHei Light"/>
-                <a:ea typeface="Microsoft YaHei Light"/>
-                <a:cs typeface="Microsoft YaHei Light"/>
-              </a:rPr>
-              <a:t>下一阶段重点不再是堆功能，而是稳定性、样本规模和企业化能力。</a:t>
-            </a:r>
-          </a:p>
-        </p:txBody>
-      </p:sp>
-      <p:sp>
-        <p:nvSpPr>
-          <p:cNvPr id="5" name="TextBox 4"/>
-          <p:cNvSpPr txBox="1"/>
-          <p:nvPr/>
-        </p:nvSpPr>
-        <p:spPr>
-          <a:xfrm>
-            <a:off x="10957255" y="365759"/>
-            <a:ext cx="731520" cy="228600"/>
-          </a:xfrm>
-          <a:prstGeom prst="rect">
-            <a:avLst/>
-          </a:prstGeom>
-          <a:noFill/>
-          <a:ln>
-            <a:noFill/>
-          </a:ln>
-        </p:spPr>
-        <p:txBody>
-          <a:bodyPr wrap="square" lIns="137160" rIns="137160" tIns="137160" bIns="137160" anchor="t">
-            <a:spAutoFit/>
-          </a:bodyPr>
-          <a:lstStyle/>
-          <a:p>
-            <a:pPr algn="r">
-              <a:spcAft>
-                <a:spcPts val="300"/>
-              </a:spcAft>
-            </a:pPr>
-            <a:r>
-              <a:rPr sz="1000" b="0" lang="zh-CN">
-                <a:solidFill>
-                  <a:srgbClr val="4B5563"/>
-                </a:solidFill>
-                <a:latin typeface="Microsoft YaHei"/>
-                <a:ea typeface="Microsoft YaHei"/>
-                <a:cs typeface="Microsoft YaHei"/>
-              </a:rPr>
-              <a:t>15/16</a:t>
-            </a:r>
-          </a:p>
-        </p:txBody>
-      </p:sp>
-      <p:sp>
-        <p:nvSpPr>
-          <p:cNvPr id="6" name="TextBox 5"/>
-          <p:cNvSpPr txBox="1"/>
-          <p:nvPr/>
-        </p:nvSpPr>
-        <p:spPr>
-          <a:xfrm>
-            <a:off x="502920" y="1371600"/>
-            <a:ext cx="2625013" cy="320040"/>
-          </a:xfrm>
-          <a:prstGeom prst="rect">
-            <a:avLst/>
-          </a:prstGeom>
-          <a:solidFill>
-            <a:srgbClr val="2563EB"/>
-          </a:solidFill>
-          <a:ln>
-            <a:noFill/>
-          </a:ln>
-        </p:spPr>
-        <p:txBody>
-          <a:bodyPr wrap="square" lIns="137160" rIns="137160" tIns="137160" bIns="137160" anchor="ctr">
-            <a:spAutoFit/>
-          </a:bodyPr>
-          <a:lstStyle/>
-          <a:p>
-            <a:pPr algn="ctr">
-              <a:spcAft>
-                <a:spcPts val="300"/>
-              </a:spcAft>
-            </a:pPr>
-            <a:r>
-              <a:rPr sz="1500" b="1" lang="zh-CN">
-                <a:solidFill>
-                  <a:srgbClr val="FFFFFF"/>
-                </a:solidFill>
-                <a:latin typeface="Microsoft YaHei"/>
-                <a:ea typeface="Microsoft YaHei"/>
-                <a:cs typeface="Microsoft YaHei"/>
-              </a:rPr>
-              <a:t>近期</a:t>
-            </a:r>
-          </a:p>
-        </p:txBody>
-      </p:sp>
-      <p:sp>
-        <p:nvSpPr>
-          <p:cNvPr id="7" name="Rounded Rectangle 6"/>
-          <p:cNvSpPr/>
-          <p:nvPr/>
-        </p:nvSpPr>
-        <p:spPr>
-          <a:xfrm>
-            <a:off x="502920" y="1783080"/>
-            <a:ext cx="2625013" cy="3063239"/>
-          </a:xfrm>
-          <a:prstGeom prst="roundRect">
-            <a:avLst/>
-          </a:prstGeom>
-          <a:solidFill>
-            <a:srgbClr val="FFFFFF"/>
-          </a:solidFill>
-          <a:ln w="10160">
-            <a:solidFill>
-              <a:srgbClr val="E5E7EB"/>
-            </a:solidFill>
-          </a:ln>
-        </p:spPr>
-        <p:style>
-          <a:lnRef idx="1">
-            <a:schemeClr val="accent1"/>
-          </a:lnRef>
-          <a:fillRef idx="3">
-            <a:schemeClr val="accent1"/>
-          </a:fillRef>
-          <a:effectRef idx="2">
-            <a:schemeClr val="accent1"/>
-          </a:effectRef>
-          <a:fontRef idx="minor">
-            <a:schemeClr val="lt1"/>
-          </a:fontRef>
-        </p:style>
-        <p:txBody>
-          <a:bodyPr rtlCol="0" anchor="ctr"/>
-          <a:lstStyle/>
-          <a:p>
-            <a:pPr algn="ctr"/>
-          </a:p>
-        </p:txBody>
-      </p:sp>
-      <p:sp>
-        <p:nvSpPr>
-          <p:cNvPr id="8" name="TextBox 7"/>
-          <p:cNvSpPr txBox="1"/>
-          <p:nvPr/>
-        </p:nvSpPr>
-        <p:spPr>
-          <a:xfrm>
-            <a:off x="640080" y="1874519"/>
-            <a:ext cx="2350693" cy="320040"/>
-          </a:xfrm>
-          <a:prstGeom prst="rect">
-            <a:avLst/>
-          </a:prstGeom>
-          <a:noFill/>
-          <a:ln>
-            <a:noFill/>
-          </a:ln>
-        </p:spPr>
-        <p:txBody>
-          <a:bodyPr wrap="square" lIns="137160" rIns="137160" tIns="137160" bIns="137160" anchor="t">
-            <a:spAutoFit/>
-          </a:bodyPr>
-          <a:lstStyle/>
-          <a:p>
-            <a:pPr algn="l">
-              <a:spcAft>
-                <a:spcPts val="300"/>
-              </a:spcAft>
-            </a:pPr>
-            <a:r>
-              <a:rPr sz="1500" b="1" lang="zh-CN">
-                <a:solidFill>
-                  <a:srgbClr val="2563EB"/>
-                </a:solidFill>
-                <a:latin typeface="Microsoft YaHei"/>
-                <a:ea typeface="Microsoft YaHei"/>
-                <a:cs typeface="Microsoft YaHei"/>
-              </a:rPr>
-              <a:t>稳定执行链路</a:t>
-            </a:r>
-          </a:p>
-        </p:txBody>
-      </p:sp>
-      <p:sp>
-        <p:nvSpPr>
-          <p:cNvPr id="9" name="TextBox 8"/>
-          <p:cNvSpPr txBox="1"/>
-          <p:nvPr/>
-        </p:nvSpPr>
-        <p:spPr>
-          <a:xfrm>
-            <a:off x="640080" y="2240280"/>
-            <a:ext cx="2350693" cy="2560320"/>
-          </a:xfrm>
-          <a:prstGeom prst="rect">
-            <a:avLst/>
-          </a:prstGeom>
-          <a:noFill/>
-          <a:ln>
-            <a:noFill/>
-          </a:ln>
-        </p:spPr>
-        <p:txBody>
-          <a:bodyPr wrap="square" lIns="137160" rIns="137160" tIns="137160" bIns="137160" anchor="t">
-            <a:spAutoFit/>
-          </a:bodyPr>
-          <a:lstStyle/>
-          <a:p>
-            <a:pPr algn="l">
-              <a:spcAft>
-                <a:spcPts val="300"/>
-              </a:spcAft>
-            </a:pPr>
-            <a:r>
-              <a:rPr sz="1100" b="0" lang="zh-CN">
-                <a:solidFill>
-                  <a:srgbClr val="4B5563"/>
-                </a:solidFill>
-                <a:latin typeface="Microsoft YaHei Light"/>
-                <a:ea typeface="Microsoft YaHei Light"/>
-                <a:cs typeface="Microsoft YaHei Light"/>
-              </a:rPr>
-              <a:t>继续优化 AI Planning、DSL 生成质量和 Windows/Playwright worker 兼容问题。</a:t>
-            </a:r>
-          </a:p>
-        </p:txBody>
-      </p:sp>
-      <p:sp>
-        <p:nvSpPr>
-          <p:cNvPr id="10" name="TextBox 9"/>
-          <p:cNvSpPr txBox="1"/>
-          <p:nvPr/>
-        </p:nvSpPr>
-        <p:spPr>
-          <a:xfrm>
-            <a:off x="3356533" y="1371600"/>
-            <a:ext cx="2625013" cy="320040"/>
-          </a:xfrm>
-          <a:prstGeom prst="rect">
-            <a:avLst/>
-          </a:prstGeom>
-          <a:solidFill>
-            <a:srgbClr val="16A34A"/>
-          </a:solidFill>
-          <a:ln>
-            <a:noFill/>
-          </a:ln>
-        </p:spPr>
-        <p:txBody>
-          <a:bodyPr wrap="square" lIns="137160" rIns="137160" tIns="137160" bIns="137160" anchor="ctr">
-            <a:spAutoFit/>
-          </a:bodyPr>
-          <a:lstStyle/>
-          <a:p>
-            <a:pPr algn="ctr">
-              <a:spcAft>
-                <a:spcPts val="300"/>
-              </a:spcAft>
-            </a:pPr>
-            <a:r>
-              <a:rPr sz="1500" b="1" lang="zh-CN">
-                <a:solidFill>
-                  <a:srgbClr val="FFFFFF"/>
-                </a:solidFill>
-                <a:latin typeface="Microsoft YaHei"/>
-                <a:ea typeface="Microsoft YaHei"/>
-                <a:cs typeface="Microsoft YaHei"/>
-              </a:rPr>
-              <a:t>中期</a:t>
-            </a:r>
-          </a:p>
-        </p:txBody>
-      </p:sp>
-      <p:sp>
-        <p:nvSpPr>
-          <p:cNvPr id="11" name="Rounded Rectangle 10"/>
-          <p:cNvSpPr/>
-          <p:nvPr/>
-        </p:nvSpPr>
-        <p:spPr>
-          <a:xfrm>
-            <a:off x="3356533" y="1783080"/>
-            <a:ext cx="2625013" cy="3063239"/>
-          </a:xfrm>
-          <a:prstGeom prst="roundRect">
-            <a:avLst/>
-          </a:prstGeom>
-          <a:solidFill>
-            <a:srgbClr val="FFFFFF"/>
-          </a:solidFill>
-          <a:ln w="10160">
-            <a:solidFill>
-              <a:srgbClr val="E5E7EB"/>
-            </a:solidFill>
-          </a:ln>
-        </p:spPr>
-        <p:style>
-          <a:lnRef idx="1">
-            <a:schemeClr val="accent1"/>
-          </a:lnRef>
-          <a:fillRef idx="3">
-            <a:schemeClr val="accent1"/>
-          </a:fillRef>
-          <a:effectRef idx="2">
-            <a:schemeClr val="accent1"/>
-          </a:effectRef>
-          <a:fontRef idx="minor">
-            <a:schemeClr val="lt1"/>
-          </a:fontRef>
-        </p:style>
-        <p:txBody>
-          <a:bodyPr rtlCol="0" anchor="ctr"/>
-          <a:lstStyle/>
-          <a:p>
-            <a:pPr algn="ctr"/>
-          </a:p>
-        </p:txBody>
-      </p:sp>
-      <p:sp>
-        <p:nvSpPr>
-          <p:cNvPr id="12" name="TextBox 11"/>
-          <p:cNvSpPr txBox="1"/>
-          <p:nvPr/>
-        </p:nvSpPr>
-        <p:spPr>
-          <a:xfrm>
-            <a:off x="3493693" y="1874519"/>
-            <a:ext cx="2350693" cy="320040"/>
-          </a:xfrm>
-          <a:prstGeom prst="rect">
-            <a:avLst/>
-          </a:prstGeom>
-          <a:noFill/>
-          <a:ln>
-            <a:noFill/>
-          </a:ln>
-        </p:spPr>
-        <p:txBody>
-          <a:bodyPr wrap="square" lIns="137160" rIns="137160" tIns="137160" bIns="137160" anchor="t">
-            <a:spAutoFit/>
-          </a:bodyPr>
-          <a:lstStyle/>
-          <a:p>
-            <a:pPr algn="l">
-              <a:spcAft>
-                <a:spcPts val="300"/>
-              </a:spcAft>
-            </a:pPr>
-            <a:r>
-              <a:rPr sz="1500" b="1" lang="zh-CN">
-                <a:solidFill>
-                  <a:srgbClr val="16A34A"/>
-                </a:solidFill>
-                <a:latin typeface="Microsoft YaHei"/>
-                <a:ea typeface="Microsoft YaHei"/>
-                <a:cs typeface="Microsoft YaHei"/>
-              </a:rPr>
-              <a:t>增强报告分析</a:t>
-            </a:r>
-          </a:p>
-        </p:txBody>
-      </p:sp>
-      <p:sp>
-        <p:nvSpPr>
-          <p:cNvPr id="13" name="TextBox 12"/>
-          <p:cNvSpPr txBox="1"/>
-          <p:nvPr/>
-        </p:nvSpPr>
-        <p:spPr>
-          <a:xfrm>
-            <a:off x="3493693" y="2240280"/>
-            <a:ext cx="2350693" cy="2560320"/>
-          </a:xfrm>
-          <a:prstGeom prst="rect">
-            <a:avLst/>
-          </a:prstGeom>
-          <a:noFill/>
-          <a:ln>
-            <a:noFill/>
-          </a:ln>
-        </p:spPr>
-        <p:txBody>
-          <a:bodyPr wrap="square" lIns="137160" rIns="137160" tIns="137160" bIns="137160" anchor="t">
-            <a:spAutoFit/>
-          </a:bodyPr>
-          <a:lstStyle/>
-          <a:p>
-            <a:pPr algn="l">
-              <a:spcAft>
-                <a:spcPts val="300"/>
-              </a:spcAft>
-            </a:pPr>
-            <a:r>
-              <a:rPr sz="1100" b="0" lang="zh-CN">
-                <a:solidFill>
-                  <a:srgbClr val="4B5563"/>
-                </a:solidFill>
-                <a:latin typeface="Microsoft YaHei Light"/>
-                <a:ea typeface="Microsoft YaHei Light"/>
-                <a:cs typeface="Microsoft YaHei Light"/>
-              </a:rPr>
-              <a:t>加入失败原因聚合、趋势分析、AI 失败归因和历史对比。</a:t>
-            </a:r>
-          </a:p>
-        </p:txBody>
-      </p:sp>
-      <p:sp>
-        <p:nvSpPr>
-          <p:cNvPr id="14" name="TextBox 13"/>
-          <p:cNvSpPr txBox="1"/>
-          <p:nvPr/>
-        </p:nvSpPr>
-        <p:spPr>
-          <a:xfrm>
-            <a:off x="6210147" y="1371600"/>
-            <a:ext cx="2625013" cy="320040"/>
-          </a:xfrm>
-          <a:prstGeom prst="rect">
-            <a:avLst/>
-          </a:prstGeom>
-          <a:solidFill>
-            <a:srgbClr val="D97706"/>
-          </a:solidFill>
-          <a:ln>
-            <a:noFill/>
-          </a:ln>
-        </p:spPr>
-        <p:txBody>
-          <a:bodyPr wrap="square" lIns="137160" rIns="137160" tIns="137160" bIns="137160" anchor="ctr">
-            <a:spAutoFit/>
-          </a:bodyPr>
-          <a:lstStyle/>
-          <a:p>
-            <a:pPr algn="ctr">
-              <a:spcAft>
-                <a:spcPts val="300"/>
-              </a:spcAft>
-            </a:pPr>
-            <a:r>
-              <a:rPr sz="1500" b="1" lang="zh-CN">
-                <a:solidFill>
-                  <a:srgbClr val="FFFFFF"/>
-                </a:solidFill>
-                <a:latin typeface="Microsoft YaHei"/>
-                <a:ea typeface="Microsoft YaHei"/>
-                <a:cs typeface="Microsoft YaHei"/>
-              </a:rPr>
-              <a:t>中期</a:t>
-            </a:r>
-          </a:p>
-        </p:txBody>
-      </p:sp>
-      <p:sp>
-        <p:nvSpPr>
-          <p:cNvPr id="15" name="Rounded Rectangle 14"/>
-          <p:cNvSpPr/>
-          <p:nvPr/>
-        </p:nvSpPr>
-        <p:spPr>
-          <a:xfrm>
-            <a:off x="6210147" y="1783080"/>
-            <a:ext cx="2625013" cy="3063239"/>
-          </a:xfrm>
-          <a:prstGeom prst="roundRect">
-            <a:avLst/>
-          </a:prstGeom>
-          <a:solidFill>
-            <a:srgbClr val="FFFFFF"/>
-          </a:solidFill>
-          <a:ln w="10160">
-            <a:solidFill>
-              <a:srgbClr val="E5E7EB"/>
-            </a:solidFill>
-          </a:ln>
-        </p:spPr>
-        <p:style>
-          <a:lnRef idx="1">
-            <a:schemeClr val="accent1"/>
-          </a:lnRef>
-          <a:fillRef idx="3">
-            <a:schemeClr val="accent1"/>
-          </a:fillRef>
-          <a:effectRef idx="2">
-            <a:schemeClr val="accent1"/>
-          </a:effectRef>
-          <a:fontRef idx="minor">
-            <a:schemeClr val="lt1"/>
-          </a:fontRef>
-        </p:style>
-        <p:txBody>
-          <a:bodyPr rtlCol="0" anchor="ctr"/>
-          <a:lstStyle/>
-          <a:p>
-            <a:pPr algn="ctr"/>
-          </a:p>
-        </p:txBody>
-      </p:sp>
-      <p:sp>
-        <p:nvSpPr>
-          <p:cNvPr id="16" name="TextBox 15"/>
-          <p:cNvSpPr txBox="1"/>
-          <p:nvPr/>
-        </p:nvSpPr>
-        <p:spPr>
-          <a:xfrm>
-            <a:off x="6347307" y="1874519"/>
-            <a:ext cx="2350693" cy="320040"/>
-          </a:xfrm>
-          <a:prstGeom prst="rect">
-            <a:avLst/>
-          </a:prstGeom>
-          <a:noFill/>
-          <a:ln>
-            <a:noFill/>
-          </a:ln>
-        </p:spPr>
-        <p:txBody>
-          <a:bodyPr wrap="square" lIns="137160" rIns="137160" tIns="137160" bIns="137160" anchor="t">
-            <a:spAutoFit/>
-          </a:bodyPr>
-          <a:lstStyle/>
-          <a:p>
-            <a:pPr algn="l">
-              <a:spcAft>
-                <a:spcPts val="300"/>
-              </a:spcAft>
-            </a:pPr>
-            <a:r>
-              <a:rPr sz="1500" b="1" lang="zh-CN">
-                <a:solidFill>
-                  <a:srgbClr val="D97706"/>
-                </a:solidFill>
-                <a:latin typeface="Microsoft YaHei"/>
-                <a:ea typeface="Microsoft YaHei"/>
-                <a:cs typeface="Microsoft YaHei"/>
-              </a:rPr>
-              <a:t>批量回归编排</a:t>
-            </a:r>
-          </a:p>
-        </p:txBody>
-      </p:sp>
-      <p:sp>
-        <p:nvSpPr>
-          <p:cNvPr id="17" name="TextBox 16"/>
-          <p:cNvSpPr txBox="1"/>
-          <p:nvPr/>
-        </p:nvSpPr>
-        <p:spPr>
-          <a:xfrm>
-            <a:off x="6347307" y="2240280"/>
-            <a:ext cx="2350693" cy="2560320"/>
-          </a:xfrm>
-          <a:prstGeom prst="rect">
-            <a:avLst/>
-          </a:prstGeom>
-          <a:noFill/>
-          <a:ln>
-            <a:noFill/>
-          </a:ln>
-        </p:spPr>
-        <p:txBody>
-          <a:bodyPr wrap="square" lIns="137160" rIns="137160" tIns="137160" bIns="137160" anchor="t">
-            <a:spAutoFit/>
-          </a:bodyPr>
-          <a:lstStyle/>
-          <a:p>
-            <a:pPr algn="l">
-              <a:spcAft>
-                <a:spcPts val="300"/>
-              </a:spcAft>
-            </a:pPr>
-            <a:r>
-              <a:rPr sz="1100" b="0" lang="zh-CN">
-                <a:solidFill>
-                  <a:srgbClr val="4B5563"/>
-                </a:solidFill>
-                <a:latin typeface="Microsoft YaHei Light"/>
-                <a:ea typeface="Microsoft YaHei Light"/>
-                <a:cs typeface="Microsoft YaHei Light"/>
-              </a:rPr>
-              <a:t>基于 Project -&gt; Case 增加队列、批量执行、失败重跑和结果对比。</a:t>
-            </a:r>
-          </a:p>
-        </p:txBody>
-      </p:sp>
-      <p:sp>
-        <p:nvSpPr>
-          <p:cNvPr id="18" name="TextBox 17"/>
-          <p:cNvSpPr txBox="1"/>
-          <p:nvPr/>
-        </p:nvSpPr>
-        <p:spPr>
-          <a:xfrm>
-            <a:off x="9063761" y="1371600"/>
-            <a:ext cx="2625013" cy="320040"/>
-          </a:xfrm>
-          <a:prstGeom prst="rect">
-            <a:avLst/>
-          </a:prstGeom>
-          <a:solidFill>
-            <a:srgbClr val="DC2626"/>
-          </a:solidFill>
-          <a:ln>
-            <a:noFill/>
-          </a:ln>
-        </p:spPr>
-        <p:txBody>
-          <a:bodyPr wrap="square" lIns="137160" rIns="137160" tIns="137160" bIns="137160" anchor="ctr">
-            <a:spAutoFit/>
-          </a:bodyPr>
-          <a:lstStyle/>
-          <a:p>
-            <a:pPr algn="ctr">
-              <a:spcAft>
-                <a:spcPts val="300"/>
-              </a:spcAft>
-            </a:pPr>
-            <a:r>
-              <a:rPr sz="1500" b="1" lang="zh-CN">
-                <a:solidFill>
-                  <a:srgbClr val="FFFFFF"/>
-                </a:solidFill>
-                <a:latin typeface="Microsoft YaHei"/>
-                <a:ea typeface="Microsoft YaHei"/>
-                <a:cs typeface="Microsoft YaHei"/>
-              </a:rPr>
-              <a:t>长期</a:t>
-            </a:r>
-          </a:p>
-        </p:txBody>
-      </p:sp>
-      <p:sp>
-        <p:nvSpPr>
-          <p:cNvPr id="19" name="Rounded Rectangle 18"/>
-          <p:cNvSpPr/>
-          <p:nvPr/>
-        </p:nvSpPr>
-        <p:spPr>
-          <a:xfrm>
-            <a:off x="9063761" y="1783080"/>
-            <a:ext cx="2625013" cy="3063239"/>
-          </a:xfrm>
-          <a:prstGeom prst="roundRect">
-            <a:avLst/>
-          </a:prstGeom>
-          <a:solidFill>
-            <a:srgbClr val="FFFFFF"/>
-          </a:solidFill>
-          <a:ln w="10160">
-            <a:solidFill>
-              <a:srgbClr val="E5E7EB"/>
-            </a:solidFill>
-          </a:ln>
-        </p:spPr>
-        <p:style>
-          <a:lnRef idx="1">
-            <a:schemeClr val="accent1"/>
-          </a:lnRef>
-          <a:fillRef idx="3">
-            <a:schemeClr val="accent1"/>
-          </a:fillRef>
-          <a:effectRef idx="2">
-            <a:schemeClr val="accent1"/>
-          </a:effectRef>
-          <a:fontRef idx="minor">
-            <a:schemeClr val="lt1"/>
-          </a:fontRef>
-        </p:style>
-        <p:txBody>
-          <a:bodyPr rtlCol="0" anchor="ctr"/>
-          <a:lstStyle/>
-          <a:p>
-            <a:pPr algn="ctr"/>
-          </a:p>
-        </p:txBody>
-      </p:sp>
-      <p:sp>
-        <p:nvSpPr>
-          <p:cNvPr id="20" name="TextBox 19"/>
-          <p:cNvSpPr txBox="1"/>
-          <p:nvPr/>
-        </p:nvSpPr>
-        <p:spPr>
-          <a:xfrm>
-            <a:off x="9200921" y="1874519"/>
-            <a:ext cx="2350693" cy="320040"/>
-          </a:xfrm>
-          <a:prstGeom prst="rect">
-            <a:avLst/>
-          </a:prstGeom>
-          <a:noFill/>
-          <a:ln>
-            <a:noFill/>
-          </a:ln>
-        </p:spPr>
-        <p:txBody>
-          <a:bodyPr wrap="square" lIns="137160" rIns="137160" tIns="137160" bIns="137160" anchor="t">
-            <a:spAutoFit/>
-          </a:bodyPr>
-          <a:lstStyle/>
-          <a:p>
-            <a:pPr algn="l">
-              <a:spcAft>
-                <a:spcPts val="300"/>
-              </a:spcAft>
-            </a:pPr>
-            <a:r>
-              <a:rPr sz="1500" b="1" lang="zh-CN">
-                <a:solidFill>
-                  <a:srgbClr val="DC2626"/>
-                </a:solidFill>
-                <a:latin typeface="Microsoft YaHei"/>
-                <a:ea typeface="Microsoft YaHei"/>
-                <a:cs typeface="Microsoft YaHei"/>
-              </a:rPr>
-              <a:t>企业化交付</a:t>
-            </a:r>
-          </a:p>
-        </p:txBody>
-      </p:sp>
-      <p:sp>
-        <p:nvSpPr>
-          <p:cNvPr id="21" name="TextBox 20"/>
-          <p:cNvSpPr txBox="1"/>
-          <p:nvPr/>
-        </p:nvSpPr>
-        <p:spPr>
-          <a:xfrm>
-            <a:off x="9200921" y="2240280"/>
-            <a:ext cx="2350693" cy="2560320"/>
-          </a:xfrm>
-          <a:prstGeom prst="rect">
-            <a:avLst/>
-          </a:prstGeom>
-          <a:noFill/>
-          <a:ln>
-            <a:noFill/>
-          </a:ln>
-        </p:spPr>
-        <p:txBody>
-          <a:bodyPr wrap="square" lIns="137160" rIns="137160" tIns="137160" bIns="137160" anchor="t">
-            <a:spAutoFit/>
-          </a:bodyPr>
-          <a:lstStyle/>
-          <a:p>
-            <a:pPr algn="l">
-              <a:spcAft>
-                <a:spcPts val="300"/>
-              </a:spcAft>
-            </a:pPr>
-            <a:r>
-              <a:rPr sz="1100" b="0" lang="zh-CN">
-                <a:solidFill>
-                  <a:srgbClr val="4B5563"/>
-                </a:solidFill>
-                <a:latin typeface="Microsoft YaHei Light"/>
-                <a:ea typeface="Microsoft YaHei Light"/>
-                <a:cs typeface="Microsoft YaHei Light"/>
-              </a:rPr>
-              <a:t>权限分层、账号管理、CI/CD 集成、私有化部署和行业模板。</a:t>
-            </a:r>
-          </a:p>
-        </p:txBody>
-      </p:sp>
-      <p:sp>
-        <p:nvSpPr>
-          <p:cNvPr id="22" name="Rectangle 21"/>
-          <p:cNvSpPr/>
-          <p:nvPr/>
-        </p:nvSpPr>
-        <p:spPr>
-          <a:xfrm>
-            <a:off x="502920" y="5943600"/>
-            <a:ext cx="11185855" cy="411480"/>
-          </a:xfrm>
-          <a:prstGeom prst="rect">
-            <a:avLst/>
-          </a:prstGeom>
-          <a:solidFill>
-            <a:srgbClr val="FFFFFF"/>
-          </a:solidFill>
-          <a:ln w="10160">
-            <a:solidFill>
-              <a:srgbClr val="E5E7EB"/>
-            </a:solidFill>
-          </a:ln>
-        </p:spPr>
-        <p:style>
-          <a:lnRef idx="1">
-            <a:schemeClr val="accent1"/>
-          </a:lnRef>
-          <a:fillRef idx="3">
-            <a:schemeClr val="accent1"/>
-          </a:fillRef>
-          <a:effectRef idx="2">
-            <a:schemeClr val="accent1"/>
-          </a:effectRef>
-          <a:fontRef idx="minor">
-            <a:schemeClr val="lt1"/>
-          </a:fontRef>
-        </p:style>
-        <p:txBody>
-          <a:bodyPr rtlCol="0" anchor="ctr"/>
-          <a:lstStyle/>
-          <a:p>
-            <a:pPr algn="ctr"/>
-          </a:p>
-        </p:txBody>
-      </p:sp>
-      <p:sp>
-        <p:nvSpPr>
-          <p:cNvPr id="23" name="TextBox 22"/>
-          <p:cNvSpPr txBox="1"/>
-          <p:nvPr/>
-        </p:nvSpPr>
-        <p:spPr>
-          <a:xfrm>
-            <a:off x="640080" y="5989320"/>
-            <a:ext cx="10911535" cy="320040"/>
-          </a:xfrm>
-          <a:prstGeom prst="rect">
-            <a:avLst/>
-          </a:prstGeom>
-          <a:noFill/>
-          <a:ln>
-            <a:noFill/>
-          </a:ln>
-        </p:spPr>
-        <p:txBody>
-          <a:bodyPr wrap="square" lIns="137160" rIns="137160" tIns="137160" bIns="137160" anchor="ctr">
-            <a:spAutoFit/>
-          </a:bodyPr>
-          <a:lstStyle/>
-          <a:p>
-            <a:pPr algn="ctr">
-              <a:spcAft>
-                <a:spcPts val="300"/>
-              </a:spcAft>
-            </a:pPr>
-            <a:r>
-              <a:rPr sz="1400" b="1" lang="zh-CN">
-                <a:solidFill>
-                  <a:srgbClr val="11122A"/>
-                </a:solidFill>
-                <a:latin typeface="Microsoft YaHei"/>
-                <a:ea typeface="Microsoft YaHei"/>
-                <a:cs typeface="Microsoft YaHei"/>
-              </a:rPr>
-              <a:t>阶段判断：项目已经具备评审展示所需的完整链路，下一步应证明稳定性和真实团队使用价值。</a:t>
             </a:r>
           </a:p>
         </p:txBody>
@@ -8088,7 +8077,7 @@
                 <a:ea typeface="Microsoft YaHei"/>
                 <a:cs typeface="Microsoft YaHei"/>
               </a:rPr>
-              <a:t>总结：本项目的核心价值是“AI + 测试工程治理”</a:t>
+              <a:t>后续路线图：从可演示闭环走向团队级质量平台</a:t>
             </a:r>
           </a:p>
         </p:txBody>
@@ -8132,7 +8121,7 @@
                 <a:ea typeface="Microsoft YaHei Light"/>
                 <a:cs typeface="Microsoft YaHei Light"/>
               </a:rPr>
-              <a:t>AI 参与规划和分析，结构化 DSL 与后端 Runner 保证执行可信。</a:t>
+              <a:t>下一阶段重点不再是堆功能，而是稳定性、样本规模和企业化能力。</a:t>
             </a:r>
           </a:p>
         </p:txBody>
@@ -8176,7 +8165,1005 @@
                 <a:ea typeface="Microsoft YaHei"/>
                 <a:cs typeface="Microsoft YaHei"/>
               </a:rPr>
-              <a:t>16/16</a:t>
+              <a:t>16/17</a:t>
+            </a:r>
+          </a:p>
+        </p:txBody>
+      </p:sp>
+      <p:sp>
+        <p:nvSpPr>
+          <p:cNvPr id="6" name="TextBox 5"/>
+          <p:cNvSpPr txBox="1"/>
+          <p:nvPr/>
+        </p:nvSpPr>
+        <p:spPr>
+          <a:xfrm>
+            <a:off x="502920" y="1371600"/>
+            <a:ext cx="2625013" cy="320040"/>
+          </a:xfrm>
+          <a:prstGeom prst="rect">
+            <a:avLst/>
+          </a:prstGeom>
+          <a:solidFill>
+            <a:srgbClr val="2563EB"/>
+          </a:solidFill>
+          <a:ln>
+            <a:noFill/>
+          </a:ln>
+        </p:spPr>
+        <p:txBody>
+          <a:bodyPr wrap="square" lIns="137160" rIns="137160" tIns="137160" bIns="137160" anchor="ctr">
+            <a:spAutoFit/>
+          </a:bodyPr>
+          <a:lstStyle/>
+          <a:p>
+            <a:pPr algn="ctr">
+              <a:spcAft>
+                <a:spcPts val="300"/>
+              </a:spcAft>
+            </a:pPr>
+            <a:r>
+              <a:rPr sz="1500" b="1" lang="zh-CN">
+                <a:solidFill>
+                  <a:srgbClr val="FFFFFF"/>
+                </a:solidFill>
+                <a:latin typeface="Microsoft YaHei"/>
+                <a:ea typeface="Microsoft YaHei"/>
+                <a:cs typeface="Microsoft YaHei"/>
+              </a:rPr>
+              <a:t>近期</a:t>
+            </a:r>
+          </a:p>
+        </p:txBody>
+      </p:sp>
+      <p:sp>
+        <p:nvSpPr>
+          <p:cNvPr id="7" name="Rounded Rectangle 6"/>
+          <p:cNvSpPr/>
+          <p:nvPr/>
+        </p:nvSpPr>
+        <p:spPr>
+          <a:xfrm>
+            <a:off x="502920" y="1783080"/>
+            <a:ext cx="2625013" cy="3063239"/>
+          </a:xfrm>
+          <a:prstGeom prst="roundRect">
+            <a:avLst/>
+          </a:prstGeom>
+          <a:solidFill>
+            <a:srgbClr val="FFFFFF"/>
+          </a:solidFill>
+          <a:ln w="10160">
+            <a:solidFill>
+              <a:srgbClr val="E5E7EB"/>
+            </a:solidFill>
+          </a:ln>
+        </p:spPr>
+        <p:style>
+          <a:lnRef idx="1">
+            <a:schemeClr val="accent1"/>
+          </a:lnRef>
+          <a:fillRef idx="3">
+            <a:schemeClr val="accent1"/>
+          </a:fillRef>
+          <a:effectRef idx="2">
+            <a:schemeClr val="accent1"/>
+          </a:effectRef>
+          <a:fontRef idx="minor">
+            <a:schemeClr val="lt1"/>
+          </a:fontRef>
+        </p:style>
+        <p:txBody>
+          <a:bodyPr rtlCol="0" anchor="ctr"/>
+          <a:lstStyle/>
+          <a:p>
+            <a:pPr algn="ctr"/>
+          </a:p>
+        </p:txBody>
+      </p:sp>
+      <p:sp>
+        <p:nvSpPr>
+          <p:cNvPr id="8" name="TextBox 7"/>
+          <p:cNvSpPr txBox="1"/>
+          <p:nvPr/>
+        </p:nvSpPr>
+        <p:spPr>
+          <a:xfrm>
+            <a:off x="640080" y="1874519"/>
+            <a:ext cx="2350693" cy="320040"/>
+          </a:xfrm>
+          <a:prstGeom prst="rect">
+            <a:avLst/>
+          </a:prstGeom>
+          <a:noFill/>
+          <a:ln>
+            <a:noFill/>
+          </a:ln>
+        </p:spPr>
+        <p:txBody>
+          <a:bodyPr wrap="square" lIns="137160" rIns="137160" tIns="137160" bIns="137160" anchor="t">
+            <a:spAutoFit/>
+          </a:bodyPr>
+          <a:lstStyle/>
+          <a:p>
+            <a:pPr algn="l">
+              <a:spcAft>
+                <a:spcPts val="300"/>
+              </a:spcAft>
+            </a:pPr>
+            <a:r>
+              <a:rPr sz="1500" b="1" lang="zh-CN">
+                <a:solidFill>
+                  <a:srgbClr val="2563EB"/>
+                </a:solidFill>
+                <a:latin typeface="Microsoft YaHei"/>
+                <a:ea typeface="Microsoft YaHei"/>
+                <a:cs typeface="Microsoft YaHei"/>
+              </a:rPr>
+              <a:t>稳定执行链路</a:t>
+            </a:r>
+          </a:p>
+        </p:txBody>
+      </p:sp>
+      <p:sp>
+        <p:nvSpPr>
+          <p:cNvPr id="9" name="TextBox 8"/>
+          <p:cNvSpPr txBox="1"/>
+          <p:nvPr/>
+        </p:nvSpPr>
+        <p:spPr>
+          <a:xfrm>
+            <a:off x="640080" y="2240280"/>
+            <a:ext cx="2350693" cy="2560320"/>
+          </a:xfrm>
+          <a:prstGeom prst="rect">
+            <a:avLst/>
+          </a:prstGeom>
+          <a:noFill/>
+          <a:ln>
+            <a:noFill/>
+          </a:ln>
+        </p:spPr>
+        <p:txBody>
+          <a:bodyPr wrap="square" lIns="137160" rIns="137160" tIns="137160" bIns="137160" anchor="t">
+            <a:spAutoFit/>
+          </a:bodyPr>
+          <a:lstStyle/>
+          <a:p>
+            <a:pPr algn="l">
+              <a:spcAft>
+                <a:spcPts val="300"/>
+              </a:spcAft>
+            </a:pPr>
+            <a:r>
+              <a:rPr sz="1100" b="0" lang="zh-CN">
+                <a:solidFill>
+                  <a:srgbClr val="4B5563"/>
+                </a:solidFill>
+                <a:latin typeface="Microsoft YaHei Light"/>
+                <a:ea typeface="Microsoft YaHei Light"/>
+                <a:cs typeface="Microsoft YaHei Light"/>
+              </a:rPr>
+              <a:t>继续优化 AI Planning、DSL 生成质量和 Windows/Playwright worker 兼容问题。</a:t>
+            </a:r>
+          </a:p>
+        </p:txBody>
+      </p:sp>
+      <p:sp>
+        <p:nvSpPr>
+          <p:cNvPr id="10" name="TextBox 9"/>
+          <p:cNvSpPr txBox="1"/>
+          <p:nvPr/>
+        </p:nvSpPr>
+        <p:spPr>
+          <a:xfrm>
+            <a:off x="3356533" y="1371600"/>
+            <a:ext cx="2625013" cy="320040"/>
+          </a:xfrm>
+          <a:prstGeom prst="rect">
+            <a:avLst/>
+          </a:prstGeom>
+          <a:solidFill>
+            <a:srgbClr val="16A34A"/>
+          </a:solidFill>
+          <a:ln>
+            <a:noFill/>
+          </a:ln>
+        </p:spPr>
+        <p:txBody>
+          <a:bodyPr wrap="square" lIns="137160" rIns="137160" tIns="137160" bIns="137160" anchor="ctr">
+            <a:spAutoFit/>
+          </a:bodyPr>
+          <a:lstStyle/>
+          <a:p>
+            <a:pPr algn="ctr">
+              <a:spcAft>
+                <a:spcPts val="300"/>
+              </a:spcAft>
+            </a:pPr>
+            <a:r>
+              <a:rPr sz="1500" b="1" lang="zh-CN">
+                <a:solidFill>
+                  <a:srgbClr val="FFFFFF"/>
+                </a:solidFill>
+                <a:latin typeface="Microsoft YaHei"/>
+                <a:ea typeface="Microsoft YaHei"/>
+                <a:cs typeface="Microsoft YaHei"/>
+              </a:rPr>
+              <a:t>中期</a:t>
+            </a:r>
+          </a:p>
+        </p:txBody>
+      </p:sp>
+      <p:sp>
+        <p:nvSpPr>
+          <p:cNvPr id="11" name="Rounded Rectangle 10"/>
+          <p:cNvSpPr/>
+          <p:nvPr/>
+        </p:nvSpPr>
+        <p:spPr>
+          <a:xfrm>
+            <a:off x="3356533" y="1783080"/>
+            <a:ext cx="2625013" cy="3063239"/>
+          </a:xfrm>
+          <a:prstGeom prst="roundRect">
+            <a:avLst/>
+          </a:prstGeom>
+          <a:solidFill>
+            <a:srgbClr val="FFFFFF"/>
+          </a:solidFill>
+          <a:ln w="10160">
+            <a:solidFill>
+              <a:srgbClr val="E5E7EB"/>
+            </a:solidFill>
+          </a:ln>
+        </p:spPr>
+        <p:style>
+          <a:lnRef idx="1">
+            <a:schemeClr val="accent1"/>
+          </a:lnRef>
+          <a:fillRef idx="3">
+            <a:schemeClr val="accent1"/>
+          </a:fillRef>
+          <a:effectRef idx="2">
+            <a:schemeClr val="accent1"/>
+          </a:effectRef>
+          <a:fontRef idx="minor">
+            <a:schemeClr val="lt1"/>
+          </a:fontRef>
+        </p:style>
+        <p:txBody>
+          <a:bodyPr rtlCol="0" anchor="ctr"/>
+          <a:lstStyle/>
+          <a:p>
+            <a:pPr algn="ctr"/>
+          </a:p>
+        </p:txBody>
+      </p:sp>
+      <p:sp>
+        <p:nvSpPr>
+          <p:cNvPr id="12" name="TextBox 11"/>
+          <p:cNvSpPr txBox="1"/>
+          <p:nvPr/>
+        </p:nvSpPr>
+        <p:spPr>
+          <a:xfrm>
+            <a:off x="3493693" y="1874519"/>
+            <a:ext cx="2350693" cy="320040"/>
+          </a:xfrm>
+          <a:prstGeom prst="rect">
+            <a:avLst/>
+          </a:prstGeom>
+          <a:noFill/>
+          <a:ln>
+            <a:noFill/>
+          </a:ln>
+        </p:spPr>
+        <p:txBody>
+          <a:bodyPr wrap="square" lIns="137160" rIns="137160" tIns="137160" bIns="137160" anchor="t">
+            <a:spAutoFit/>
+          </a:bodyPr>
+          <a:lstStyle/>
+          <a:p>
+            <a:pPr algn="l">
+              <a:spcAft>
+                <a:spcPts val="300"/>
+              </a:spcAft>
+            </a:pPr>
+            <a:r>
+              <a:rPr sz="1500" b="1" lang="zh-CN">
+                <a:solidFill>
+                  <a:srgbClr val="16A34A"/>
+                </a:solidFill>
+                <a:latin typeface="Microsoft YaHei"/>
+                <a:ea typeface="Microsoft YaHei"/>
+                <a:cs typeface="Microsoft YaHei"/>
+              </a:rPr>
+              <a:t>增强报告分析</a:t>
+            </a:r>
+          </a:p>
+        </p:txBody>
+      </p:sp>
+      <p:sp>
+        <p:nvSpPr>
+          <p:cNvPr id="13" name="TextBox 12"/>
+          <p:cNvSpPr txBox="1"/>
+          <p:nvPr/>
+        </p:nvSpPr>
+        <p:spPr>
+          <a:xfrm>
+            <a:off x="3493693" y="2240280"/>
+            <a:ext cx="2350693" cy="2560320"/>
+          </a:xfrm>
+          <a:prstGeom prst="rect">
+            <a:avLst/>
+          </a:prstGeom>
+          <a:noFill/>
+          <a:ln>
+            <a:noFill/>
+          </a:ln>
+        </p:spPr>
+        <p:txBody>
+          <a:bodyPr wrap="square" lIns="137160" rIns="137160" tIns="137160" bIns="137160" anchor="t">
+            <a:spAutoFit/>
+          </a:bodyPr>
+          <a:lstStyle/>
+          <a:p>
+            <a:pPr algn="l">
+              <a:spcAft>
+                <a:spcPts val="300"/>
+              </a:spcAft>
+            </a:pPr>
+            <a:r>
+              <a:rPr sz="1100" b="0" lang="zh-CN">
+                <a:solidFill>
+                  <a:srgbClr val="4B5563"/>
+                </a:solidFill>
+                <a:latin typeface="Microsoft YaHei Light"/>
+                <a:ea typeface="Microsoft YaHei Light"/>
+                <a:cs typeface="Microsoft YaHei Light"/>
+              </a:rPr>
+              <a:t>加入失败原因聚合、趋势分析、AI 失败归因和历史对比。</a:t>
+            </a:r>
+          </a:p>
+        </p:txBody>
+      </p:sp>
+      <p:sp>
+        <p:nvSpPr>
+          <p:cNvPr id="14" name="TextBox 13"/>
+          <p:cNvSpPr txBox="1"/>
+          <p:nvPr/>
+        </p:nvSpPr>
+        <p:spPr>
+          <a:xfrm>
+            <a:off x="6210147" y="1371600"/>
+            <a:ext cx="2625013" cy="320040"/>
+          </a:xfrm>
+          <a:prstGeom prst="rect">
+            <a:avLst/>
+          </a:prstGeom>
+          <a:solidFill>
+            <a:srgbClr val="D97706"/>
+          </a:solidFill>
+          <a:ln>
+            <a:noFill/>
+          </a:ln>
+        </p:spPr>
+        <p:txBody>
+          <a:bodyPr wrap="square" lIns="137160" rIns="137160" tIns="137160" bIns="137160" anchor="ctr">
+            <a:spAutoFit/>
+          </a:bodyPr>
+          <a:lstStyle/>
+          <a:p>
+            <a:pPr algn="ctr">
+              <a:spcAft>
+                <a:spcPts val="300"/>
+              </a:spcAft>
+            </a:pPr>
+            <a:r>
+              <a:rPr sz="1500" b="1" lang="zh-CN">
+                <a:solidFill>
+                  <a:srgbClr val="FFFFFF"/>
+                </a:solidFill>
+                <a:latin typeface="Microsoft YaHei"/>
+                <a:ea typeface="Microsoft YaHei"/>
+                <a:cs typeface="Microsoft YaHei"/>
+              </a:rPr>
+              <a:t>中期</a:t>
+            </a:r>
+          </a:p>
+        </p:txBody>
+      </p:sp>
+      <p:sp>
+        <p:nvSpPr>
+          <p:cNvPr id="15" name="Rounded Rectangle 14"/>
+          <p:cNvSpPr/>
+          <p:nvPr/>
+        </p:nvSpPr>
+        <p:spPr>
+          <a:xfrm>
+            <a:off x="6210147" y="1783080"/>
+            <a:ext cx="2625013" cy="3063239"/>
+          </a:xfrm>
+          <a:prstGeom prst="roundRect">
+            <a:avLst/>
+          </a:prstGeom>
+          <a:solidFill>
+            <a:srgbClr val="FFFFFF"/>
+          </a:solidFill>
+          <a:ln w="10160">
+            <a:solidFill>
+              <a:srgbClr val="E5E7EB"/>
+            </a:solidFill>
+          </a:ln>
+        </p:spPr>
+        <p:style>
+          <a:lnRef idx="1">
+            <a:schemeClr val="accent1"/>
+          </a:lnRef>
+          <a:fillRef idx="3">
+            <a:schemeClr val="accent1"/>
+          </a:fillRef>
+          <a:effectRef idx="2">
+            <a:schemeClr val="accent1"/>
+          </a:effectRef>
+          <a:fontRef idx="minor">
+            <a:schemeClr val="lt1"/>
+          </a:fontRef>
+        </p:style>
+        <p:txBody>
+          <a:bodyPr rtlCol="0" anchor="ctr"/>
+          <a:lstStyle/>
+          <a:p>
+            <a:pPr algn="ctr"/>
+          </a:p>
+        </p:txBody>
+      </p:sp>
+      <p:sp>
+        <p:nvSpPr>
+          <p:cNvPr id="16" name="TextBox 15"/>
+          <p:cNvSpPr txBox="1"/>
+          <p:nvPr/>
+        </p:nvSpPr>
+        <p:spPr>
+          <a:xfrm>
+            <a:off x="6347307" y="1874519"/>
+            <a:ext cx="2350693" cy="320040"/>
+          </a:xfrm>
+          <a:prstGeom prst="rect">
+            <a:avLst/>
+          </a:prstGeom>
+          <a:noFill/>
+          <a:ln>
+            <a:noFill/>
+          </a:ln>
+        </p:spPr>
+        <p:txBody>
+          <a:bodyPr wrap="square" lIns="137160" rIns="137160" tIns="137160" bIns="137160" anchor="t">
+            <a:spAutoFit/>
+          </a:bodyPr>
+          <a:lstStyle/>
+          <a:p>
+            <a:pPr algn="l">
+              <a:spcAft>
+                <a:spcPts val="300"/>
+              </a:spcAft>
+            </a:pPr>
+            <a:r>
+              <a:rPr sz="1500" b="1" lang="zh-CN">
+                <a:solidFill>
+                  <a:srgbClr val="D97706"/>
+                </a:solidFill>
+                <a:latin typeface="Microsoft YaHei"/>
+                <a:ea typeface="Microsoft YaHei"/>
+                <a:cs typeface="Microsoft YaHei"/>
+              </a:rPr>
+              <a:t>批量回归编排</a:t>
+            </a:r>
+          </a:p>
+        </p:txBody>
+      </p:sp>
+      <p:sp>
+        <p:nvSpPr>
+          <p:cNvPr id="17" name="TextBox 16"/>
+          <p:cNvSpPr txBox="1"/>
+          <p:nvPr/>
+        </p:nvSpPr>
+        <p:spPr>
+          <a:xfrm>
+            <a:off x="6347307" y="2240280"/>
+            <a:ext cx="2350693" cy="2560320"/>
+          </a:xfrm>
+          <a:prstGeom prst="rect">
+            <a:avLst/>
+          </a:prstGeom>
+          <a:noFill/>
+          <a:ln>
+            <a:noFill/>
+          </a:ln>
+        </p:spPr>
+        <p:txBody>
+          <a:bodyPr wrap="square" lIns="137160" rIns="137160" tIns="137160" bIns="137160" anchor="t">
+            <a:spAutoFit/>
+          </a:bodyPr>
+          <a:lstStyle/>
+          <a:p>
+            <a:pPr algn="l">
+              <a:spcAft>
+                <a:spcPts val="300"/>
+              </a:spcAft>
+            </a:pPr>
+            <a:r>
+              <a:rPr sz="1100" b="0" lang="zh-CN">
+                <a:solidFill>
+                  <a:srgbClr val="4B5563"/>
+                </a:solidFill>
+                <a:latin typeface="Microsoft YaHei Light"/>
+                <a:ea typeface="Microsoft YaHei Light"/>
+                <a:cs typeface="Microsoft YaHei Light"/>
+              </a:rPr>
+              <a:t>基于 Project -&gt; Case 增加队列、批量执行、失败重跑和结果对比。</a:t>
+            </a:r>
+          </a:p>
+        </p:txBody>
+      </p:sp>
+      <p:sp>
+        <p:nvSpPr>
+          <p:cNvPr id="18" name="TextBox 17"/>
+          <p:cNvSpPr txBox="1"/>
+          <p:nvPr/>
+        </p:nvSpPr>
+        <p:spPr>
+          <a:xfrm>
+            <a:off x="9063761" y="1371600"/>
+            <a:ext cx="2625013" cy="320040"/>
+          </a:xfrm>
+          <a:prstGeom prst="rect">
+            <a:avLst/>
+          </a:prstGeom>
+          <a:solidFill>
+            <a:srgbClr val="DC2626"/>
+          </a:solidFill>
+          <a:ln>
+            <a:noFill/>
+          </a:ln>
+        </p:spPr>
+        <p:txBody>
+          <a:bodyPr wrap="square" lIns="137160" rIns="137160" tIns="137160" bIns="137160" anchor="ctr">
+            <a:spAutoFit/>
+          </a:bodyPr>
+          <a:lstStyle/>
+          <a:p>
+            <a:pPr algn="ctr">
+              <a:spcAft>
+                <a:spcPts val="300"/>
+              </a:spcAft>
+            </a:pPr>
+            <a:r>
+              <a:rPr sz="1500" b="1" lang="zh-CN">
+                <a:solidFill>
+                  <a:srgbClr val="FFFFFF"/>
+                </a:solidFill>
+                <a:latin typeface="Microsoft YaHei"/>
+                <a:ea typeface="Microsoft YaHei"/>
+                <a:cs typeface="Microsoft YaHei"/>
+              </a:rPr>
+              <a:t>长期</a:t>
+            </a:r>
+          </a:p>
+        </p:txBody>
+      </p:sp>
+      <p:sp>
+        <p:nvSpPr>
+          <p:cNvPr id="19" name="Rounded Rectangle 18"/>
+          <p:cNvSpPr/>
+          <p:nvPr/>
+        </p:nvSpPr>
+        <p:spPr>
+          <a:xfrm>
+            <a:off x="9063761" y="1783080"/>
+            <a:ext cx="2625013" cy="3063239"/>
+          </a:xfrm>
+          <a:prstGeom prst="roundRect">
+            <a:avLst/>
+          </a:prstGeom>
+          <a:solidFill>
+            <a:srgbClr val="FFFFFF"/>
+          </a:solidFill>
+          <a:ln w="10160">
+            <a:solidFill>
+              <a:srgbClr val="E5E7EB"/>
+            </a:solidFill>
+          </a:ln>
+        </p:spPr>
+        <p:style>
+          <a:lnRef idx="1">
+            <a:schemeClr val="accent1"/>
+          </a:lnRef>
+          <a:fillRef idx="3">
+            <a:schemeClr val="accent1"/>
+          </a:fillRef>
+          <a:effectRef idx="2">
+            <a:schemeClr val="accent1"/>
+          </a:effectRef>
+          <a:fontRef idx="minor">
+            <a:schemeClr val="lt1"/>
+          </a:fontRef>
+        </p:style>
+        <p:txBody>
+          <a:bodyPr rtlCol="0" anchor="ctr"/>
+          <a:lstStyle/>
+          <a:p>
+            <a:pPr algn="ctr"/>
+          </a:p>
+        </p:txBody>
+      </p:sp>
+      <p:sp>
+        <p:nvSpPr>
+          <p:cNvPr id="20" name="TextBox 19"/>
+          <p:cNvSpPr txBox="1"/>
+          <p:nvPr/>
+        </p:nvSpPr>
+        <p:spPr>
+          <a:xfrm>
+            <a:off x="9200921" y="1874519"/>
+            <a:ext cx="2350693" cy="320040"/>
+          </a:xfrm>
+          <a:prstGeom prst="rect">
+            <a:avLst/>
+          </a:prstGeom>
+          <a:noFill/>
+          <a:ln>
+            <a:noFill/>
+          </a:ln>
+        </p:spPr>
+        <p:txBody>
+          <a:bodyPr wrap="square" lIns="137160" rIns="137160" tIns="137160" bIns="137160" anchor="t">
+            <a:spAutoFit/>
+          </a:bodyPr>
+          <a:lstStyle/>
+          <a:p>
+            <a:pPr algn="l">
+              <a:spcAft>
+                <a:spcPts val="300"/>
+              </a:spcAft>
+            </a:pPr>
+            <a:r>
+              <a:rPr sz="1500" b="1" lang="zh-CN">
+                <a:solidFill>
+                  <a:srgbClr val="DC2626"/>
+                </a:solidFill>
+                <a:latin typeface="Microsoft YaHei"/>
+                <a:ea typeface="Microsoft YaHei"/>
+                <a:cs typeface="Microsoft YaHei"/>
+              </a:rPr>
+              <a:t>企业化交付</a:t>
+            </a:r>
+          </a:p>
+        </p:txBody>
+      </p:sp>
+      <p:sp>
+        <p:nvSpPr>
+          <p:cNvPr id="21" name="TextBox 20"/>
+          <p:cNvSpPr txBox="1"/>
+          <p:nvPr/>
+        </p:nvSpPr>
+        <p:spPr>
+          <a:xfrm>
+            <a:off x="9200921" y="2240280"/>
+            <a:ext cx="2350693" cy="2560320"/>
+          </a:xfrm>
+          <a:prstGeom prst="rect">
+            <a:avLst/>
+          </a:prstGeom>
+          <a:noFill/>
+          <a:ln>
+            <a:noFill/>
+          </a:ln>
+        </p:spPr>
+        <p:txBody>
+          <a:bodyPr wrap="square" lIns="137160" rIns="137160" tIns="137160" bIns="137160" anchor="t">
+            <a:spAutoFit/>
+          </a:bodyPr>
+          <a:lstStyle/>
+          <a:p>
+            <a:pPr algn="l">
+              <a:spcAft>
+                <a:spcPts val="300"/>
+              </a:spcAft>
+            </a:pPr>
+            <a:r>
+              <a:rPr sz="1100" b="0" lang="zh-CN">
+                <a:solidFill>
+                  <a:srgbClr val="4B5563"/>
+                </a:solidFill>
+                <a:latin typeface="Microsoft YaHei Light"/>
+                <a:ea typeface="Microsoft YaHei Light"/>
+                <a:cs typeface="Microsoft YaHei Light"/>
+              </a:rPr>
+              <a:t>权限分层、账号管理、CI/CD 集成、私有化部署和行业模板。</a:t>
+            </a:r>
+          </a:p>
+        </p:txBody>
+      </p:sp>
+      <p:sp>
+        <p:nvSpPr>
+          <p:cNvPr id="22" name="Rectangle 21"/>
+          <p:cNvSpPr/>
+          <p:nvPr/>
+        </p:nvSpPr>
+        <p:spPr>
+          <a:xfrm>
+            <a:off x="502920" y="5943600"/>
+            <a:ext cx="11185855" cy="411480"/>
+          </a:xfrm>
+          <a:prstGeom prst="rect">
+            <a:avLst/>
+          </a:prstGeom>
+          <a:solidFill>
+            <a:srgbClr val="FFFFFF"/>
+          </a:solidFill>
+          <a:ln w="10160">
+            <a:solidFill>
+              <a:srgbClr val="E5E7EB"/>
+            </a:solidFill>
+          </a:ln>
+        </p:spPr>
+        <p:style>
+          <a:lnRef idx="1">
+            <a:schemeClr val="accent1"/>
+          </a:lnRef>
+          <a:fillRef idx="3">
+            <a:schemeClr val="accent1"/>
+          </a:fillRef>
+          <a:effectRef idx="2">
+            <a:schemeClr val="accent1"/>
+          </a:effectRef>
+          <a:fontRef idx="minor">
+            <a:schemeClr val="lt1"/>
+          </a:fontRef>
+        </p:style>
+        <p:txBody>
+          <a:bodyPr rtlCol="0" anchor="ctr"/>
+          <a:lstStyle/>
+          <a:p>
+            <a:pPr algn="ctr"/>
+          </a:p>
+        </p:txBody>
+      </p:sp>
+      <p:sp>
+        <p:nvSpPr>
+          <p:cNvPr id="23" name="TextBox 22"/>
+          <p:cNvSpPr txBox="1"/>
+          <p:nvPr/>
+        </p:nvSpPr>
+        <p:spPr>
+          <a:xfrm>
+            <a:off x="640080" y="5989320"/>
+            <a:ext cx="10911535" cy="320040"/>
+          </a:xfrm>
+          <a:prstGeom prst="rect">
+            <a:avLst/>
+          </a:prstGeom>
+          <a:noFill/>
+          <a:ln>
+            <a:noFill/>
+          </a:ln>
+        </p:spPr>
+        <p:txBody>
+          <a:bodyPr wrap="square" lIns="137160" rIns="137160" tIns="137160" bIns="137160" anchor="ctr">
+            <a:spAutoFit/>
+          </a:bodyPr>
+          <a:lstStyle/>
+          <a:p>
+            <a:pPr algn="ctr">
+              <a:spcAft>
+                <a:spcPts val="300"/>
+              </a:spcAft>
+            </a:pPr>
+            <a:r>
+              <a:rPr sz="1400" b="1" lang="zh-CN">
+                <a:solidFill>
+                  <a:srgbClr val="11122A"/>
+                </a:solidFill>
+                <a:latin typeface="Microsoft YaHei"/>
+                <a:ea typeface="Microsoft YaHei"/>
+                <a:cs typeface="Microsoft YaHei"/>
+              </a:rPr>
+              <a:t>阶段判断：项目已经具备评审展示所需的完整链路，下一步应证明稳定性和真实团队使用价值。</a:t>
+            </a:r>
+          </a:p>
+        </p:txBody>
+      </p:sp>
+    </p:spTree>
+  </p:cSld>
+  <p:clrMapOvr>
+    <a:masterClrMapping/>
+  </p:clrMapOvr>
+</p:sld>
+</file>
+
+<file path=ppt/slides/slide17.xml><?xml version="1.0" encoding="utf-8"?>
+<p:sld xmlns:a="http://schemas.openxmlformats.org/drawingml/2006/main" xmlns:p="http://schemas.openxmlformats.org/presentationml/2006/main" xmlns:r="http://schemas.openxmlformats.org/officeDocument/2006/relationships">
+  <p:cSld>
+    <p:spTree>
+      <p:nvGrpSpPr>
+        <p:cNvPr id="1" name=""/>
+        <p:cNvGrpSpPr/>
+        <p:nvPr/>
+      </p:nvGrpSpPr>
+      <p:grpSpPr/>
+      <p:sp>
+        <p:nvSpPr>
+          <p:cNvPr id="2" name="Rectangle 1"/>
+          <p:cNvSpPr/>
+          <p:nvPr/>
+        </p:nvSpPr>
+        <p:spPr>
+          <a:xfrm>
+            <a:off x="0" y="0"/>
+            <a:ext cx="12191695" cy="6858000"/>
+          </a:xfrm>
+          <a:prstGeom prst="rect">
+            <a:avLst/>
+          </a:prstGeom>
+          <a:solidFill>
+            <a:srgbClr val="F8FAFC"/>
+          </a:solidFill>
+          <a:ln>
+            <a:noFill/>
+          </a:ln>
+        </p:spPr>
+        <p:style>
+          <a:lnRef idx="1">
+            <a:schemeClr val="accent1"/>
+          </a:lnRef>
+          <a:fillRef idx="3">
+            <a:schemeClr val="accent1"/>
+          </a:fillRef>
+          <a:effectRef idx="2">
+            <a:schemeClr val="accent1"/>
+          </a:effectRef>
+          <a:fontRef idx="minor">
+            <a:schemeClr val="lt1"/>
+          </a:fontRef>
+        </p:style>
+        <p:txBody>
+          <a:bodyPr rtlCol="0" anchor="ctr"/>
+          <a:lstStyle/>
+          <a:p>
+            <a:pPr algn="ctr"/>
+          </a:p>
+        </p:txBody>
+      </p:sp>
+      <p:sp>
+        <p:nvSpPr>
+          <p:cNvPr id="3" name="TextBox 2"/>
+          <p:cNvSpPr txBox="1"/>
+          <p:nvPr/>
+        </p:nvSpPr>
+        <p:spPr>
+          <a:xfrm>
+            <a:off x="502920" y="320040"/>
+            <a:ext cx="10408615" cy="457200"/>
+          </a:xfrm>
+          <a:prstGeom prst="rect">
+            <a:avLst/>
+          </a:prstGeom>
+          <a:noFill/>
+          <a:ln>
+            <a:noFill/>
+          </a:ln>
+        </p:spPr>
+        <p:txBody>
+          <a:bodyPr wrap="square" lIns="137160" rIns="137160" tIns="137160" bIns="137160" anchor="t">
+            <a:spAutoFit/>
+          </a:bodyPr>
+          <a:lstStyle/>
+          <a:p>
+            <a:pPr algn="l">
+              <a:spcAft>
+                <a:spcPts val="300"/>
+              </a:spcAft>
+            </a:pPr>
+            <a:r>
+              <a:rPr sz="2800" b="1" lang="zh-CN">
+                <a:solidFill>
+                  <a:srgbClr val="111827"/>
+                </a:solidFill>
+                <a:latin typeface="Microsoft YaHei"/>
+                <a:ea typeface="Microsoft YaHei"/>
+                <a:cs typeface="Microsoft YaHei"/>
+              </a:rPr>
+              <a:t>总结：本项目的核心价值是“AI + 测试工程治理”</a:t>
+            </a:r>
+          </a:p>
+        </p:txBody>
+      </p:sp>
+      <p:sp>
+        <p:nvSpPr>
+          <p:cNvPr id="4" name="TextBox 3"/>
+          <p:cNvSpPr txBox="1"/>
+          <p:nvPr/>
+        </p:nvSpPr>
+        <p:spPr>
+          <a:xfrm>
+            <a:off x="521208" y="777240"/>
+            <a:ext cx="10271455" cy="320040"/>
+          </a:xfrm>
+          <a:prstGeom prst="rect">
+            <a:avLst/>
+          </a:prstGeom>
+          <a:noFill/>
+          <a:ln>
+            <a:noFill/>
+          </a:ln>
+        </p:spPr>
+        <p:txBody>
+          <a:bodyPr wrap="square" lIns="137160" rIns="137160" tIns="137160" bIns="137160" anchor="t">
+            <a:spAutoFit/>
+          </a:bodyPr>
+          <a:lstStyle/>
+          <a:p>
+            <a:pPr algn="l">
+              <a:spcAft>
+                <a:spcPts val="300"/>
+              </a:spcAft>
+            </a:pPr>
+            <a:r>
+              <a:rPr sz="1500" b="0" lang="zh-CN">
+                <a:solidFill>
+                  <a:srgbClr val="4B5563"/>
+                </a:solidFill>
+                <a:latin typeface="Microsoft YaHei Light"/>
+                <a:ea typeface="Microsoft YaHei Light"/>
+                <a:cs typeface="Microsoft YaHei Light"/>
+              </a:rPr>
+              <a:t>AI 参与规划和分析，结构化 DSL 与后端 Runner 保证执行可信。</a:t>
+            </a:r>
+          </a:p>
+        </p:txBody>
+      </p:sp>
+      <p:sp>
+        <p:nvSpPr>
+          <p:cNvPr id="5" name="TextBox 4"/>
+          <p:cNvSpPr txBox="1"/>
+          <p:nvPr/>
+        </p:nvSpPr>
+        <p:spPr>
+          <a:xfrm>
+            <a:off x="10957255" y="365759"/>
+            <a:ext cx="731520" cy="228600"/>
+          </a:xfrm>
+          <a:prstGeom prst="rect">
+            <a:avLst/>
+          </a:prstGeom>
+          <a:noFill/>
+          <a:ln>
+            <a:noFill/>
+          </a:ln>
+        </p:spPr>
+        <p:txBody>
+          <a:bodyPr wrap="square" lIns="137160" rIns="137160" tIns="137160" bIns="137160" anchor="t">
+            <a:spAutoFit/>
+          </a:bodyPr>
+          <a:lstStyle/>
+          <a:p>
+            <a:pPr algn="r">
+              <a:spcAft>
+                <a:spcPts val="300"/>
+              </a:spcAft>
+            </a:pPr>
+            <a:r>
+              <a:rPr sz="1000" b="0" lang="zh-CN">
+                <a:solidFill>
+                  <a:srgbClr val="4B5563"/>
+                </a:solidFill>
+                <a:latin typeface="Microsoft YaHei"/>
+                <a:ea typeface="Microsoft YaHei"/>
+                <a:cs typeface="Microsoft YaHei"/>
+              </a:rPr>
+              <a:t>17/17</a:t>
             </a:r>
           </a:p>
         </p:txBody>
@@ -8886,7 +9873,7 @@
                 <a:ea typeface="Microsoft YaHei"/>
                 <a:cs typeface="Microsoft YaHei"/>
               </a:rPr>
-              <a:t>2/16</a:t>
+              <a:t>2/17</a:t>
             </a:r>
           </a:p>
         </p:txBody>
@@ -9507,7 +10494,7 @@
                 <a:ea typeface="Microsoft YaHei"/>
                 <a:cs typeface="Microsoft YaHei"/>
               </a:rPr>
-              <a:t>建议阅读路径：先看 3-4 页理解价值，再看 5-11 页看功能和技术证据，最后看 12-14 页判断应用与投入价值。</a:t>
+              <a:t>建议阅读路径：先看 3-5 页理解价值与方案差异，再看 6-12 页看功能和技术证据，最后看 13-16 页判断应用与投入价值。</a:t>
             </a:r>
           </a:p>
         </p:txBody>
@@ -9700,7 +10687,7 @@
                 <a:ea typeface="Microsoft YaHei"/>
                 <a:cs typeface="Microsoft YaHei"/>
               </a:rPr>
-              <a:t>3/16</a:t>
+              <a:t>3/17</a:t>
             </a:r>
           </a:p>
         </p:txBody>
@@ -9833,7 +10820,7 @@
                 <a:ea typeface="Microsoft YaHei Light"/>
                 <a:cs typeface="Microsoft YaHei Light"/>
               </a:rPr>
-              <a:t>测试脚本编写门槛高，测试人员需要理解 Playwright、选择器和断言逻辑。</a:t>
+              <a:t>门槛高：测试人员需同时掌握 Playwright/Cypress API、CSS/XPath 选择器和断言编程，招聘和培训成本大。</a:t>
             </a:r>
           </a:p>
           <a:p>
@@ -9851,7 +10838,7 @@
                 <a:ea typeface="Microsoft YaHei Light"/>
                 <a:cs typeface="Microsoft YaHei Light"/>
               </a:rPr>
-              <a:t>页面轻微改版、同名按钮或动态内容会导致定位失效。</a:t>
+              <a:t>定位脆弱：页面 DOM 结构微调、动态 class 名、列表顺序变化，就可能导致脚本批量失效，维护负担极重。</a:t>
             </a:r>
           </a:p>
           <a:p>
@@ -9869,7 +10856,25 @@
                 <a:ea typeface="Microsoft YaHei Light"/>
                 <a:cs typeface="Microsoft YaHei Light"/>
               </a:rPr>
-              <a:t>失败报告常停留在 pass/fail，缺少 DOM、截图、定位路径等证据。</a:t>
+              <a:t>失败难复盘：传统报告只有 pass/fail + 单张截图，缺少 DOM 快照、候选定位路径、控制台日志和网络请求上下文。</a:t>
+            </a:r>
+          </a:p>
+          <a:p>
+            <a:pPr algn="l">
+              <a:spcAft>
+                <a:spcPts val="300"/>
+              </a:spcAft>
+            </a:pPr>
+            <a:r>
+              <a:rPr sz="1100" b="0" lang="zh-CN">
+                <a:solidFill>
+                  <a:srgbClr val="4B5563"/>
+                </a:solidFill>
+                <a:latin typeface="Microsoft YaHei Light"/>
+                <a:ea typeface="Microsoft YaHei Light"/>
+                <a:cs typeface="Microsoft YaHei Light"/>
+              </a:rPr>
+              <a:t>资产难沉淀：测试脚本散落在代码仓库，缺乏统一的项目→用例→执行三级管理，时间和人力成本难以度量。</a:t>
             </a:r>
           </a:p>
         </p:txBody>
@@ -10002,7 +11007,7 @@
                 <a:ea typeface="Microsoft YaHei Light"/>
                 <a:cs typeface="Microsoft YaHei Light"/>
               </a:rPr>
-              <a:t>自然语言输出不稳定，可能省略步骤、修改断言或直接误操作。</a:t>
+              <a:t>输出不稳定：同一句自然语言指令可能产生不同操作路径，省略步骤、调换顺序或误改断言，不符合测试可复现性原则。</a:t>
             </a:r>
           </a:p>
           <a:p>
@@ -10020,7 +11025,7 @@
                 <a:ea typeface="Microsoft YaHei Light"/>
                 <a:cs typeface="Microsoft YaHei Light"/>
               </a:rPr>
-              <a:t>若 AI 直接控制浏览器，测试资产难以版本化和审查。</a:t>
+              <a:t>不可审计：AI 直接操控浏览器，决策过程不透明、操作记录无法版本化、出问题时难以回溯到底是哪一步判断出错。</a:t>
             </a:r>
           </a:p>
           <a:p>
@@ -10038,7 +11043,25 @@
                 <a:ea typeface="Microsoft YaHei Light"/>
                 <a:cs typeface="Microsoft YaHei Light"/>
               </a:rPr>
-              <a:t>每一步都依赖大模型会带来高成本、高延迟和不稳定性。</a:t>
+              <a:t>成本不可控：每一步页面理解和动作决策都需调用 LLM，单次回归几十个步骤叠加下来，大模型费用远超人工或脚本。</a:t>
+            </a:r>
+          </a:p>
+          <a:p>
+            <a:pPr algn="l">
+              <a:spcAft>
+                <a:spcPts val="300"/>
+              </a:spcAft>
+            </a:pPr>
+            <a:r>
+              <a:rPr sz="1100" b="0" lang="zh-CN">
+                <a:solidFill>
+                  <a:srgbClr val="4B5563"/>
+                </a:solidFill>
+                <a:latin typeface="Microsoft YaHei Light"/>
+                <a:ea typeface="Microsoft YaHei Light"/>
+                <a:cs typeface="Microsoft YaHei Light"/>
+              </a:rPr>
+              <a:t>缺乏工程治理：Agent 把 AI 推理和执行混在一起，无法对接 CI/CD、权限体系、测试资产管理和合规审计要求。</a:t>
             </a:r>
           </a:p>
         </p:txBody>
@@ -10086,7 +11109,7 @@
                 <a:ea typeface="Microsoft YaHei"/>
                 <a:cs typeface="Microsoft YaHei"/>
               </a:rPr>
-              <a:t>本项目的创意切入点：让 AI 负责规划和草案，让 DSL 与 Runner 负责正式执行，让报告负责证据化复盘。</a:t>
+              <a:t>本项目的切入点：将 AI 限定在规划和疑难分析环节，让结构化 DSL 和后端确定性 Runner 作为正式执行的唯一入口，用步骤级证据报告替代 Agent 黑盒推理。</a:t>
             </a:r>
           </a:p>
         </p:txBody>
@@ -10191,7 +11214,7 @@
                 <a:ea typeface="Microsoft YaHei"/>
                 <a:cs typeface="Microsoft YaHei"/>
               </a:rPr>
-              <a:t>项目目标：形成从需求到报告的自动化测试闭环</a:t>
+              <a:t>与主流 AI 浏览器 Agent 的方案差异：治理优先，而非自主优先</a:t>
             </a:r>
           </a:p>
         </p:txBody>
@@ -10235,7 +11258,7 @@
                 <a:ea typeface="Microsoft YaHei Light"/>
                 <a:cs typeface="Microsoft YaHei Light"/>
               </a:rPr>
-              <a:t>目标不是生成一次性脚本，而是沉淀可复用的测试资产。</a:t>
+              <a:t>2026 年 Web Bench 基准显示，最强 Agent 在写操作任务上的自主成功率也不足 47%。本项目选择了一条不同的路。</a:t>
             </a:r>
           </a:p>
         </p:txBody>
@@ -10279,7 +11302,952 @@
                 <a:ea typeface="Microsoft YaHei"/>
                 <a:cs typeface="Microsoft YaHei"/>
               </a:rPr>
-              <a:t>4/16</a:t>
+              <a:t>4/17</a:t>
+            </a:r>
+          </a:p>
+        </p:txBody>
+      </p:sp>
+      <p:graphicFrame>
+        <p:nvGraphicFramePr>
+          <p:cNvPr id="6" name="Table 5"/>
+          <p:cNvGraphicFramePr>
+            <a:graphicFrameLocks noGrp="1"/>
+          </p:cNvGraphicFramePr>
+          <p:nvPr/>
+        </p:nvGraphicFramePr>
+        <p:xfrm>
+          <a:off x="502920" y="1371600"/>
+          <a:ext cx="11185854" cy="3931920"/>
+        </p:xfrm>
+        <a:graphic>
+          <a:graphicData uri="http://schemas.openxmlformats.org/drawingml/2006/table">
+            <a:tbl>
+              <a:tblPr firstRow="1" bandRow="1">
+                <a:tableStyleId>{5C22544A-7EE6-4342-B048-85BDC9FD1C3A}</a:tableStyleId>
+              </a:tblPr>
+              <a:tblGrid>
+                <a:gridCol w="1677878"/>
+                <a:gridCol w="4698059"/>
+                <a:gridCol w="4809917"/>
+              </a:tblGrid>
+              <a:tr h="491490">
+                <a:tc>
+                  <a:txBody>
+                    <a:bodyPr lIns="73152" rIns="73152" wrap="square"/>
+                    <a:lstStyle/>
+                    <a:p>
+                      <a:r>
+                        <a:rPr sz="1100" b="1" lang="zh-CN">
+                          <a:solidFill>
+                            <a:srgbClr val="FFFFFF"/>
+                          </a:solidFill>
+                          <a:latin typeface="Microsoft YaHei"/>
+                          <a:ea typeface="Microsoft YaHei"/>
+                          <a:cs typeface="Microsoft YaHei"/>
+                        </a:rPr>
+                        <a:t>对比维度</a:t>
+                      </a:r>
+                    </a:p>
+                  </a:txBody>
+                  <a:tcPr>
+                    <a:solidFill>
+                      <a:srgbClr val="11122A"/>
+                    </a:solidFill>
+                  </a:tcPr>
+                </a:tc>
+                <a:tc>
+                  <a:txBody>
+                    <a:bodyPr lIns="73152" rIns="73152" wrap="square"/>
+                    <a:lstStyle/>
+                    <a:p>
+                      <a:r>
+                        <a:rPr sz="1100" b="1" lang="zh-CN">
+                          <a:solidFill>
+                            <a:srgbClr val="FFFFFF"/>
+                          </a:solidFill>
+                          <a:latin typeface="Microsoft YaHei"/>
+                          <a:ea typeface="Microsoft YaHei"/>
+                          <a:cs typeface="Microsoft YaHei"/>
+                        </a:rPr>
+                        <a:t>主流 AI Agent（Browser Use / Skyvern / Mariner）</a:t>
+                      </a:r>
+                    </a:p>
+                  </a:txBody>
+                  <a:tcPr>
+                    <a:solidFill>
+                      <a:srgbClr val="11122A"/>
+                    </a:solidFill>
+                  </a:tcPr>
+                </a:tc>
+                <a:tc>
+                  <a:txBody>
+                    <a:bodyPr lIns="73152" rIns="73152" wrap="square"/>
+                    <a:lstStyle/>
+                    <a:p>
+                      <a:r>
+                        <a:rPr sz="1100" b="1" lang="zh-CN">
+                          <a:solidFill>
+                            <a:srgbClr val="FFFFFF"/>
+                          </a:solidFill>
+                          <a:latin typeface="Microsoft YaHei"/>
+                          <a:ea typeface="Microsoft YaHei"/>
+                          <a:cs typeface="Microsoft YaHei"/>
+                        </a:rPr>
+                        <a:t>本项目（AI Testing Platform）</a:t>
+                      </a:r>
+                    </a:p>
+                  </a:txBody>
+                  <a:tcPr>
+                    <a:solidFill>
+                      <a:srgbClr val="11122A"/>
+                    </a:solidFill>
+                  </a:tcPr>
+                </a:tc>
+              </a:tr>
+              <a:tr h="491490">
+                <a:tc>
+                  <a:txBody>
+                    <a:bodyPr lIns="73152" rIns="73152" tIns="36576" bIns="36576" wrap="square"/>
+                    <a:lstStyle/>
+                    <a:p>
+                      <a:r>
+                        <a:rPr sz="1000" b="0" lang="zh-CN">
+                          <a:solidFill>
+                            <a:srgbClr val="111827"/>
+                          </a:solidFill>
+                          <a:latin typeface="Microsoft YaHei"/>
+                          <a:ea typeface="Microsoft YaHei"/>
+                          <a:cs typeface="Microsoft YaHei"/>
+                        </a:rPr>
+                        <a:t>核心范式</a:t>
+                      </a:r>
+                    </a:p>
+                  </a:txBody>
+                  <a:tcPr>
+                    <a:solidFill>
+                      <a:srgbClr val="FFFFFF"/>
+                    </a:solidFill>
+                  </a:tcPr>
+                </a:tc>
+                <a:tc>
+                  <a:txBody>
+                    <a:bodyPr lIns="73152" rIns="73152" tIns="36576" bIns="36576" wrap="square"/>
+                    <a:lstStyle/>
+                    <a:p>
+                      <a:r>
+                        <a:rPr sz="1000" b="0" lang="zh-CN">
+                          <a:solidFill>
+                            <a:srgbClr val="111827"/>
+                          </a:solidFill>
+                          <a:latin typeface="Microsoft YaHei"/>
+                          <a:ea typeface="Microsoft YaHei"/>
+                          <a:cs typeface="Microsoft YaHei"/>
+                        </a:rPr>
+                        <a:t>目标驱动：给定自然语言指令，AI 自主规划并操控浏览器完成操作</a:t>
+                      </a:r>
+                    </a:p>
+                  </a:txBody>
+                  <a:tcPr>
+                    <a:solidFill>
+                      <a:srgbClr val="FFFFFF"/>
+                    </a:solidFill>
+                  </a:tcPr>
+                </a:tc>
+                <a:tc>
+                  <a:txBody>
+                    <a:bodyPr lIns="73152" rIns="73152" tIns="36576" bIns="36576" wrap="square"/>
+                    <a:lstStyle/>
+                    <a:p>
+                      <a:r>
+                        <a:rPr sz="1000" b="0" lang="zh-CN">
+                          <a:solidFill>
+                            <a:srgbClr val="111827"/>
+                          </a:solidFill>
+                          <a:latin typeface="Microsoft YaHei"/>
+                          <a:ea typeface="Microsoft YaHei"/>
+                          <a:cs typeface="Microsoft YaHei"/>
+                        </a:rPr>
+                        <a:t>工程驱动：AI 先生成结构化 DSL 草案，人工审查后由确定性 Runner 执行</a:t>
+                      </a:r>
+                    </a:p>
+                  </a:txBody>
+                  <a:tcPr>
+                    <a:solidFill>
+                      <a:srgbClr val="FFFFFF"/>
+                    </a:solidFill>
+                  </a:tcPr>
+                </a:tc>
+              </a:tr>
+              <a:tr h="491490">
+                <a:tc>
+                  <a:txBody>
+                    <a:bodyPr lIns="73152" rIns="73152" tIns="36576" bIns="36576" wrap="square"/>
+                    <a:lstStyle/>
+                    <a:p>
+                      <a:r>
+                        <a:rPr sz="1000" b="0" lang="zh-CN">
+                          <a:solidFill>
+                            <a:srgbClr val="111827"/>
+                          </a:solidFill>
+                          <a:latin typeface="Microsoft YaHei"/>
+                          <a:ea typeface="Microsoft YaHei"/>
+                          <a:cs typeface="Microsoft YaHei"/>
+                        </a:rPr>
+                        <a:t>执行可靠性</a:t>
+                      </a:r>
+                    </a:p>
+                  </a:txBody>
+                  <a:tcPr>
+                    <a:solidFill>
+                      <a:srgbClr val="F5F7FA"/>
+                    </a:solidFill>
+                  </a:tcPr>
+                </a:tc>
+                <a:tc>
+                  <a:txBody>
+                    <a:bodyPr lIns="73152" rIns="73152" tIns="36576" bIns="36576" wrap="square"/>
+                    <a:lstStyle/>
+                    <a:p>
+                      <a:r>
+                        <a:rPr sz="1000" b="0" lang="zh-CN">
+                          <a:solidFill>
+                            <a:srgbClr val="111827"/>
+                          </a:solidFill>
+                          <a:latin typeface="Microsoft YaHei"/>
+                          <a:ea typeface="Microsoft YaHei"/>
+                          <a:cs typeface="Microsoft YaHei"/>
+                        </a:rPr>
+                        <a:t>同一指令可能产生不同操作路径；Web Bench 写任务最高 46.6%，读任务约 75%</a:t>
+                      </a:r>
+                    </a:p>
+                  </a:txBody>
+                  <a:tcPr>
+                    <a:solidFill>
+                      <a:srgbClr val="F5F7FA"/>
+                    </a:solidFill>
+                  </a:tcPr>
+                </a:tc>
+                <a:tc>
+                  <a:txBody>
+                    <a:bodyPr lIns="73152" rIns="73152" tIns="36576" bIns="36576" wrap="square"/>
+                    <a:lstStyle/>
+                    <a:p>
+                      <a:r>
+                        <a:rPr sz="1000" b="0" lang="zh-CN">
+                          <a:solidFill>
+                            <a:srgbClr val="111827"/>
+                          </a:solidFill>
+                          <a:latin typeface="Microsoft YaHei"/>
+                          <a:ea typeface="Microsoft YaHei"/>
+                          <a:cs typeface="Microsoft YaHei"/>
+                        </a:rPr>
+                        <a:t>同一条 DSL 始终产生相同步骤序列；Playwright Runner 执行确定性 100%</a:t>
+                      </a:r>
+                    </a:p>
+                  </a:txBody>
+                  <a:tcPr>
+                    <a:solidFill>
+                      <a:srgbClr val="F5F7FA"/>
+                    </a:solidFill>
+                  </a:tcPr>
+                </a:tc>
+              </a:tr>
+              <a:tr h="491490">
+                <a:tc>
+                  <a:txBody>
+                    <a:bodyPr lIns="73152" rIns="73152" tIns="36576" bIns="36576" wrap="square"/>
+                    <a:lstStyle/>
+                    <a:p>
+                      <a:r>
+                        <a:rPr sz="1000" b="0" lang="zh-CN">
+                          <a:solidFill>
+                            <a:srgbClr val="111827"/>
+                          </a:solidFill>
+                          <a:latin typeface="Microsoft YaHei"/>
+                          <a:ea typeface="Microsoft YaHei"/>
+                          <a:cs typeface="Microsoft YaHei"/>
+                        </a:rPr>
+                        <a:t>成本模型</a:t>
+                      </a:r>
+                    </a:p>
+                  </a:txBody>
+                  <a:tcPr>
+                    <a:solidFill>
+                      <a:srgbClr val="FFFFFF"/>
+                    </a:solidFill>
+                  </a:tcPr>
+                </a:tc>
+                <a:tc>
+                  <a:txBody>
+                    <a:bodyPr lIns="73152" rIns="73152" tIns="36576" bIns="36576" wrap="square"/>
+                    <a:lstStyle/>
+                    <a:p>
+                      <a:r>
+                        <a:rPr sz="1000" b="0" lang="zh-CN">
+                          <a:solidFill>
+                            <a:srgbClr val="111827"/>
+                          </a:solidFill>
+                          <a:latin typeface="Microsoft YaHei"/>
+                          <a:ea typeface="Microsoft YaHei"/>
+                          <a:cs typeface="Microsoft YaHei"/>
+                        </a:rPr>
+                        <a:t>每一步页面理解和动作决策都调用 LLM；Browser Use v0.12 优化后仍 ~2,400 tokens/步</a:t>
+                      </a:r>
+                    </a:p>
+                  </a:txBody>
+                  <a:tcPr>
+                    <a:solidFill>
+                      <a:srgbClr val="FFFFFF"/>
+                    </a:solidFill>
+                  </a:tcPr>
+                </a:tc>
+                <a:tc>
+                  <a:txBody>
+                    <a:bodyPr lIns="73152" rIns="73152" tIns="36576" bIns="36576" wrap="square"/>
+                    <a:lstStyle/>
+                    <a:p>
+                      <a:r>
+                        <a:rPr sz="1000" b="0" lang="zh-CN">
+                          <a:solidFill>
+                            <a:srgbClr val="111827"/>
+                          </a:solidFill>
+                          <a:latin typeface="Microsoft YaHei"/>
+                          <a:ea typeface="Microsoft YaHei"/>
+                          <a:cs typeface="Microsoft YaHei"/>
+                        </a:rPr>
+                        <a:t>只在规划、DSL 生成和疑难定位时调用 LLM；常规回归执行零 LLM 成本</a:t>
+                      </a:r>
+                    </a:p>
+                  </a:txBody>
+                  <a:tcPr>
+                    <a:solidFill>
+                      <a:srgbClr val="FFFFFF"/>
+                    </a:solidFill>
+                  </a:tcPr>
+                </a:tc>
+              </a:tr>
+              <a:tr h="491490">
+                <a:tc>
+                  <a:txBody>
+                    <a:bodyPr lIns="73152" rIns="73152" tIns="36576" bIns="36576" wrap="square"/>
+                    <a:lstStyle/>
+                    <a:p>
+                      <a:r>
+                        <a:rPr sz="1000" b="0" lang="zh-CN">
+                          <a:solidFill>
+                            <a:srgbClr val="111827"/>
+                          </a:solidFill>
+                          <a:latin typeface="Microsoft YaHei"/>
+                          <a:ea typeface="Microsoft YaHei"/>
+                          <a:cs typeface="Microsoft YaHei"/>
+                        </a:rPr>
+                        <a:t>测试资产管理</a:t>
+                      </a:r>
+                    </a:p>
+                  </a:txBody>
+                  <a:tcPr>
+                    <a:solidFill>
+                      <a:srgbClr val="F5F7FA"/>
+                    </a:solidFill>
+                  </a:tcPr>
+                </a:tc>
+                <a:tc>
+                  <a:txBody>
+                    <a:bodyPr lIns="73152" rIns="73152" tIns="36576" bIns="36576" wrap="square"/>
+                    <a:lstStyle/>
+                    <a:p>
+                      <a:r>
+                        <a:rPr sz="1000" b="0" lang="zh-CN">
+                          <a:solidFill>
+                            <a:srgbClr val="111827"/>
+                          </a:solidFill>
+                          <a:latin typeface="Microsoft YaHei"/>
+                          <a:ea typeface="Microsoft YaHei"/>
+                          <a:cs typeface="Microsoft YaHei"/>
+                        </a:rPr>
+                        <a:t>对话历史 / 执行录像，难以版本化和 CI/CD 集成</a:t>
+                      </a:r>
+                    </a:p>
+                  </a:txBody>
+                  <a:tcPr>
+                    <a:solidFill>
+                      <a:srgbClr val="F5F7FA"/>
+                    </a:solidFill>
+                  </a:tcPr>
+                </a:tc>
+                <a:tc>
+                  <a:txBody>
+                    <a:bodyPr lIns="73152" rIns="73152" tIns="36576" bIns="36576" wrap="square"/>
+                    <a:lstStyle/>
+                    <a:p>
+                      <a:r>
+                        <a:rPr sz="1000" b="0" lang="zh-CN">
+                          <a:solidFill>
+                            <a:srgbClr val="111827"/>
+                          </a:solidFill>
+                          <a:latin typeface="Microsoft YaHei"/>
+                          <a:ea typeface="Microsoft YaHei"/>
+                          <a:cs typeface="Microsoft YaHei"/>
+                        </a:rPr>
+                        <a:t>Project → Case → Run 三级结构化存储，可版本化、可编辑、可批量编排</a:t>
+                      </a:r>
+                    </a:p>
+                  </a:txBody>
+                  <a:tcPr>
+                    <a:solidFill>
+                      <a:srgbClr val="F5F7FA"/>
+                    </a:solidFill>
+                  </a:tcPr>
+                </a:tc>
+              </a:tr>
+              <a:tr h="491490">
+                <a:tc>
+                  <a:txBody>
+                    <a:bodyPr lIns="73152" rIns="73152" tIns="36576" bIns="36576" wrap="square"/>
+                    <a:lstStyle/>
+                    <a:p>
+                      <a:r>
+                        <a:rPr sz="1000" b="0" lang="zh-CN">
+                          <a:solidFill>
+                            <a:srgbClr val="111827"/>
+                          </a:solidFill>
+                          <a:latin typeface="Microsoft YaHei"/>
+                          <a:ea typeface="Microsoft YaHei"/>
+                          <a:cs typeface="Microsoft YaHei"/>
+                        </a:rPr>
+                        <a:t>失败定位能力</a:t>
+                      </a:r>
+                    </a:p>
+                  </a:txBody>
+                  <a:tcPr>
+                    <a:solidFill>
+                      <a:srgbClr val="FFFFFF"/>
+                    </a:solidFill>
+                  </a:tcPr>
+                </a:tc>
+                <a:tc>
+                  <a:txBody>
+                    <a:bodyPr lIns="73152" rIns="73152" tIns="36576" bIns="36576" wrap="square"/>
+                    <a:lstStyle/>
+                    <a:p>
+                      <a:r>
+                        <a:rPr sz="1000" b="0" lang="zh-CN">
+                          <a:solidFill>
+                            <a:srgbClr val="111827"/>
+                          </a:solidFill>
+                          <a:latin typeface="Microsoft YaHei"/>
+                          <a:ea typeface="Microsoft YaHei"/>
+                          <a:cs typeface="Microsoft YaHei"/>
+                        </a:rPr>
+                        <a:t>需回放 Agent 思考链或录像，决策过程不透明</a:t>
+                      </a:r>
+                    </a:p>
+                  </a:txBody>
+                  <a:tcPr>
+                    <a:solidFill>
+                      <a:srgbClr val="FFFFFF"/>
+                    </a:solidFill>
+                  </a:tcPr>
+                </a:tc>
+                <a:tc>
+                  <a:txBody>
+                    <a:bodyPr lIns="73152" rIns="73152" tIns="36576" bIns="36576" wrap="square"/>
+                    <a:lstStyle/>
+                    <a:p>
+                      <a:r>
+                        <a:rPr sz="1000" b="0" lang="zh-CN">
+                          <a:solidFill>
+                            <a:srgbClr val="111827"/>
+                          </a:solidFill>
+                          <a:latin typeface="Microsoft YaHei"/>
+                          <a:ea typeface="Microsoft YaHei"/>
+                          <a:cs typeface="Microsoft YaHei"/>
+                        </a:rPr>
+                        <a:t>步骤级证据报告：截图、DOM 快照、候选定位路径、最终命中元素和控制台日志</a:t>
+                      </a:r>
+                    </a:p>
+                  </a:txBody>
+                  <a:tcPr>
+                    <a:solidFill>
+                      <a:srgbClr val="FFFFFF"/>
+                    </a:solidFill>
+                  </a:tcPr>
+                </a:tc>
+              </a:tr>
+              <a:tr h="491490">
+                <a:tc>
+                  <a:txBody>
+                    <a:bodyPr lIns="73152" rIns="73152" tIns="36576" bIns="36576" wrap="square"/>
+                    <a:lstStyle/>
+                    <a:p>
+                      <a:r>
+                        <a:rPr sz="1000" b="0" lang="zh-CN">
+                          <a:solidFill>
+                            <a:srgbClr val="111827"/>
+                          </a:solidFill>
+                          <a:latin typeface="Microsoft YaHei"/>
+                          <a:ea typeface="Microsoft YaHei"/>
+                          <a:cs typeface="Microsoft YaHei"/>
+                        </a:rPr>
+                        <a:t>人工介入方式</a:t>
+                      </a:r>
+                    </a:p>
+                  </a:txBody>
+                  <a:tcPr>
+                    <a:solidFill>
+                      <a:srgbClr val="F5F7FA"/>
+                    </a:solidFill>
+                  </a:tcPr>
+                </a:tc>
+                <a:tc>
+                  <a:txBody>
+                    <a:bodyPr lIns="73152" rIns="73152" tIns="36576" bIns="36576" wrap="square"/>
+                    <a:lstStyle/>
+                    <a:p>
+                      <a:r>
+                        <a:rPr sz="1000" b="0" lang="zh-CN">
+                          <a:solidFill>
+                            <a:srgbClr val="111827"/>
+                          </a:solidFill>
+                          <a:latin typeface="Microsoft YaHei"/>
+                          <a:ea typeface="Microsoft YaHei"/>
+                          <a:cs typeface="Microsoft YaHei"/>
+                        </a:rPr>
+                        <a:t>重新描述需求，重新执行；上次经验不会自动沉淀</a:t>
+                      </a:r>
+                    </a:p>
+                  </a:txBody>
+                  <a:tcPr>
+                    <a:solidFill>
+                      <a:srgbClr val="F5F7FA"/>
+                    </a:solidFill>
+                  </a:tcPr>
+                </a:tc>
+                <a:tc>
+                  <a:txBody>
+                    <a:bodyPr lIns="73152" rIns="73152" tIns="36576" bIns="36576" wrap="square"/>
+                    <a:lstStyle/>
+                    <a:p>
+                      <a:r>
+                        <a:rPr sz="1000" b="0" lang="zh-CN">
+                          <a:solidFill>
+                            <a:srgbClr val="111827"/>
+                          </a:solidFill>
+                          <a:latin typeface="Microsoft YaHei"/>
+                          <a:ea typeface="Microsoft YaHei"/>
+                          <a:cs typeface="Microsoft YaHei"/>
+                        </a:rPr>
+                        <a:t>定位修正记录沉淀为 Tier 0 优先匹配资产；修正次数越多定位越准</a:t>
+                      </a:r>
+                    </a:p>
+                  </a:txBody>
+                  <a:tcPr>
+                    <a:solidFill>
+                      <a:srgbClr val="F5F7FA"/>
+                    </a:solidFill>
+                  </a:tcPr>
+                </a:tc>
+              </a:tr>
+              <a:tr h="491490">
+                <a:tc>
+                  <a:txBody>
+                    <a:bodyPr lIns="73152" rIns="73152" tIns="36576" bIns="36576" wrap="square"/>
+                    <a:lstStyle/>
+                    <a:p>
+                      <a:r>
+                        <a:rPr sz="1000" b="0" lang="zh-CN">
+                          <a:solidFill>
+                            <a:srgbClr val="111827"/>
+                          </a:solidFill>
+                          <a:latin typeface="Microsoft YaHei"/>
+                          <a:ea typeface="Microsoft YaHei"/>
+                          <a:cs typeface="Microsoft YaHei"/>
+                        </a:rPr>
+                        <a:t>适用场景</a:t>
+                      </a:r>
+                    </a:p>
+                  </a:txBody>
+                  <a:tcPr>
+                    <a:solidFill>
+                      <a:srgbClr val="FFFFFF"/>
+                    </a:solidFill>
+                  </a:tcPr>
+                </a:tc>
+                <a:tc>
+                  <a:txBody>
+                    <a:bodyPr lIns="73152" rIns="73152" tIns="36576" bIns="36576" wrap="square"/>
+                    <a:lstStyle/>
+                    <a:p>
+                      <a:r>
+                        <a:rPr sz="1000" b="0" lang="zh-CN">
+                          <a:solidFill>
+                            <a:srgbClr val="111827"/>
+                          </a:solidFill>
+                          <a:latin typeface="Microsoft YaHei"/>
+                          <a:ea typeface="Microsoft YaHei"/>
+                          <a:cs typeface="Microsoft YaHei"/>
+                        </a:rPr>
+                        <a:t>探索性操作、一次性数据采集、页面内容提取</a:t>
+                      </a:r>
+                    </a:p>
+                  </a:txBody>
+                  <a:tcPr>
+                    <a:solidFill>
+                      <a:srgbClr val="FFFFFF"/>
+                    </a:solidFill>
+                  </a:tcPr>
+                </a:tc>
+                <a:tc>
+                  <a:txBody>
+                    <a:bodyPr lIns="73152" rIns="73152" tIns="36576" bIns="36576" wrap="square"/>
+                    <a:lstStyle/>
+                    <a:p>
+                      <a:r>
+                        <a:rPr sz="1000" b="0" lang="zh-CN">
+                          <a:solidFill>
+                            <a:srgbClr val="111827"/>
+                          </a:solidFill>
+                          <a:latin typeface="Microsoft YaHei"/>
+                          <a:ea typeface="Microsoft YaHei"/>
+                          <a:cs typeface="Microsoft YaHei"/>
+                        </a:rPr>
+                        <a:t>Web 冒烟测试、发布前核心路径回归、持续集成中的确定性验证</a:t>
+                      </a:r>
+                    </a:p>
+                  </a:txBody>
+                  <a:tcPr>
+                    <a:solidFill>
+                      <a:srgbClr val="FFFFFF"/>
+                    </a:solidFill>
+                  </a:tcPr>
+                </a:tc>
+              </a:tr>
+            </a:tbl>
+          </a:graphicData>
+        </a:graphic>
+      </p:graphicFrame>
+      <p:sp>
+        <p:nvSpPr>
+          <p:cNvPr id="7" name="TextBox 6"/>
+          <p:cNvSpPr txBox="1"/>
+          <p:nvPr/>
+        </p:nvSpPr>
+        <p:spPr>
+          <a:xfrm>
+            <a:off x="502920" y="5349240"/>
+            <a:ext cx="11185855" cy="228600"/>
+          </a:xfrm>
+          <a:prstGeom prst="rect">
+            <a:avLst/>
+          </a:prstGeom>
+          <a:noFill/>
+          <a:ln>
+            <a:noFill/>
+          </a:ln>
+        </p:spPr>
+        <p:txBody>
+          <a:bodyPr wrap="square" lIns="137160" rIns="137160" tIns="137160" bIns="137160" anchor="t">
+            <a:spAutoFit/>
+          </a:bodyPr>
+          <a:lstStyle/>
+          <a:p>
+            <a:pPr algn="l">
+              <a:spcAft>
+                <a:spcPts val="300"/>
+              </a:spcAft>
+            </a:pPr>
+            <a:r>
+              <a:rPr sz="1000" b="0" lang="zh-CN">
+                <a:solidFill>
+                  <a:srgbClr val="4B5563"/>
+                </a:solidFill>
+                <a:latin typeface="Microsoft YaHei Light"/>
+                <a:ea typeface="Microsoft YaHei Light"/>
+                <a:cs typeface="Microsoft YaHei Light"/>
+              </a:rPr>
+              <a:t>数据来源：Web Bench (Skyvern, 2026.2)、WebVoyager Benchmark、Browser Use v0.12 CDP 架构文档。</a:t>
+            </a:r>
+          </a:p>
+        </p:txBody>
+      </p:sp>
+      <p:sp>
+        <p:nvSpPr>
+          <p:cNvPr id="8" name="Rectangle 7"/>
+          <p:cNvSpPr/>
+          <p:nvPr/>
+        </p:nvSpPr>
+        <p:spPr>
+          <a:xfrm>
+            <a:off x="502920" y="5943600"/>
+            <a:ext cx="11185855" cy="411480"/>
+          </a:xfrm>
+          <a:prstGeom prst="rect">
+            <a:avLst/>
+          </a:prstGeom>
+          <a:solidFill>
+            <a:srgbClr val="FFFFFF"/>
+          </a:solidFill>
+          <a:ln w="10160">
+            <a:solidFill>
+              <a:srgbClr val="E5E7EB"/>
+            </a:solidFill>
+          </a:ln>
+        </p:spPr>
+        <p:style>
+          <a:lnRef idx="1">
+            <a:schemeClr val="accent1"/>
+          </a:lnRef>
+          <a:fillRef idx="3">
+            <a:schemeClr val="accent1"/>
+          </a:fillRef>
+          <a:effectRef idx="2">
+            <a:schemeClr val="accent1"/>
+          </a:effectRef>
+          <a:fontRef idx="minor">
+            <a:schemeClr val="lt1"/>
+          </a:fontRef>
+        </p:style>
+        <p:txBody>
+          <a:bodyPr rtlCol="0" anchor="ctr"/>
+          <a:lstStyle/>
+          <a:p>
+            <a:pPr algn="ctr"/>
+          </a:p>
+        </p:txBody>
+      </p:sp>
+      <p:sp>
+        <p:nvSpPr>
+          <p:cNvPr id="9" name="TextBox 8"/>
+          <p:cNvSpPr txBox="1"/>
+          <p:nvPr/>
+        </p:nvSpPr>
+        <p:spPr>
+          <a:xfrm>
+            <a:off x="640080" y="5989320"/>
+            <a:ext cx="10911535" cy="320040"/>
+          </a:xfrm>
+          <a:prstGeom prst="rect">
+            <a:avLst/>
+          </a:prstGeom>
+          <a:noFill/>
+          <a:ln>
+            <a:noFill/>
+          </a:ln>
+        </p:spPr>
+        <p:txBody>
+          <a:bodyPr wrap="square" lIns="137160" rIns="137160" tIns="137160" bIns="137160" anchor="ctr">
+            <a:spAutoFit/>
+          </a:bodyPr>
+          <a:lstStyle/>
+          <a:p>
+            <a:pPr algn="ctr">
+              <a:spcAft>
+                <a:spcPts val="300"/>
+              </a:spcAft>
+            </a:pPr>
+            <a:r>
+              <a:rPr sz="1400" b="1" lang="zh-CN">
+                <a:solidFill>
+                  <a:srgbClr val="11122A"/>
+                </a:solidFill>
+                <a:latin typeface="Microsoft YaHei"/>
+                <a:ea typeface="Microsoft YaHei"/>
+                <a:cs typeface="Microsoft YaHei"/>
+              </a:rPr>
+              <a:t>一句话总结：主流 Agent 追求「AI 自主完成操作」，本项目追求「AI 辅助生成可审查的测试资产并由确定性引擎执行」。两者目标不同，架构选择也不同。</a:t>
+            </a:r>
+          </a:p>
+        </p:txBody>
+      </p:sp>
+    </p:spTree>
+  </p:cSld>
+  <p:clrMapOvr>
+    <a:masterClrMapping/>
+  </p:clrMapOvr>
+</p:sld>
+</file>
+
+<file path=ppt/slides/slide5.xml><?xml version="1.0" encoding="utf-8"?>
+<p:sld xmlns:a="http://schemas.openxmlformats.org/drawingml/2006/main" xmlns:p="http://schemas.openxmlformats.org/presentationml/2006/main" xmlns:r="http://schemas.openxmlformats.org/officeDocument/2006/relationships">
+  <p:cSld>
+    <p:spTree>
+      <p:nvGrpSpPr>
+        <p:cNvPr id="1" name=""/>
+        <p:cNvGrpSpPr/>
+        <p:nvPr/>
+      </p:nvGrpSpPr>
+      <p:grpSpPr/>
+      <p:sp>
+        <p:nvSpPr>
+          <p:cNvPr id="2" name="Rectangle 1"/>
+          <p:cNvSpPr/>
+          <p:nvPr/>
+        </p:nvSpPr>
+        <p:spPr>
+          <a:xfrm>
+            <a:off x="0" y="0"/>
+            <a:ext cx="12191695" cy="6858000"/>
+          </a:xfrm>
+          <a:prstGeom prst="rect">
+            <a:avLst/>
+          </a:prstGeom>
+          <a:solidFill>
+            <a:srgbClr val="F8FAFC"/>
+          </a:solidFill>
+          <a:ln>
+            <a:noFill/>
+          </a:ln>
+        </p:spPr>
+        <p:style>
+          <a:lnRef idx="1">
+            <a:schemeClr val="accent1"/>
+          </a:lnRef>
+          <a:fillRef idx="3">
+            <a:schemeClr val="accent1"/>
+          </a:fillRef>
+          <a:effectRef idx="2">
+            <a:schemeClr val="accent1"/>
+          </a:effectRef>
+          <a:fontRef idx="minor">
+            <a:schemeClr val="lt1"/>
+          </a:fontRef>
+        </p:style>
+        <p:txBody>
+          <a:bodyPr rtlCol="0" anchor="ctr"/>
+          <a:lstStyle/>
+          <a:p>
+            <a:pPr algn="ctr"/>
+          </a:p>
+        </p:txBody>
+      </p:sp>
+      <p:sp>
+        <p:nvSpPr>
+          <p:cNvPr id="3" name="TextBox 2"/>
+          <p:cNvSpPr txBox="1"/>
+          <p:nvPr/>
+        </p:nvSpPr>
+        <p:spPr>
+          <a:xfrm>
+            <a:off x="502920" y="320040"/>
+            <a:ext cx="10408615" cy="457200"/>
+          </a:xfrm>
+          <a:prstGeom prst="rect">
+            <a:avLst/>
+          </a:prstGeom>
+          <a:noFill/>
+          <a:ln>
+            <a:noFill/>
+          </a:ln>
+        </p:spPr>
+        <p:txBody>
+          <a:bodyPr wrap="square" lIns="137160" rIns="137160" tIns="137160" bIns="137160" anchor="t">
+            <a:spAutoFit/>
+          </a:bodyPr>
+          <a:lstStyle/>
+          <a:p>
+            <a:pPr algn="l">
+              <a:spcAft>
+                <a:spcPts val="300"/>
+              </a:spcAft>
+            </a:pPr>
+            <a:r>
+              <a:rPr sz="2800" b="1" lang="zh-CN">
+                <a:solidFill>
+                  <a:srgbClr val="111827"/>
+                </a:solidFill>
+                <a:latin typeface="Microsoft YaHei"/>
+                <a:ea typeface="Microsoft YaHei"/>
+                <a:cs typeface="Microsoft YaHei"/>
+              </a:rPr>
+              <a:t>项目目标：形成从需求到报告的自动化测试闭环</a:t>
+            </a:r>
+          </a:p>
+        </p:txBody>
+      </p:sp>
+      <p:sp>
+        <p:nvSpPr>
+          <p:cNvPr id="4" name="TextBox 3"/>
+          <p:cNvSpPr txBox="1"/>
+          <p:nvPr/>
+        </p:nvSpPr>
+        <p:spPr>
+          <a:xfrm>
+            <a:off x="521208" y="777240"/>
+            <a:ext cx="10271455" cy="320040"/>
+          </a:xfrm>
+          <a:prstGeom prst="rect">
+            <a:avLst/>
+          </a:prstGeom>
+          <a:noFill/>
+          <a:ln>
+            <a:noFill/>
+          </a:ln>
+        </p:spPr>
+        <p:txBody>
+          <a:bodyPr wrap="square" lIns="137160" rIns="137160" tIns="137160" bIns="137160" anchor="t">
+            <a:spAutoFit/>
+          </a:bodyPr>
+          <a:lstStyle/>
+          <a:p>
+            <a:pPr algn="l">
+              <a:spcAft>
+                <a:spcPts val="300"/>
+              </a:spcAft>
+            </a:pPr>
+            <a:r>
+              <a:rPr sz="1500" b="0" lang="zh-CN">
+                <a:solidFill>
+                  <a:srgbClr val="4B5563"/>
+                </a:solidFill>
+                <a:latin typeface="Microsoft YaHei Light"/>
+                <a:ea typeface="Microsoft YaHei Light"/>
+                <a:cs typeface="Microsoft YaHei Light"/>
+              </a:rPr>
+              <a:t>目标不是生成一次性脚本，而是沉淀可复用的测试资产。</a:t>
+            </a:r>
+          </a:p>
+        </p:txBody>
+      </p:sp>
+      <p:sp>
+        <p:nvSpPr>
+          <p:cNvPr id="5" name="TextBox 4"/>
+          <p:cNvSpPr txBox="1"/>
+          <p:nvPr/>
+        </p:nvSpPr>
+        <p:spPr>
+          <a:xfrm>
+            <a:off x="10957255" y="365759"/>
+            <a:ext cx="731520" cy="228600"/>
+          </a:xfrm>
+          <a:prstGeom prst="rect">
+            <a:avLst/>
+          </a:prstGeom>
+          <a:noFill/>
+          <a:ln>
+            <a:noFill/>
+          </a:ln>
+        </p:spPr>
+        <p:txBody>
+          <a:bodyPr wrap="square" lIns="137160" rIns="137160" tIns="137160" bIns="137160" anchor="t">
+            <a:spAutoFit/>
+          </a:bodyPr>
+          <a:lstStyle/>
+          <a:p>
+            <a:pPr algn="r">
+              <a:spcAft>
+                <a:spcPts val="300"/>
+              </a:spcAft>
+            </a:pPr>
+            <a:r>
+              <a:rPr sz="1000" b="0" lang="zh-CN">
+                <a:solidFill>
+                  <a:srgbClr val="4B5563"/>
+                </a:solidFill>
+                <a:latin typeface="Microsoft YaHei"/>
+                <a:ea typeface="Microsoft YaHei"/>
+                <a:cs typeface="Microsoft YaHei"/>
+              </a:rPr>
+              <a:t>5/17</a:t>
             </a:r>
           </a:p>
         </p:txBody>
@@ -11041,716 +13009,6 @@
 </p:sld>
 </file>
 
-<file path=ppt/slides/slide5.xml><?xml version="1.0" encoding="utf-8"?>
-<p:sld xmlns:a="http://schemas.openxmlformats.org/drawingml/2006/main" xmlns:p="http://schemas.openxmlformats.org/presentationml/2006/main" xmlns:r="http://schemas.openxmlformats.org/officeDocument/2006/relationships">
-  <p:cSld>
-    <p:spTree>
-      <p:nvGrpSpPr>
-        <p:cNvPr id="1" name=""/>
-        <p:cNvGrpSpPr/>
-        <p:nvPr/>
-      </p:nvGrpSpPr>
-      <p:grpSpPr/>
-      <p:sp>
-        <p:nvSpPr>
-          <p:cNvPr id="2" name="Rectangle 1"/>
-          <p:cNvSpPr/>
-          <p:nvPr/>
-        </p:nvSpPr>
-        <p:spPr>
-          <a:xfrm>
-            <a:off x="0" y="0"/>
-            <a:ext cx="12191695" cy="6858000"/>
-          </a:xfrm>
-          <a:prstGeom prst="rect">
-            <a:avLst/>
-          </a:prstGeom>
-          <a:solidFill>
-            <a:srgbClr val="F8FAFC"/>
-          </a:solidFill>
-          <a:ln>
-            <a:noFill/>
-          </a:ln>
-        </p:spPr>
-        <p:style>
-          <a:lnRef idx="1">
-            <a:schemeClr val="accent1"/>
-          </a:lnRef>
-          <a:fillRef idx="3">
-            <a:schemeClr val="accent1"/>
-          </a:fillRef>
-          <a:effectRef idx="2">
-            <a:schemeClr val="accent1"/>
-          </a:effectRef>
-          <a:fontRef idx="minor">
-            <a:schemeClr val="lt1"/>
-          </a:fontRef>
-        </p:style>
-        <p:txBody>
-          <a:bodyPr rtlCol="0" anchor="ctr"/>
-          <a:lstStyle/>
-          <a:p>
-            <a:pPr algn="ctr"/>
-          </a:p>
-        </p:txBody>
-      </p:sp>
-      <p:sp>
-        <p:nvSpPr>
-          <p:cNvPr id="3" name="TextBox 2"/>
-          <p:cNvSpPr txBox="1"/>
-          <p:nvPr/>
-        </p:nvSpPr>
-        <p:spPr>
-          <a:xfrm>
-            <a:off x="502920" y="320040"/>
-            <a:ext cx="10408615" cy="457200"/>
-          </a:xfrm>
-          <a:prstGeom prst="rect">
-            <a:avLst/>
-          </a:prstGeom>
-          <a:noFill/>
-          <a:ln>
-            <a:noFill/>
-          </a:ln>
-        </p:spPr>
-        <p:txBody>
-          <a:bodyPr wrap="square" lIns="137160" rIns="137160" tIns="137160" bIns="137160" anchor="t">
-            <a:spAutoFit/>
-          </a:bodyPr>
-          <a:lstStyle/>
-          <a:p>
-            <a:pPr algn="l">
-              <a:spcAft>
-                <a:spcPts val="300"/>
-              </a:spcAft>
-            </a:pPr>
-            <a:r>
-              <a:rPr sz="2800" b="1" lang="zh-CN">
-                <a:solidFill>
-                  <a:srgbClr val="111827"/>
-                </a:solidFill>
-                <a:latin typeface="Microsoft YaHei"/>
-                <a:ea typeface="Microsoft YaHei"/>
-                <a:cs typeface="Microsoft YaHei"/>
-              </a:rPr>
-              <a:t>功能证据 1：AI 规划工作台</a:t>
-            </a:r>
-          </a:p>
-        </p:txBody>
-      </p:sp>
-      <p:sp>
-        <p:nvSpPr>
-          <p:cNvPr id="4" name="TextBox 3"/>
-          <p:cNvSpPr txBox="1"/>
-          <p:nvPr/>
-        </p:nvSpPr>
-        <p:spPr>
-          <a:xfrm>
-            <a:off x="521208" y="777240"/>
-            <a:ext cx="10271455" cy="320040"/>
-          </a:xfrm>
-          <a:prstGeom prst="rect">
-            <a:avLst/>
-          </a:prstGeom>
-          <a:noFill/>
-          <a:ln>
-            <a:noFill/>
-          </a:ln>
-        </p:spPr>
-        <p:txBody>
-          <a:bodyPr wrap="square" lIns="137160" rIns="137160" tIns="137160" bIns="137160" anchor="t">
-            <a:spAutoFit/>
-          </a:bodyPr>
-          <a:lstStyle/>
-          <a:p>
-            <a:pPr algn="l">
-              <a:spcAft>
-                <a:spcPts val="300"/>
-              </a:spcAft>
-            </a:pPr>
-            <a:r>
-              <a:rPr sz="1500" b="0" lang="zh-CN">
-                <a:solidFill>
-                  <a:srgbClr val="4B5563"/>
-                </a:solidFill>
-                <a:latin typeface="Microsoft YaHei Light"/>
-                <a:ea typeface="Microsoft YaHei Light"/>
-                <a:cs typeface="Microsoft YaHei Light"/>
-              </a:rPr>
-              <a:t>截图展示了需求收集、工具调用、测试点生成和 DSL 草案区域。</a:t>
-            </a:r>
-          </a:p>
-        </p:txBody>
-      </p:sp>
-      <p:sp>
-        <p:nvSpPr>
-          <p:cNvPr id="5" name="TextBox 4"/>
-          <p:cNvSpPr txBox="1"/>
-          <p:nvPr/>
-        </p:nvSpPr>
-        <p:spPr>
-          <a:xfrm>
-            <a:off x="10957255" y="365759"/>
-            <a:ext cx="731520" cy="228600"/>
-          </a:xfrm>
-          <a:prstGeom prst="rect">
-            <a:avLst/>
-          </a:prstGeom>
-          <a:noFill/>
-          <a:ln>
-            <a:noFill/>
-          </a:ln>
-        </p:spPr>
-        <p:txBody>
-          <a:bodyPr wrap="square" lIns="137160" rIns="137160" tIns="137160" bIns="137160" anchor="t">
-            <a:spAutoFit/>
-          </a:bodyPr>
-          <a:lstStyle/>
-          <a:p>
-            <a:pPr algn="r">
-              <a:spcAft>
-                <a:spcPts val="300"/>
-              </a:spcAft>
-            </a:pPr>
-            <a:r>
-              <a:rPr sz="1000" b="0" lang="zh-CN">
-                <a:solidFill>
-                  <a:srgbClr val="4B5563"/>
-                </a:solidFill>
-                <a:latin typeface="Microsoft YaHei"/>
-                <a:ea typeface="Microsoft YaHei"/>
-                <a:cs typeface="Microsoft YaHei"/>
-              </a:rPr>
-              <a:t>5/16</a:t>
-            </a:r>
-          </a:p>
-        </p:txBody>
-      </p:sp>
-      <p:pic>
-        <p:nvPicPr>
-          <p:cNvPr id="6" name="Picture 5" descr="Snipaste_2026-05-13_19-48-02.png"/>
-          <p:cNvPicPr>
-            <a:picLocks noChangeAspect="1"/>
-          </p:cNvPicPr>
-          <p:nvPr/>
-        </p:nvPicPr>
-        <p:blipFill>
-          <a:blip r:embed="rId2"/>
-          <a:stretch>
-            <a:fillRect/>
-          </a:stretch>
-        </p:blipFill>
-        <p:spPr>
-          <a:xfrm>
-            <a:off x="502920" y="1762646"/>
-            <a:ext cx="5928503" cy="3286986"/>
-          </a:xfrm>
-          <a:prstGeom prst="rect">
-            <a:avLst/>
-          </a:prstGeom>
-          <a:ln w="12700">
-            <a:solidFill>
-              <a:srgbClr val="E5E7EB"/>
-            </a:solidFill>
-          </a:ln>
-        </p:spPr>
-      </p:pic>
-      <p:sp>
-        <p:nvSpPr>
-          <p:cNvPr id="7" name="Rounded Rectangle 6"/>
-          <p:cNvSpPr/>
-          <p:nvPr/>
-        </p:nvSpPr>
-        <p:spPr>
-          <a:xfrm>
-            <a:off x="6705743" y="1371600"/>
-            <a:ext cx="4983031" cy="1051560"/>
-          </a:xfrm>
-          <a:prstGeom prst="roundRect">
-            <a:avLst/>
-          </a:prstGeom>
-          <a:solidFill>
-            <a:srgbClr val="FFFFFF"/>
-          </a:solidFill>
-          <a:ln w="10160">
-            <a:solidFill>
-              <a:srgbClr val="E5E7EB"/>
-            </a:solidFill>
-          </a:ln>
-        </p:spPr>
-        <p:style>
-          <a:lnRef idx="1">
-            <a:schemeClr val="accent1"/>
-          </a:lnRef>
-          <a:fillRef idx="3">
-            <a:schemeClr val="accent1"/>
-          </a:fillRef>
-          <a:effectRef idx="2">
-            <a:schemeClr val="accent1"/>
-          </a:effectRef>
-          <a:fontRef idx="minor">
-            <a:schemeClr val="lt1"/>
-          </a:fontRef>
-        </p:style>
-        <p:txBody>
-          <a:bodyPr rtlCol="0" anchor="ctr"/>
-          <a:lstStyle/>
-          <a:p>
-            <a:pPr algn="ctr"/>
-          </a:p>
-        </p:txBody>
-      </p:sp>
-      <p:sp>
-        <p:nvSpPr>
-          <p:cNvPr id="8" name="TextBox 7"/>
-          <p:cNvSpPr txBox="1"/>
-          <p:nvPr/>
-        </p:nvSpPr>
-        <p:spPr>
-          <a:xfrm>
-            <a:off x="6842903" y="1463040"/>
-            <a:ext cx="4708711" cy="320040"/>
-          </a:xfrm>
-          <a:prstGeom prst="rect">
-            <a:avLst/>
-          </a:prstGeom>
-          <a:noFill/>
-          <a:ln>
-            <a:noFill/>
-          </a:ln>
-        </p:spPr>
-        <p:txBody>
-          <a:bodyPr wrap="square" lIns="137160" rIns="137160" tIns="137160" bIns="137160" anchor="t">
-            <a:spAutoFit/>
-          </a:bodyPr>
-          <a:lstStyle/>
-          <a:p>
-            <a:pPr algn="l">
-              <a:spcAft>
-                <a:spcPts val="300"/>
-              </a:spcAft>
-            </a:pPr>
-            <a:r>
-              <a:rPr sz="1500" b="1" lang="zh-CN">
-                <a:solidFill>
-                  <a:srgbClr val="2563EB"/>
-                </a:solidFill>
-                <a:latin typeface="Microsoft YaHei"/>
-                <a:ea typeface="Microsoft YaHei"/>
-                <a:cs typeface="Microsoft YaHei"/>
-              </a:rPr>
-              <a:t>可读信息</a:t>
-            </a:r>
-          </a:p>
-        </p:txBody>
-      </p:sp>
-      <p:sp>
-        <p:nvSpPr>
-          <p:cNvPr id="9" name="TextBox 8"/>
-          <p:cNvSpPr txBox="1"/>
-          <p:nvPr/>
-        </p:nvSpPr>
-        <p:spPr>
-          <a:xfrm>
-            <a:off x="6842903" y="1828800"/>
-            <a:ext cx="4708711" cy="548639"/>
-          </a:xfrm>
-          <a:prstGeom prst="rect">
-            <a:avLst/>
-          </a:prstGeom>
-          <a:noFill/>
-          <a:ln>
-            <a:noFill/>
-          </a:ln>
-        </p:spPr>
-        <p:txBody>
-          <a:bodyPr wrap="square" lIns="137160" rIns="137160" tIns="137160" bIns="137160" anchor="t">
-            <a:spAutoFit/>
-          </a:bodyPr>
-          <a:lstStyle/>
-          <a:p>
-            <a:pPr algn="l">
-              <a:spcAft>
-                <a:spcPts val="300"/>
-              </a:spcAft>
-            </a:pPr>
-            <a:r>
-              <a:rPr sz="1100" b="0" lang="zh-CN">
-                <a:solidFill>
-                  <a:srgbClr val="4B5563"/>
-                </a:solidFill>
-                <a:latin typeface="Microsoft YaHei Light"/>
-                <a:ea typeface="Microsoft YaHei Light"/>
-                <a:cs typeface="Microsoft YaHei Light"/>
-              </a:rPr>
-              <a:t>评委可直接看到被测系统、业务目标、入口 URL、核心流程、关键断言和测试账号。</a:t>
-            </a:r>
-          </a:p>
-        </p:txBody>
-      </p:sp>
-      <p:sp>
-        <p:nvSpPr>
-          <p:cNvPr id="10" name="Rounded Rectangle 9"/>
-          <p:cNvSpPr/>
-          <p:nvPr/>
-        </p:nvSpPr>
-        <p:spPr>
-          <a:xfrm>
-            <a:off x="6705743" y="2532888"/>
-            <a:ext cx="4983031" cy="1051560"/>
-          </a:xfrm>
-          <a:prstGeom prst="roundRect">
-            <a:avLst/>
-          </a:prstGeom>
-          <a:solidFill>
-            <a:srgbClr val="FFFFFF"/>
-          </a:solidFill>
-          <a:ln w="10160">
-            <a:solidFill>
-              <a:srgbClr val="E5E7EB"/>
-            </a:solidFill>
-          </a:ln>
-        </p:spPr>
-        <p:style>
-          <a:lnRef idx="1">
-            <a:schemeClr val="accent1"/>
-          </a:lnRef>
-          <a:fillRef idx="3">
-            <a:schemeClr val="accent1"/>
-          </a:fillRef>
-          <a:effectRef idx="2">
-            <a:schemeClr val="accent1"/>
-          </a:effectRef>
-          <a:fontRef idx="minor">
-            <a:schemeClr val="lt1"/>
-          </a:fontRef>
-        </p:style>
-        <p:txBody>
-          <a:bodyPr rtlCol="0" anchor="ctr"/>
-          <a:lstStyle/>
-          <a:p>
-            <a:pPr algn="ctr"/>
-          </a:p>
-        </p:txBody>
-      </p:sp>
-      <p:sp>
-        <p:nvSpPr>
-          <p:cNvPr id="11" name="TextBox 10"/>
-          <p:cNvSpPr txBox="1"/>
-          <p:nvPr/>
-        </p:nvSpPr>
-        <p:spPr>
-          <a:xfrm>
-            <a:off x="6842903" y="2624328"/>
-            <a:ext cx="4708711" cy="320040"/>
-          </a:xfrm>
-          <a:prstGeom prst="rect">
-            <a:avLst/>
-          </a:prstGeom>
-          <a:noFill/>
-          <a:ln>
-            <a:noFill/>
-          </a:ln>
-        </p:spPr>
-        <p:txBody>
-          <a:bodyPr wrap="square" lIns="137160" rIns="137160" tIns="137160" bIns="137160" anchor="t">
-            <a:spAutoFit/>
-          </a:bodyPr>
-          <a:lstStyle/>
-          <a:p>
-            <a:pPr algn="l">
-              <a:spcAft>
-                <a:spcPts val="300"/>
-              </a:spcAft>
-            </a:pPr>
-            <a:r>
-              <a:rPr sz="1500" b="1" lang="zh-CN">
-                <a:solidFill>
-                  <a:srgbClr val="16A34A"/>
-                </a:solidFill>
-                <a:latin typeface="Microsoft YaHei"/>
-                <a:ea typeface="Microsoft YaHei"/>
-                <a:cs typeface="Microsoft YaHei"/>
-              </a:rPr>
-              <a:t>工具调用</a:t>
-            </a:r>
-          </a:p>
-        </p:txBody>
-      </p:sp>
-      <p:sp>
-        <p:nvSpPr>
-          <p:cNvPr id="12" name="TextBox 11"/>
-          <p:cNvSpPr txBox="1"/>
-          <p:nvPr/>
-        </p:nvSpPr>
-        <p:spPr>
-          <a:xfrm>
-            <a:off x="6842903" y="2990088"/>
-            <a:ext cx="4708711" cy="548639"/>
-          </a:xfrm>
-          <a:prstGeom prst="rect">
-            <a:avLst/>
-          </a:prstGeom>
-          <a:noFill/>
-          <a:ln>
-            <a:noFill/>
-          </a:ln>
-        </p:spPr>
-        <p:txBody>
-          <a:bodyPr wrap="square" lIns="137160" rIns="137160" tIns="137160" bIns="137160" anchor="t">
-            <a:spAutoFit/>
-          </a:bodyPr>
-          <a:lstStyle/>
-          <a:p>
-            <a:pPr algn="l">
-              <a:spcAft>
-                <a:spcPts val="300"/>
-              </a:spcAft>
-            </a:pPr>
-            <a:r>
-              <a:rPr sz="800" b="0" lang="zh-CN">
-                <a:solidFill>
-                  <a:srgbClr val="4B5563"/>
-                </a:solidFill>
-                <a:latin typeface="Microsoft YaHei Light"/>
-                <a:ea typeface="Microsoft YaHei Light"/>
-                <a:cs typeface="Microsoft YaHei Light"/>
-              </a:rPr>
-              <a:t>Agent 调用 create_project、explore_flow 等工具采集页面信息，而不是凭空生成脚本。</a:t>
-            </a:r>
-          </a:p>
-        </p:txBody>
-      </p:sp>
-      <p:sp>
-        <p:nvSpPr>
-          <p:cNvPr id="13" name="Rounded Rectangle 12"/>
-          <p:cNvSpPr/>
-          <p:nvPr/>
-        </p:nvSpPr>
-        <p:spPr>
-          <a:xfrm>
-            <a:off x="6705743" y="3694176"/>
-            <a:ext cx="4983031" cy="1051560"/>
-          </a:xfrm>
-          <a:prstGeom prst="roundRect">
-            <a:avLst/>
-          </a:prstGeom>
-          <a:solidFill>
-            <a:srgbClr val="FFFFFF"/>
-          </a:solidFill>
-          <a:ln w="10160">
-            <a:solidFill>
-              <a:srgbClr val="E5E7EB"/>
-            </a:solidFill>
-          </a:ln>
-        </p:spPr>
-        <p:style>
-          <a:lnRef idx="1">
-            <a:schemeClr val="accent1"/>
-          </a:lnRef>
-          <a:fillRef idx="3">
-            <a:schemeClr val="accent1"/>
-          </a:fillRef>
-          <a:effectRef idx="2">
-            <a:schemeClr val="accent1"/>
-          </a:effectRef>
-          <a:fontRef idx="minor">
-            <a:schemeClr val="lt1"/>
-          </a:fontRef>
-        </p:style>
-        <p:txBody>
-          <a:bodyPr rtlCol="0" anchor="ctr"/>
-          <a:lstStyle/>
-          <a:p>
-            <a:pPr algn="ctr"/>
-          </a:p>
-        </p:txBody>
-      </p:sp>
-      <p:sp>
-        <p:nvSpPr>
-          <p:cNvPr id="14" name="TextBox 13"/>
-          <p:cNvSpPr txBox="1"/>
-          <p:nvPr/>
-        </p:nvSpPr>
-        <p:spPr>
-          <a:xfrm>
-            <a:off x="6842903" y="3785615"/>
-            <a:ext cx="4708711" cy="320040"/>
-          </a:xfrm>
-          <a:prstGeom prst="rect">
-            <a:avLst/>
-          </a:prstGeom>
-          <a:noFill/>
-          <a:ln>
-            <a:noFill/>
-          </a:ln>
-        </p:spPr>
-        <p:txBody>
-          <a:bodyPr wrap="square" lIns="137160" rIns="137160" tIns="137160" bIns="137160" anchor="t">
-            <a:spAutoFit/>
-          </a:bodyPr>
-          <a:lstStyle/>
-          <a:p>
-            <a:pPr algn="l">
-              <a:spcAft>
-                <a:spcPts val="300"/>
-              </a:spcAft>
-            </a:pPr>
-            <a:r>
-              <a:rPr sz="1500" b="1" lang="zh-CN">
-                <a:solidFill>
-                  <a:srgbClr val="D97706"/>
-                </a:solidFill>
-                <a:latin typeface="Microsoft YaHei"/>
-                <a:ea typeface="Microsoft YaHei"/>
-                <a:cs typeface="Microsoft YaHei"/>
-              </a:rPr>
-              <a:t>工程意义</a:t>
-            </a:r>
-          </a:p>
-        </p:txBody>
-      </p:sp>
-      <p:sp>
-        <p:nvSpPr>
-          <p:cNvPr id="15" name="TextBox 14"/>
-          <p:cNvSpPr txBox="1"/>
-          <p:nvPr/>
-        </p:nvSpPr>
-        <p:spPr>
-          <a:xfrm>
-            <a:off x="6842903" y="4151376"/>
-            <a:ext cx="4708711" cy="548639"/>
-          </a:xfrm>
-          <a:prstGeom prst="rect">
-            <a:avLst/>
-          </a:prstGeom>
-          <a:noFill/>
-          <a:ln>
-            <a:noFill/>
-          </a:ln>
-        </p:spPr>
-        <p:txBody>
-          <a:bodyPr wrap="square" lIns="137160" rIns="137160" tIns="137160" bIns="137160" anchor="t">
-            <a:spAutoFit/>
-          </a:bodyPr>
-          <a:lstStyle/>
-          <a:p>
-            <a:pPr algn="l">
-              <a:spcAft>
-                <a:spcPts val="300"/>
-              </a:spcAft>
-            </a:pPr>
-            <a:r>
-              <a:rPr sz="1100" b="0" lang="zh-CN">
-                <a:solidFill>
-                  <a:srgbClr val="4B5563"/>
-                </a:solidFill>
-                <a:latin typeface="Microsoft YaHei Light"/>
-                <a:ea typeface="Microsoft YaHei Light"/>
-                <a:cs typeface="Microsoft YaHei Light"/>
-              </a:rPr>
-              <a:t>AI 规划被放在平台流程里，后续草案仍需保存为用例并由后端执行。</a:t>
-            </a:r>
-          </a:p>
-        </p:txBody>
-      </p:sp>
-      <p:sp>
-        <p:nvSpPr>
-          <p:cNvPr id="16" name="Rectangle 15"/>
-          <p:cNvSpPr/>
-          <p:nvPr/>
-        </p:nvSpPr>
-        <p:spPr>
-          <a:xfrm>
-            <a:off x="502920" y="5943600"/>
-            <a:ext cx="11185855" cy="411480"/>
-          </a:xfrm>
-          <a:prstGeom prst="rect">
-            <a:avLst/>
-          </a:prstGeom>
-          <a:solidFill>
-            <a:srgbClr val="FFFFFF"/>
-          </a:solidFill>
-          <a:ln w="10160">
-            <a:solidFill>
-              <a:srgbClr val="E5E7EB"/>
-            </a:solidFill>
-          </a:ln>
-        </p:spPr>
-        <p:style>
-          <a:lnRef idx="1">
-            <a:schemeClr val="accent1"/>
-          </a:lnRef>
-          <a:fillRef idx="3">
-            <a:schemeClr val="accent1"/>
-          </a:fillRef>
-          <a:effectRef idx="2">
-            <a:schemeClr val="accent1"/>
-          </a:effectRef>
-          <a:fontRef idx="minor">
-            <a:schemeClr val="lt1"/>
-          </a:fontRef>
-        </p:style>
-        <p:txBody>
-          <a:bodyPr rtlCol="0" anchor="ctr"/>
-          <a:lstStyle/>
-          <a:p>
-            <a:pPr algn="ctr"/>
-          </a:p>
-        </p:txBody>
-      </p:sp>
-      <p:sp>
-        <p:nvSpPr>
-          <p:cNvPr id="17" name="TextBox 16"/>
-          <p:cNvSpPr txBox="1"/>
-          <p:nvPr/>
-        </p:nvSpPr>
-        <p:spPr>
-          <a:xfrm>
-            <a:off x="640080" y="5989320"/>
-            <a:ext cx="10911535" cy="320040"/>
-          </a:xfrm>
-          <a:prstGeom prst="rect">
-            <a:avLst/>
-          </a:prstGeom>
-          <a:noFill/>
-          <a:ln>
-            <a:noFill/>
-          </a:ln>
-        </p:spPr>
-        <p:txBody>
-          <a:bodyPr wrap="square" lIns="137160" rIns="137160" tIns="137160" bIns="137160" anchor="ctr">
-            <a:spAutoFit/>
-          </a:bodyPr>
-          <a:lstStyle/>
-          <a:p>
-            <a:pPr algn="ctr">
-              <a:spcAft>
-                <a:spcPts val="300"/>
-              </a:spcAft>
-            </a:pPr>
-            <a:r>
-              <a:rPr sz="1400" b="1" lang="zh-CN">
-                <a:solidFill>
-                  <a:srgbClr val="11122A"/>
-                </a:solidFill>
-                <a:latin typeface="Microsoft YaHei"/>
-                <a:ea typeface="Microsoft YaHei"/>
-                <a:cs typeface="Microsoft YaHei"/>
-              </a:rPr>
-              <a:t>该页证明项目已具备“AI 对话式规划 + 工具调用 + 测试草案生成”的可视化闭环。</a:t>
-            </a:r>
-          </a:p>
-        </p:txBody>
-      </p:sp>
-    </p:spTree>
-  </p:cSld>
-  <p:clrMapOvr>
-    <a:masterClrMapping/>
-  </p:clrMapOvr>
-</p:sld>
-</file>
-
 <file path=ppt/slides/slide6.xml><?xml version="1.0" encoding="utf-8"?>
 <p:sld xmlns:a="http://schemas.openxmlformats.org/drawingml/2006/main" xmlns:p="http://schemas.openxmlformats.org/presentationml/2006/main" xmlns:r="http://schemas.openxmlformats.org/officeDocument/2006/relationships">
   <p:cSld>
@@ -11843,7 +13101,7 @@
                 <a:ea typeface="Microsoft YaHei"/>
                 <a:cs typeface="Microsoft YaHei"/>
               </a:rPr>
-              <a:t>功能证据 2：复测与失败迭代闭环</a:t>
+              <a:t>功能证据 1：AI 规划工作台</a:t>
             </a:r>
           </a:p>
         </p:txBody>
@@ -11887,7 +13145,7 @@
                 <a:ea typeface="Microsoft YaHei Light"/>
                 <a:cs typeface="Microsoft YaHei Light"/>
               </a:rPr>
-              <a:t>自动化测试平台真正的价值在于持续复测、分析失败并沉淀改进。</a:t>
+              <a:t>截图展示了需求收集、工具调用、测试点生成和 DSL 草案区域。</a:t>
             </a:r>
           </a:p>
         </p:txBody>
@@ -11931,14 +13189,14 @@
                 <a:ea typeface="Microsoft YaHei"/>
                 <a:cs typeface="Microsoft YaHei"/>
               </a:rPr>
-              <a:t>6/16</a:t>
+              <a:t>6/17</a:t>
             </a:r>
           </a:p>
         </p:txBody>
       </p:sp>
       <p:pic>
         <p:nvPicPr>
-          <p:cNvPr id="6" name="Picture 5" descr="Snipaste_2026-05-13_19-48-11.png"/>
+          <p:cNvPr id="6" name="Picture 5" descr="Snipaste_2026-05-13_19-48-02.png"/>
           <p:cNvPicPr>
             <a:picLocks noChangeAspect="1"/>
           </p:cNvPicPr>
@@ -11952,8 +13210,8 @@
         </p:blipFill>
         <p:spPr>
           <a:xfrm>
-            <a:off x="502920" y="1850607"/>
-            <a:ext cx="5928503" cy="3111065"/>
+            <a:off x="502920" y="1762646"/>
+            <a:ext cx="5928503" cy="3286986"/>
           </a:xfrm>
           <a:prstGeom prst="rect">
             <a:avLst/>
@@ -12049,7 +13307,7 @@
                 <a:ea typeface="Microsoft YaHei"/>
                 <a:cs typeface="Microsoft YaHei"/>
               </a:rPr>
-              <a:t>失败不是终点</a:t>
+              <a:t>可读信息</a:t>
             </a:r>
           </a:p>
         </p:txBody>
@@ -12085,7 +13343,7 @@
               </a:spcAft>
             </a:pPr>
             <a:r>
-              <a:rPr sz="900" b="0" lang="zh-CN">
+              <a:rPr sz="1100" b="0" lang="zh-CN">
                 <a:solidFill>
                   <a:srgbClr val="4B5563"/>
                 </a:solidFill>
@@ -12093,7 +13351,7 @@
                 <a:ea typeface="Microsoft YaHei Light"/>
                 <a:cs typeface="Microsoft YaHei Light"/>
               </a:rPr>
-              <a:t>截图中可以看到同一测试从 failed 到 passed 的迭代记录，说明平台支持真实调试过程。</a:t>
+              <a:t>评委可直接看到被测系统、业务目标、入口 URL、核心流程、关键断言和测试账号。</a:t>
             </a:r>
           </a:p>
         </p:txBody>
@@ -12182,7 +13440,7 @@
                 <a:ea typeface="Microsoft YaHei"/>
                 <a:cs typeface="Microsoft YaHei"/>
               </a:rPr>
-              <a:t>问题可分类</a:t>
+              <a:t>工具调用</a:t>
             </a:r>
           </a:p>
         </p:txBody>
@@ -12218,7 +13476,7 @@
               </a:spcAft>
             </a:pPr>
             <a:r>
-              <a:rPr sz="900" b="0" lang="zh-CN">
+              <a:rPr sz="800" b="0" lang="zh-CN">
                 <a:solidFill>
                   <a:srgbClr val="4B5563"/>
                 </a:solidFill>
@@ -12226,7 +13484,7 @@
                 <a:ea typeface="Microsoft YaHei Light"/>
                 <a:cs typeface="Microsoft YaHei Light"/>
               </a:rPr>
-              <a:t>失败可区分 assertion、runner 等类型，为定位 DSL、数据隔离或执行器问题提供依据。</a:t>
+              <a:t>Agent 调用 create_project、explore_flow 等工具采集页面信息，而不是凭空生成脚本。</a:t>
             </a:r>
           </a:p>
         </p:txBody>
@@ -12315,7 +13573,7 @@
                 <a:ea typeface="Microsoft YaHei"/>
                 <a:cs typeface="Microsoft YaHei"/>
               </a:rPr>
-              <a:t>评审重点</a:t>
+              <a:t>工程意义</a:t>
             </a:r>
           </a:p>
         </p:txBody>
@@ -12359,7 +13617,96 @@
                 <a:ea typeface="Microsoft YaHei Light"/>
                 <a:cs typeface="Microsoft YaHei Light"/>
               </a:rPr>
-              <a:t>项目已经进入工程闭环阶段，而非停留在静态原型或单次演示。</a:t>
+              <a:t>AI 规划被放在平台流程里，后续草案仍需保存为用例并由后端执行。</a:t>
+            </a:r>
+          </a:p>
+        </p:txBody>
+      </p:sp>
+      <p:sp>
+        <p:nvSpPr>
+          <p:cNvPr id="16" name="Rectangle 15"/>
+          <p:cNvSpPr/>
+          <p:nvPr/>
+        </p:nvSpPr>
+        <p:spPr>
+          <a:xfrm>
+            <a:off x="502920" y="5943600"/>
+            <a:ext cx="11185855" cy="411480"/>
+          </a:xfrm>
+          <a:prstGeom prst="rect">
+            <a:avLst/>
+          </a:prstGeom>
+          <a:solidFill>
+            <a:srgbClr val="FFFFFF"/>
+          </a:solidFill>
+          <a:ln w="10160">
+            <a:solidFill>
+              <a:srgbClr val="E5E7EB"/>
+            </a:solidFill>
+          </a:ln>
+        </p:spPr>
+        <p:style>
+          <a:lnRef idx="1">
+            <a:schemeClr val="accent1"/>
+          </a:lnRef>
+          <a:fillRef idx="3">
+            <a:schemeClr val="accent1"/>
+          </a:fillRef>
+          <a:effectRef idx="2">
+            <a:schemeClr val="accent1"/>
+          </a:effectRef>
+          <a:fontRef idx="minor">
+            <a:schemeClr val="lt1"/>
+          </a:fontRef>
+        </p:style>
+        <p:txBody>
+          <a:bodyPr rtlCol="0" anchor="ctr"/>
+          <a:lstStyle/>
+          <a:p>
+            <a:pPr algn="ctr"/>
+          </a:p>
+        </p:txBody>
+      </p:sp>
+      <p:sp>
+        <p:nvSpPr>
+          <p:cNvPr id="17" name="TextBox 16"/>
+          <p:cNvSpPr txBox="1"/>
+          <p:nvPr/>
+        </p:nvSpPr>
+        <p:spPr>
+          <a:xfrm>
+            <a:off x="640080" y="5989320"/>
+            <a:ext cx="10911535" cy="320040"/>
+          </a:xfrm>
+          <a:prstGeom prst="rect">
+            <a:avLst/>
+          </a:prstGeom>
+          <a:noFill/>
+          <a:ln>
+            <a:noFill/>
+          </a:ln>
+        </p:spPr>
+        <p:txBody>
+          <a:bodyPr wrap="square" lIns="137160" rIns="137160" tIns="137160" bIns="137160" anchor="ctr">
+            <a:spAutoFit/>
+          </a:bodyPr>
+          <a:lstStyle/>
+          <a:p>
+            <a:pPr algn="ctr">
+              <a:spcAft>
+                <a:spcPts val="300"/>
+              </a:spcAft>
+            </a:pPr>
+            <a:r>
+              <a:rPr sz="1400" b="1" lang="zh-CN">
+                <a:solidFill>
+                  <a:srgbClr val="11122A"/>
+                </a:solidFill>
+                <a:latin typeface="Microsoft YaHei"/>
+                <a:ea typeface="Microsoft YaHei"/>
+                <a:cs typeface="Microsoft YaHei"/>
+              </a:rPr>
+              <a:t>该页证明项目已具备“AI 对话式规划 + 工具调用 + 测试草案生成”的可视化闭环。</a:t>
             </a:r>
           </a:p>
         </p:txBody>
@@ -12464,7 +13811,7 @@
                 <a:ea typeface="Microsoft YaHei"/>
                 <a:cs typeface="Microsoft YaHei"/>
               </a:rPr>
-              <a:t>功能证据 3：用例中心与测试资产管理</a:t>
+              <a:t>功能证据 2：复测与失败迭代闭环</a:t>
             </a:r>
           </a:p>
         </p:txBody>
@@ -12508,7 +13855,7 @@
                 <a:ea typeface="Microsoft YaHei Light"/>
                 <a:cs typeface="Microsoft YaHei Light"/>
               </a:rPr>
-              <a:t>AI 生成结果最终沉淀为项目级测试资产，支持后续执行和维护。</a:t>
+              <a:t>自动化测试平台真正的价值在于持续复测、分析失败并沉淀改进。</a:t>
             </a:r>
           </a:p>
         </p:txBody>
@@ -12552,14 +13899,14 @@
                 <a:ea typeface="Microsoft YaHei"/>
                 <a:cs typeface="Microsoft YaHei"/>
               </a:rPr>
-              <a:t>7/16</a:t>
+              <a:t>7/17</a:t>
             </a:r>
           </a:p>
         </p:txBody>
       </p:sp>
       <p:pic>
         <p:nvPicPr>
-          <p:cNvPr id="6" name="Picture 5" descr="Snipaste_2026-05-13_19-48-27.png"/>
+          <p:cNvPr id="6" name="Picture 5" descr="Snipaste_2026-05-13_19-48-11.png"/>
           <p:cNvPicPr>
             <a:picLocks noChangeAspect="1"/>
           </p:cNvPicPr>
@@ -12573,8 +13920,8 @@
         </p:blipFill>
         <p:spPr>
           <a:xfrm>
-            <a:off x="5760271" y="1830119"/>
-            <a:ext cx="5928503" cy="3152040"/>
+            <a:off x="502920" y="1850607"/>
+            <a:ext cx="5928503" cy="3111065"/>
           </a:xfrm>
           <a:prstGeom prst="rect">
             <a:avLst/>
@@ -12594,7 +13941,7 @@
         </p:nvSpPr>
         <p:spPr>
           <a:xfrm>
-            <a:off x="502920" y="1371600"/>
+            <a:off x="6705743" y="1371600"/>
             <a:ext cx="4983031" cy="1051560"/>
           </a:xfrm>
           <a:prstGeom prst="roundRect">
@@ -12639,7 +13986,7 @@
         </p:nvSpPr>
         <p:spPr>
           <a:xfrm>
-            <a:off x="640080" y="1463040"/>
+            <a:off x="6842903" y="1463040"/>
             <a:ext cx="4708711" cy="320040"/>
           </a:xfrm>
           <a:prstGeom prst="rect">
@@ -12670,7 +14017,7 @@
                 <a:ea typeface="Microsoft YaHei"/>
                 <a:cs typeface="Microsoft YaHei"/>
               </a:rPr>
-              <a:t>资产结构</a:t>
+              <a:t>失败不是终点</a:t>
             </a:r>
           </a:p>
         </p:txBody>
@@ -12683,7 +14030,7 @@
         </p:nvSpPr>
         <p:spPr>
           <a:xfrm>
-            <a:off x="640080" y="1828800"/>
+            <a:off x="6842903" y="1828800"/>
             <a:ext cx="4708711" cy="548639"/>
           </a:xfrm>
           <a:prstGeom prst="rect">
@@ -12714,7 +14061,7 @@
                 <a:ea typeface="Microsoft YaHei Light"/>
                 <a:cs typeface="Microsoft YaHei Light"/>
               </a:rPr>
-              <a:t>当前平台采用 Project -&gt; Case -&gt; Run 的结构，便于按项目管理测试用例和执行历史。</a:t>
+              <a:t>截图中可以看到同一测试从 failed 到 passed 的迭代记录，说明平台支持真实调试过程。</a:t>
             </a:r>
           </a:p>
         </p:txBody>
@@ -12727,7 +14074,7 @@
         </p:nvSpPr>
         <p:spPr>
           <a:xfrm>
-            <a:off x="502920" y="2532888"/>
+            <a:off x="6705743" y="2532888"/>
             <a:ext cx="4983031" cy="1051560"/>
           </a:xfrm>
           <a:prstGeom prst="roundRect">
@@ -12772,7 +14119,7 @@
         </p:nvSpPr>
         <p:spPr>
           <a:xfrm>
-            <a:off x="640080" y="2624328"/>
+            <a:off x="6842903" y="2624328"/>
             <a:ext cx="4708711" cy="320040"/>
           </a:xfrm>
           <a:prstGeom prst="rect">
@@ -12803,7 +14150,7 @@
                 <a:ea typeface="Microsoft YaHei"/>
                 <a:cs typeface="Microsoft YaHei"/>
               </a:rPr>
-              <a:t>业务示例</a:t>
+              <a:t>问题可分类</a:t>
             </a:r>
           </a:p>
         </p:txBody>
@@ -12816,7 +14163,7 @@
         </p:nvSpPr>
         <p:spPr>
           <a:xfrm>
-            <a:off x="640080" y="2990088"/>
+            <a:off x="6842903" y="2990088"/>
             <a:ext cx="4708711" cy="548639"/>
           </a:xfrm>
           <a:prstGeom prst="rect">
@@ -12839,7 +14186,7 @@
               </a:spcAft>
             </a:pPr>
             <a:r>
-              <a:rPr sz="800" b="0" lang="zh-CN">
+              <a:rPr sz="900" b="0" lang="zh-CN">
                 <a:solidFill>
                   <a:srgbClr val="4B5563"/>
                 </a:solidFill>
@@ -12847,7 +14194,7 @@
                 <a:ea typeface="Microsoft YaHei Light"/>
                 <a:cs typeface="Microsoft YaHei Light"/>
               </a:rPr>
-              <a:t>截图中的 login-brand-filter-cart 用例覆盖登录、品牌筛选、购物车、价格与数量断言。</a:t>
+              <a:t>失败可区分 assertion、runner 等类型，为定位 DSL、数据隔离或执行器问题提供依据。</a:t>
             </a:r>
           </a:p>
         </p:txBody>
@@ -12860,7 +14207,7 @@
         </p:nvSpPr>
         <p:spPr>
           <a:xfrm>
-            <a:off x="502920" y="3694176"/>
+            <a:off x="6705743" y="3694176"/>
             <a:ext cx="4983031" cy="1051560"/>
           </a:xfrm>
           <a:prstGeom prst="roundRect">
@@ -12905,7 +14252,7 @@
         </p:nvSpPr>
         <p:spPr>
           <a:xfrm>
-            <a:off x="640080" y="3785615"/>
+            <a:off x="6842903" y="3785615"/>
             <a:ext cx="4708711" cy="320040"/>
           </a:xfrm>
           <a:prstGeom prst="rect">
@@ -12936,7 +14283,7 @@
                 <a:ea typeface="Microsoft YaHei"/>
                 <a:cs typeface="Microsoft YaHei"/>
               </a:rPr>
-              <a:t>平台价值</a:t>
+              <a:t>评审重点</a:t>
             </a:r>
           </a:p>
         </p:txBody>
@@ -12949,7 +14296,7 @@
         </p:nvSpPr>
         <p:spPr>
           <a:xfrm>
-            <a:off x="640080" y="4151376"/>
+            <a:off x="6842903" y="4151376"/>
             <a:ext cx="4708711" cy="548639"/>
           </a:xfrm>
           <a:prstGeom prst="rect">
@@ -12980,7 +14327,7 @@
                 <a:ea typeface="Microsoft YaHei Light"/>
                 <a:cs typeface="Microsoft YaHei Light"/>
               </a:rPr>
-              <a:t>用例不是临时 prompt，而是可保存、可编辑、可复跑的自动化测试资产。</a:t>
+              <a:t>项目已经进入工程闭环阶段，而非停留在静态原型或单次演示。</a:t>
             </a:r>
           </a:p>
         </p:txBody>
@@ -13085,7 +14432,7 @@
                 <a:ea typeface="Microsoft YaHei"/>
                 <a:cs typeface="Microsoft YaHei"/>
               </a:rPr>
-              <a:t>功能证据 4：结构化 DSL 编辑</a:t>
+              <a:t>功能证据 3：用例中心与测试资产管理</a:t>
             </a:r>
           </a:p>
         </p:txBody>
@@ -13129,7 +14476,7 @@
                 <a:ea typeface="Microsoft YaHei Light"/>
                 <a:cs typeface="Microsoft YaHei Light"/>
               </a:rPr>
-              <a:t>通过稳定动作集合表达测试流程，保证 AI 生成结果可审查、可修改、可执行。</a:t>
+              <a:t>AI 生成结果最终沉淀为项目级测试资产，支持后续执行和维护。</a:t>
             </a:r>
           </a:p>
         </p:txBody>
@@ -13173,14 +14520,14 @@
                 <a:ea typeface="Microsoft YaHei"/>
                 <a:cs typeface="Microsoft YaHei"/>
               </a:rPr>
-              <a:t>8/16</a:t>
+              <a:t>8/17</a:t>
             </a:r>
           </a:p>
         </p:txBody>
       </p:sp>
       <p:pic>
         <p:nvPicPr>
-          <p:cNvPr id="6" name="Picture 5" descr="Snipaste_2026-05-13_19-48-35.png"/>
+          <p:cNvPr id="6" name="Picture 5" descr="Snipaste_2026-05-13_19-48-27.png"/>
           <p:cNvPicPr>
             <a:picLocks noChangeAspect="1"/>
           </p:cNvPicPr>
@@ -13194,8 +14541,8 @@
         </p:blipFill>
         <p:spPr>
           <a:xfrm>
-            <a:off x="502920" y="1847382"/>
-            <a:ext cx="5928503" cy="3117514"/>
+            <a:off x="5760271" y="1830119"/>
+            <a:ext cx="5928503" cy="3152040"/>
           </a:xfrm>
           <a:prstGeom prst="rect">
             <a:avLst/>
@@ -13215,7 +14562,7 @@
         </p:nvSpPr>
         <p:spPr>
           <a:xfrm>
-            <a:off x="6705743" y="1371600"/>
+            <a:off x="502920" y="1371600"/>
             <a:ext cx="4983031" cy="1051560"/>
           </a:xfrm>
           <a:prstGeom prst="roundRect">
@@ -13260,7 +14607,7 @@
         </p:nvSpPr>
         <p:spPr>
           <a:xfrm>
-            <a:off x="6842903" y="1463040"/>
+            <a:off x="640080" y="1463040"/>
             <a:ext cx="4708711" cy="320040"/>
           </a:xfrm>
           <a:prstGeom prst="rect">
@@ -13291,7 +14638,7 @@
                 <a:ea typeface="Microsoft YaHei"/>
                 <a:cs typeface="Microsoft YaHei"/>
               </a:rPr>
-              <a:t>动作受控</a:t>
+              <a:t>资产结构</a:t>
             </a:r>
           </a:p>
         </p:txBody>
@@ -13304,7 +14651,7 @@
         </p:nvSpPr>
         <p:spPr>
           <a:xfrm>
-            <a:off x="6842903" y="1828800"/>
+            <a:off x="640080" y="1828800"/>
             <a:ext cx="4708711" cy="548639"/>
           </a:xfrm>
           <a:prstGeom prst="rect">
@@ -13327,7 +14674,7 @@
               </a:spcAft>
             </a:pPr>
             <a:r>
-              <a:rPr sz="800" b="0" lang="zh-CN">
+              <a:rPr sz="900" b="0" lang="zh-CN">
                 <a:solidFill>
                   <a:srgbClr val="4B5563"/>
                 </a:solidFill>
@@ -13335,7 +14682,7 @@
                 <a:ea typeface="Microsoft YaHei Light"/>
                 <a:cs typeface="Microsoft YaHei Light"/>
               </a:rPr>
-              <a:t>第一阶段动作集合保持小而稳定，例如 goto、click、input、wait_for、assert_text。</a:t>
+              <a:t>当前平台采用 Project -&gt; Case -&gt; Run 的结构，便于按项目管理测试用例和执行历史。</a:t>
             </a:r>
           </a:p>
         </p:txBody>
@@ -13348,7 +14695,7 @@
         </p:nvSpPr>
         <p:spPr>
           <a:xfrm>
-            <a:off x="6705743" y="2532888"/>
+            <a:off x="502920" y="2532888"/>
             <a:ext cx="4983031" cy="1051560"/>
           </a:xfrm>
           <a:prstGeom prst="roundRect">
@@ -13393,7 +14740,7 @@
         </p:nvSpPr>
         <p:spPr>
           <a:xfrm>
-            <a:off x="6842903" y="2624328"/>
+            <a:off x="640080" y="2624328"/>
             <a:ext cx="4708711" cy="320040"/>
           </a:xfrm>
           <a:prstGeom prst="rect">
@@ -13424,7 +14771,7 @@
                 <a:ea typeface="Microsoft YaHei"/>
                 <a:cs typeface="Microsoft YaHei"/>
               </a:rPr>
-              <a:t>变量复用</a:t>
+              <a:t>业务示例</a:t>
             </a:r>
           </a:p>
         </p:txBody>
@@ -13437,7 +14784,7 @@
         </p:nvSpPr>
         <p:spPr>
           <a:xfrm>
-            <a:off x="6842903" y="2990088"/>
+            <a:off x="640080" y="2990088"/>
             <a:ext cx="4708711" cy="548639"/>
           </a:xfrm>
           <a:prstGeom prst="rect">
@@ -13468,7 +14815,7 @@
                 <a:ea typeface="Microsoft YaHei Light"/>
                 <a:cs typeface="Microsoft YaHei Light"/>
               </a:rPr>
-              <a:t>支持 ${login_email}、${login_password} 等变量，占位数据可在执行时替换。</a:t>
+              <a:t>截图中的 login-brand-filter-cart 用例覆盖登录、品牌筛选、购物车、价格与数量断言。</a:t>
             </a:r>
           </a:p>
         </p:txBody>
@@ -13481,7 +14828,7 @@
         </p:nvSpPr>
         <p:spPr>
           <a:xfrm>
-            <a:off x="6705743" y="3694176"/>
+            <a:off x="502920" y="3694176"/>
             <a:ext cx="4983031" cy="1051560"/>
           </a:xfrm>
           <a:prstGeom prst="roundRect">
@@ -13526,7 +14873,7 @@
         </p:nvSpPr>
         <p:spPr>
           <a:xfrm>
-            <a:off x="6842903" y="3785615"/>
+            <a:off x="640080" y="3785615"/>
             <a:ext cx="4708711" cy="320040"/>
           </a:xfrm>
           <a:prstGeom prst="rect">
@@ -13557,7 +14904,7 @@
                 <a:ea typeface="Microsoft YaHei"/>
                 <a:cs typeface="Microsoft YaHei"/>
               </a:rPr>
-              <a:t>执行可信</a:t>
+              <a:t>平台价值</a:t>
             </a:r>
           </a:p>
         </p:txBody>
@@ -13570,7 +14917,7 @@
         </p:nvSpPr>
         <p:spPr>
           <a:xfrm>
-            <a:off x="6842903" y="4151376"/>
+            <a:off x="640080" y="4151376"/>
             <a:ext cx="4708711" cy="548639"/>
           </a:xfrm>
           <a:prstGeom prst="rect">
@@ -13601,96 +14948,7 @@
                 <a:ea typeface="Microsoft YaHei Light"/>
                 <a:cs typeface="Microsoft YaHei Light"/>
               </a:rPr>
-              <a:t>所有正式测试执行都基于结构化 DSL，而不是直接把自然语言交给浏览器。</a:t>
-            </a:r>
-          </a:p>
-        </p:txBody>
-      </p:sp>
-      <p:sp>
-        <p:nvSpPr>
-          <p:cNvPr id="16" name="Rectangle 15"/>
-          <p:cNvSpPr/>
-          <p:nvPr/>
-        </p:nvSpPr>
-        <p:spPr>
-          <a:xfrm>
-            <a:off x="502920" y="5943600"/>
-            <a:ext cx="11185855" cy="411480"/>
-          </a:xfrm>
-          <a:prstGeom prst="rect">
-            <a:avLst/>
-          </a:prstGeom>
-          <a:solidFill>
-            <a:srgbClr val="FFFFFF"/>
-          </a:solidFill>
-          <a:ln w="10160">
-            <a:solidFill>
-              <a:srgbClr val="E5E7EB"/>
-            </a:solidFill>
-          </a:ln>
-        </p:spPr>
-        <p:style>
-          <a:lnRef idx="1">
-            <a:schemeClr val="accent1"/>
-          </a:lnRef>
-          <a:fillRef idx="3">
-            <a:schemeClr val="accent1"/>
-          </a:fillRef>
-          <a:effectRef idx="2">
-            <a:schemeClr val="accent1"/>
-          </a:effectRef>
-          <a:fontRef idx="minor">
-            <a:schemeClr val="lt1"/>
-          </a:fontRef>
-        </p:style>
-        <p:txBody>
-          <a:bodyPr rtlCol="0" anchor="ctr"/>
-          <a:lstStyle/>
-          <a:p>
-            <a:pPr algn="ctr"/>
-          </a:p>
-        </p:txBody>
-      </p:sp>
-      <p:sp>
-        <p:nvSpPr>
-          <p:cNvPr id="17" name="TextBox 16"/>
-          <p:cNvSpPr txBox="1"/>
-          <p:nvPr/>
-        </p:nvSpPr>
-        <p:spPr>
-          <a:xfrm>
-            <a:off x="640080" y="5989320"/>
-            <a:ext cx="10911535" cy="320040"/>
-          </a:xfrm>
-          <a:prstGeom prst="rect">
-            <a:avLst/>
-          </a:prstGeom>
-          <a:noFill/>
-          <a:ln>
-            <a:noFill/>
-          </a:ln>
-        </p:spPr>
-        <p:txBody>
-          <a:bodyPr wrap="square" lIns="137160" rIns="137160" tIns="137160" bIns="137160" anchor="ctr">
-            <a:spAutoFit/>
-          </a:bodyPr>
-          <a:lstStyle/>
-          <a:p>
-            <a:pPr algn="ctr">
-              <a:spcAft>
-                <a:spcPts val="300"/>
-              </a:spcAft>
-            </a:pPr>
-            <a:r>
-              <a:rPr sz="1400" b="1" lang="zh-CN">
-                <a:solidFill>
-                  <a:srgbClr val="11122A"/>
-                </a:solidFill>
-                <a:latin typeface="Microsoft YaHei"/>
-                <a:ea typeface="Microsoft YaHei"/>
-                <a:cs typeface="Microsoft YaHei"/>
-              </a:rPr>
-              <a:t>DSL 是本项目控制 AI 不确定性的关键工艺层。</a:t>
+              <a:t>用例不是临时 prompt，而是可保存、可编辑、可复跑的自动化测试资产。</a:t>
             </a:r>
           </a:p>
         </p:txBody>
@@ -13795,7 +15053,7 @@
                 <a:ea typeface="Microsoft YaHei"/>
                 <a:cs typeface="Microsoft YaHei"/>
               </a:rPr>
-              <a:t>技术创新点：混合定位系统降低 UI 自动化脆弱性</a:t>
+              <a:t>功能证据 4：结构化 DSL 编辑</a:t>
             </a:r>
           </a:p>
         </p:txBody>
@@ -13839,7 +15097,7 @@
                 <a:ea typeface="Microsoft YaHei Light"/>
                 <a:cs typeface="Microsoft YaHei Light"/>
               </a:rPr>
-              <a:t>定位链路采用 DOM 优先、视觉兜底、人工修正沉淀，而不是单一 CSS/XPath 或纯视觉 Agent。</a:t>
+              <a:t>通过稳定动作集合表达测试流程，保证 AI 生成结果可审查、可修改、可执行。</a:t>
             </a:r>
           </a:p>
         </p:txBody>
@@ -13883,683 +15141,52 @@
                 <a:ea typeface="Microsoft YaHei"/>
                 <a:cs typeface="Microsoft YaHei"/>
               </a:rPr>
-              <a:t>9/16</a:t>
-            </a:r>
-          </a:p>
-        </p:txBody>
-      </p:sp>
-      <p:graphicFrame>
-        <p:nvGraphicFramePr>
-          <p:cNvPr id="6" name="Table 5"/>
-          <p:cNvGraphicFramePr>
-            <a:graphicFrameLocks noGrp="1"/>
-          </p:cNvGraphicFramePr>
-          <p:nvPr/>
-        </p:nvGraphicFramePr>
-        <p:xfrm>
-          <a:off x="502920" y="1371600"/>
-          <a:ext cx="11185854" cy="2926080"/>
-        </p:xfrm>
-        <a:graphic>
-          <a:graphicData uri="http://schemas.openxmlformats.org/drawingml/2006/table">
-            <a:tbl>
-              <a:tblPr firstRow="1" bandRow="1">
-                <a:tableStyleId>{5C22544A-7EE6-4342-B048-85BDC9FD1C3A}</a:tableStyleId>
-              </a:tblPr>
-              <a:tblGrid>
-                <a:gridCol w="1454161"/>
-                <a:gridCol w="2460888"/>
-                <a:gridCol w="3803190"/>
-                <a:gridCol w="3467615"/>
-              </a:tblGrid>
-              <a:tr h="487680">
-                <a:tc>
-                  <a:txBody>
-                    <a:bodyPr lIns="73152" rIns="73152" wrap="square"/>
-                    <a:lstStyle/>
-                    <a:p>
-                      <a:r>
-                        <a:rPr sz="1100" b="1" lang="zh-CN">
-                          <a:solidFill>
-                            <a:srgbClr val="FFFFFF"/>
-                          </a:solidFill>
-                          <a:latin typeface="Microsoft YaHei"/>
-                          <a:ea typeface="Microsoft YaHei"/>
-                          <a:cs typeface="Microsoft YaHei"/>
-                        </a:rPr>
-                        <a:t>层级</a:t>
-                      </a:r>
-                    </a:p>
-                  </a:txBody>
-                  <a:tcPr>
-                    <a:solidFill>
-                      <a:srgbClr val="11122A"/>
-                    </a:solidFill>
-                  </a:tcPr>
-                </a:tc>
-                <a:tc>
-                  <a:txBody>
-                    <a:bodyPr lIns="73152" rIns="73152" wrap="square"/>
-                    <a:lstStyle/>
-                    <a:p>
-                      <a:r>
-                        <a:rPr sz="1100" b="1" lang="zh-CN">
-                          <a:solidFill>
-                            <a:srgbClr val="FFFFFF"/>
-                          </a:solidFill>
-                          <a:latin typeface="Microsoft YaHei"/>
-                          <a:ea typeface="Microsoft YaHei"/>
-                          <a:cs typeface="Microsoft YaHei"/>
-                        </a:rPr>
-                        <a:t>策略</a:t>
-                      </a:r>
-                    </a:p>
-                  </a:txBody>
-                  <a:tcPr>
-                    <a:solidFill>
-                      <a:srgbClr val="11122A"/>
-                    </a:solidFill>
-                  </a:tcPr>
-                </a:tc>
-                <a:tc>
-                  <a:txBody>
-                    <a:bodyPr lIns="73152" rIns="73152" wrap="square"/>
-                    <a:lstStyle/>
-                    <a:p>
-                      <a:r>
-                        <a:rPr sz="1100" b="1" lang="zh-CN">
-                          <a:solidFill>
-                            <a:srgbClr val="FFFFFF"/>
-                          </a:solidFill>
-                          <a:latin typeface="Microsoft YaHei"/>
-                          <a:ea typeface="Microsoft YaHei"/>
-                          <a:cs typeface="Microsoft YaHei"/>
-                        </a:rPr>
-                        <a:t>作用</a:t>
-                      </a:r>
-                    </a:p>
-                  </a:txBody>
-                  <a:tcPr>
-                    <a:solidFill>
-                      <a:srgbClr val="11122A"/>
-                    </a:solidFill>
-                  </a:tcPr>
-                </a:tc>
-                <a:tc>
-                  <a:txBody>
-                    <a:bodyPr lIns="73152" rIns="73152" wrap="square"/>
-                    <a:lstStyle/>
-                    <a:p>
-                      <a:r>
-                        <a:rPr sz="1100" b="1" lang="zh-CN">
-                          <a:solidFill>
-                            <a:srgbClr val="FFFFFF"/>
-                          </a:solidFill>
-                          <a:latin typeface="Microsoft YaHei"/>
-                          <a:ea typeface="Microsoft YaHei"/>
-                          <a:cs typeface="Microsoft YaHei"/>
-                        </a:rPr>
-                        <a:t>创新价值</a:t>
-                      </a:r>
-                    </a:p>
-                  </a:txBody>
-                  <a:tcPr>
-                    <a:solidFill>
-                      <a:srgbClr val="11122A"/>
-                    </a:solidFill>
-                  </a:tcPr>
-                </a:tc>
-              </a:tr>
-              <a:tr h="487680">
-                <a:tc>
-                  <a:txBody>
-                    <a:bodyPr lIns="73152" rIns="73152" tIns="36576" bIns="36576" wrap="square"/>
-                    <a:lstStyle/>
-                    <a:p>
-                      <a:r>
-                        <a:rPr sz="1000" b="0" lang="zh-CN">
-                          <a:solidFill>
-                            <a:srgbClr val="111827"/>
-                          </a:solidFill>
-                          <a:latin typeface="Microsoft YaHei"/>
-                          <a:ea typeface="Microsoft YaHei"/>
-                          <a:cs typeface="Microsoft YaHei"/>
-                        </a:rPr>
-                        <a:t>Tier 0</a:t>
-                      </a:r>
-                    </a:p>
-                  </a:txBody>
-                  <a:tcPr>
-                    <a:solidFill>
-                      <a:srgbClr val="FFFFFF"/>
-                    </a:solidFill>
-                  </a:tcPr>
-                </a:tc>
-                <a:tc>
-                  <a:txBody>
-                    <a:bodyPr lIns="73152" rIns="73152" tIns="36576" bIns="36576" wrap="square"/>
-                    <a:lstStyle/>
-                    <a:p>
-                      <a:r>
-                        <a:rPr sz="1000" b="0" lang="zh-CN">
-                          <a:solidFill>
-                            <a:srgbClr val="111827"/>
-                          </a:solidFill>
-                          <a:latin typeface="Microsoft YaHei"/>
-                          <a:ea typeface="Microsoft YaHei"/>
-                          <a:cs typeface="Microsoft YaHei"/>
-                        </a:rPr>
-                        <a:t>人工修正记录</a:t>
-                      </a:r>
-                    </a:p>
-                  </a:txBody>
-                  <a:tcPr>
-                    <a:solidFill>
-                      <a:srgbClr val="FFFFFF"/>
-                    </a:solidFill>
-                  </a:tcPr>
-                </a:tc>
-                <a:tc>
-                  <a:txBody>
-                    <a:bodyPr lIns="73152" rIns="73152" tIns="36576" bIns="36576" wrap="square"/>
-                    <a:lstStyle/>
-                    <a:p>
-                      <a:r>
-                        <a:rPr sz="1000" b="0" lang="zh-CN">
-                          <a:solidFill>
-                            <a:srgbClr val="111827"/>
-                          </a:solidFill>
-                          <a:latin typeface="Microsoft YaHei"/>
-                          <a:ea typeface="Microsoft YaHei"/>
-                          <a:cs typeface="Microsoft YaHei"/>
-                        </a:rPr>
-                        <a:t>优先复用历史确认过的 selector</a:t>
-                      </a:r>
-                    </a:p>
-                  </a:txBody>
-                  <a:tcPr>
-                    <a:solidFill>
-                      <a:srgbClr val="FFFFFF"/>
-                    </a:solidFill>
-                  </a:tcPr>
-                </a:tc>
-                <a:tc>
-                  <a:txBody>
-                    <a:bodyPr lIns="73152" rIns="73152" tIns="36576" bIns="36576" wrap="square"/>
-                    <a:lstStyle/>
-                    <a:p>
-                      <a:r>
-                        <a:rPr sz="1000" b="0" lang="zh-CN">
-                          <a:solidFill>
-                            <a:srgbClr val="111827"/>
-                          </a:solidFill>
-                          <a:latin typeface="Microsoft YaHei"/>
-                          <a:ea typeface="Microsoft YaHei"/>
-                          <a:cs typeface="Microsoft YaHei"/>
-                        </a:rPr>
-                        <a:t>把一次人工修复变成长期资产</a:t>
-                      </a:r>
-                    </a:p>
-                  </a:txBody>
-                  <a:tcPr>
-                    <a:solidFill>
-                      <a:srgbClr val="FFFFFF"/>
-                    </a:solidFill>
-                  </a:tcPr>
-                </a:tc>
-              </a:tr>
-              <a:tr h="487680">
-                <a:tc>
-                  <a:txBody>
-                    <a:bodyPr lIns="73152" rIns="73152" tIns="36576" bIns="36576" wrap="square"/>
-                    <a:lstStyle/>
-                    <a:p>
-                      <a:r>
-                        <a:rPr sz="1000" b="0" lang="zh-CN">
-                          <a:solidFill>
-                            <a:srgbClr val="111827"/>
-                          </a:solidFill>
-                          <a:latin typeface="Microsoft YaHei"/>
-                          <a:ea typeface="Microsoft YaHei"/>
-                          <a:cs typeface="Microsoft YaHei"/>
-                        </a:rPr>
-                        <a:t>Tier 1</a:t>
-                      </a:r>
-                    </a:p>
-                  </a:txBody>
-                  <a:tcPr>
-                    <a:solidFill>
-                      <a:srgbClr val="F5F7FA"/>
-                    </a:solidFill>
-                  </a:tcPr>
-                </a:tc>
-                <a:tc>
-                  <a:txBody>
-                    <a:bodyPr lIns="73152" rIns="73152" tIns="36576" bIns="36576" wrap="square"/>
-                    <a:lstStyle/>
-                    <a:p>
-                      <a:r>
-                        <a:rPr sz="1000" b="0" lang="zh-CN">
-                          <a:solidFill>
-                            <a:srgbClr val="111827"/>
-                          </a:solidFill>
-                          <a:latin typeface="Microsoft YaHei"/>
-                          <a:ea typeface="Microsoft YaHei"/>
-                          <a:cs typeface="Microsoft YaHei"/>
-                        </a:rPr>
-                        <a:t>DOM 语义定位</a:t>
-                      </a:r>
-                    </a:p>
-                  </a:txBody>
-                  <a:tcPr>
-                    <a:solidFill>
-                      <a:srgbClr val="F5F7FA"/>
-                    </a:solidFill>
-                  </a:tcPr>
-                </a:tc>
-                <a:tc>
-                  <a:txBody>
-                    <a:bodyPr lIns="73152" rIns="73152" tIns="36576" bIns="36576" wrap="square"/>
-                    <a:lstStyle/>
-                    <a:p>
-                      <a:r>
-                        <a:rPr sz="1000" b="0" lang="zh-CN">
-                          <a:solidFill>
-                            <a:srgbClr val="111827"/>
-                          </a:solidFill>
-                          <a:latin typeface="Microsoft YaHei"/>
-                          <a:ea typeface="Microsoft YaHei"/>
-                          <a:cs typeface="Microsoft YaHei"/>
-                        </a:rPr>
-                        <a:t>基于 role、label、placeholder、text、aria 等召回候选</a:t>
-                      </a:r>
-                    </a:p>
-                  </a:txBody>
-                  <a:tcPr>
-                    <a:solidFill>
-                      <a:srgbClr val="F5F7FA"/>
-                    </a:solidFill>
-                  </a:tcPr>
-                </a:tc>
-                <a:tc>
-                  <a:txBody>
-                    <a:bodyPr lIns="73152" rIns="73152" tIns="36576" bIns="36576" wrap="square"/>
-                    <a:lstStyle/>
-                    <a:p>
-                      <a:r>
-                        <a:rPr sz="1000" b="0" lang="zh-CN">
-                          <a:solidFill>
-                            <a:srgbClr val="111827"/>
-                          </a:solidFill>
-                          <a:latin typeface="Microsoft YaHei"/>
-                          <a:ea typeface="Microsoft YaHei"/>
-                          <a:cs typeface="Microsoft YaHei"/>
-                        </a:rPr>
-                        <a:t>成本低、速度快、可解释</a:t>
-                      </a:r>
-                    </a:p>
-                  </a:txBody>
-                  <a:tcPr>
-                    <a:solidFill>
-                      <a:srgbClr val="F5F7FA"/>
-                    </a:solidFill>
-                  </a:tcPr>
-                </a:tc>
-              </a:tr>
-              <a:tr h="487680">
-                <a:tc>
-                  <a:txBody>
-                    <a:bodyPr lIns="73152" rIns="73152" tIns="36576" bIns="36576" wrap="square"/>
-                    <a:lstStyle/>
-                    <a:p>
-                      <a:r>
-                        <a:rPr sz="1000" b="0" lang="zh-CN">
-                          <a:solidFill>
-                            <a:srgbClr val="111827"/>
-                          </a:solidFill>
-                          <a:latin typeface="Microsoft YaHei"/>
-                          <a:ea typeface="Microsoft YaHei"/>
-                          <a:cs typeface="Microsoft YaHei"/>
-                        </a:rPr>
-                        <a:t>Tier 1.5/2</a:t>
-                      </a:r>
-                    </a:p>
-                  </a:txBody>
-                  <a:tcPr>
-                    <a:solidFill>
-                      <a:srgbClr val="FFFFFF"/>
-                    </a:solidFill>
-                  </a:tcPr>
-                </a:tc>
-                <a:tc>
-                  <a:txBody>
-                    <a:bodyPr lIns="73152" rIns="73152" tIns="36576" bIns="36576" wrap="square"/>
-                    <a:lstStyle/>
-                    <a:p>
-                      <a:r>
-                        <a:rPr sz="1000" b="0" lang="zh-CN">
-                          <a:solidFill>
-                            <a:srgbClr val="111827"/>
-                          </a:solidFill>
-                          <a:latin typeface="Microsoft YaHei"/>
-                          <a:ea typeface="Microsoft YaHei"/>
-                          <a:cs typeface="Microsoft YaHei"/>
-                        </a:rPr>
-                        <a:t>上下文增强定位</a:t>
-                      </a:r>
-                    </a:p>
-                  </a:txBody>
-                  <a:tcPr>
-                    <a:solidFill>
-                      <a:srgbClr val="FFFFFF"/>
-                    </a:solidFill>
-                  </a:tcPr>
-                </a:tc>
-                <a:tc>
-                  <a:txBody>
-                    <a:bodyPr lIns="73152" rIns="73152" tIns="36576" bIns="36576" wrap="square"/>
-                    <a:lstStyle/>
-                    <a:p>
-                      <a:r>
-                        <a:rPr sz="1000" b="0" lang="zh-CN">
-                          <a:solidFill>
-                            <a:srgbClr val="111827"/>
-                          </a:solidFill>
-                          <a:latin typeface="Microsoft YaHei"/>
-                          <a:ea typeface="Microsoft YaHei"/>
-                          <a:cs typeface="Microsoft YaHei"/>
-                        </a:rPr>
-                        <a:t>支持“商品附近按钮”等语义关系</a:t>
-                      </a:r>
-                    </a:p>
-                  </a:txBody>
-                  <a:tcPr>
-                    <a:solidFill>
-                      <a:srgbClr val="FFFFFF"/>
-                    </a:solidFill>
-                  </a:tcPr>
-                </a:tc>
-                <a:tc>
-                  <a:txBody>
-                    <a:bodyPr lIns="73152" rIns="73152" tIns="36576" bIns="36576" wrap="square"/>
-                    <a:lstStyle/>
-                    <a:p>
-                      <a:r>
-                        <a:rPr sz="1000" b="0" lang="zh-CN">
-                          <a:solidFill>
-                            <a:srgbClr val="111827"/>
-                          </a:solidFill>
-                          <a:latin typeface="Microsoft YaHei"/>
-                          <a:ea typeface="Microsoft YaHei"/>
-                          <a:cs typeface="Microsoft YaHei"/>
-                        </a:rPr>
-                        <a:t>解决同名按钮和列表场景</a:t>
-                      </a:r>
-                    </a:p>
-                  </a:txBody>
-                  <a:tcPr>
-                    <a:solidFill>
-                      <a:srgbClr val="FFFFFF"/>
-                    </a:solidFill>
-                  </a:tcPr>
-                </a:tc>
-              </a:tr>
-              <a:tr h="487680">
-                <a:tc>
-                  <a:txBody>
-                    <a:bodyPr lIns="73152" rIns="73152" tIns="36576" bIns="36576" wrap="square"/>
-                    <a:lstStyle/>
-                    <a:p>
-                      <a:r>
-                        <a:rPr sz="1000" b="0" lang="zh-CN">
-                          <a:solidFill>
-                            <a:srgbClr val="111827"/>
-                          </a:solidFill>
-                          <a:latin typeface="Microsoft YaHei"/>
-                          <a:ea typeface="Microsoft YaHei"/>
-                          <a:cs typeface="Microsoft YaHei"/>
-                        </a:rPr>
-                        <a:t>Tier 3</a:t>
-                      </a:r>
-                    </a:p>
-                  </a:txBody>
-                  <a:tcPr>
-                    <a:solidFill>
-                      <a:srgbClr val="F5F7FA"/>
-                    </a:solidFill>
-                  </a:tcPr>
-                </a:tc>
-                <a:tc>
-                  <a:txBody>
-                    <a:bodyPr lIns="73152" rIns="73152" tIns="36576" bIns="36576" wrap="square"/>
-                    <a:lstStyle/>
-                    <a:p>
-                      <a:r>
-                        <a:rPr sz="1000" b="0" lang="zh-CN">
-                          <a:solidFill>
-                            <a:srgbClr val="111827"/>
-                          </a:solidFill>
-                          <a:latin typeface="Microsoft YaHei"/>
-                          <a:ea typeface="Microsoft YaHei"/>
-                          <a:cs typeface="Microsoft YaHei"/>
-                        </a:rPr>
-                        <a:t>AI visual 兜底</a:t>
-                      </a:r>
-                    </a:p>
-                  </a:txBody>
-                  <a:tcPr>
-                    <a:solidFill>
-                      <a:srgbClr val="F5F7FA"/>
-                    </a:solidFill>
-                  </a:tcPr>
-                </a:tc>
-                <a:tc>
-                  <a:txBody>
-                    <a:bodyPr lIns="73152" rIns="73152" tIns="36576" bIns="36576" wrap="square"/>
-                    <a:lstStyle/>
-                    <a:p>
-                      <a:r>
-                        <a:rPr sz="1000" b="0" lang="zh-CN">
-                          <a:solidFill>
-                            <a:srgbClr val="111827"/>
-                          </a:solidFill>
-                          <a:latin typeface="Microsoft YaHei"/>
-                          <a:ea typeface="Microsoft YaHei"/>
-                          <a:cs typeface="Microsoft YaHei"/>
-                        </a:rPr>
-                        <a:t>截图交给 VLM 返回 bbox，再反查 DOM</a:t>
-                      </a:r>
-                    </a:p>
-                  </a:txBody>
-                  <a:tcPr>
-                    <a:solidFill>
-                      <a:srgbClr val="F5F7FA"/>
-                    </a:solidFill>
-                  </a:tcPr>
-                </a:tc>
-                <a:tc>
-                  <a:txBody>
-                    <a:bodyPr lIns="73152" rIns="73152" tIns="36576" bIns="36576" wrap="square"/>
-                    <a:lstStyle/>
-                    <a:p>
-                      <a:r>
-                        <a:rPr sz="1000" b="0" lang="zh-CN">
-                          <a:solidFill>
-                            <a:srgbClr val="111827"/>
-                          </a:solidFill>
-                          <a:latin typeface="Microsoft YaHei"/>
-                          <a:ea typeface="Microsoft YaHei"/>
-                          <a:cs typeface="Microsoft YaHei"/>
-                        </a:rPr>
-                        <a:t>处理 DOM 信息不足的疑难场景</a:t>
-                      </a:r>
-                    </a:p>
-                  </a:txBody>
-                  <a:tcPr>
-                    <a:solidFill>
-                      <a:srgbClr val="F5F7FA"/>
-                    </a:solidFill>
-                  </a:tcPr>
-                </a:tc>
-              </a:tr>
-              <a:tr h="487680">
-                <a:tc>
-                  <a:txBody>
-                    <a:bodyPr lIns="73152" rIns="73152" tIns="36576" bIns="36576" wrap="square"/>
-                    <a:lstStyle/>
-                    <a:p>
-                      <a:r>
-                        <a:rPr sz="1000" b="0" lang="zh-CN">
-                          <a:solidFill>
-                            <a:srgbClr val="111827"/>
-                          </a:solidFill>
-                          <a:latin typeface="Microsoft YaHei"/>
-                          <a:ea typeface="Microsoft YaHei"/>
-                          <a:cs typeface="Microsoft YaHei"/>
-                        </a:rPr>
-                        <a:t>Tier 4</a:t>
-                      </a:r>
-                    </a:p>
-                  </a:txBody>
-                  <a:tcPr>
-                    <a:solidFill>
-                      <a:srgbClr val="FFFFFF"/>
-                    </a:solidFill>
-                  </a:tcPr>
-                </a:tc>
-                <a:tc>
-                  <a:txBody>
-                    <a:bodyPr lIns="73152" rIns="73152" tIns="36576" bIns="36576" wrap="square"/>
-                    <a:lstStyle/>
-                    <a:p>
-                      <a:r>
-                        <a:rPr sz="1000" b="0" lang="zh-CN">
-                          <a:solidFill>
-                            <a:srgbClr val="111827"/>
-                          </a:solidFill>
-                          <a:latin typeface="Microsoft YaHei"/>
-                          <a:ea typeface="Microsoft YaHei"/>
-                          <a:cs typeface="Microsoft YaHei"/>
-                        </a:rPr>
-                        <a:t>人工干预</a:t>
-                      </a:r>
-                    </a:p>
-                  </a:txBody>
-                  <a:tcPr>
-                    <a:solidFill>
-                      <a:srgbClr val="FFFFFF"/>
-                    </a:solidFill>
-                  </a:tcPr>
-                </a:tc>
-                <a:tc>
-                  <a:txBody>
-                    <a:bodyPr lIns="73152" rIns="73152" tIns="36576" bIns="36576" wrap="square"/>
-                    <a:lstStyle/>
-                    <a:p>
-                      <a:r>
-                        <a:rPr sz="1000" b="0" lang="zh-CN">
-                          <a:solidFill>
-                            <a:srgbClr val="111827"/>
-                          </a:solidFill>
-                          <a:latin typeface="Microsoft YaHei"/>
-                          <a:ea typeface="Microsoft YaHei"/>
-                          <a:cs typeface="Microsoft YaHei"/>
-                        </a:rPr>
-                        <a:t>记录截图、URL、DOM、候选与失败原因</a:t>
-                      </a:r>
-                    </a:p>
-                  </a:txBody>
-                  <a:tcPr>
-                    <a:solidFill>
-                      <a:srgbClr val="FFFFFF"/>
-                    </a:solidFill>
-                  </a:tcPr>
-                </a:tc>
-                <a:tc>
-                  <a:txBody>
-                    <a:bodyPr lIns="73152" rIns="73152" tIns="36576" bIns="36576" wrap="square"/>
-                    <a:lstStyle/>
-                    <a:p>
-                      <a:r>
-                        <a:rPr sz="1000" b="0" lang="zh-CN">
-                          <a:solidFill>
-                            <a:srgbClr val="111827"/>
-                          </a:solidFill>
-                          <a:latin typeface="Microsoft YaHei"/>
-                          <a:ea typeface="Microsoft YaHei"/>
-                          <a:cs typeface="Microsoft YaHei"/>
-                        </a:rPr>
-                        <a:t>为复盘和后续修正提供证据</a:t>
-                      </a:r>
-                    </a:p>
-                  </a:txBody>
-                  <a:tcPr>
-                    <a:solidFill>
-                      <a:srgbClr val="FFFFFF"/>
-                    </a:solidFill>
-                  </a:tcPr>
-                </a:tc>
-              </a:tr>
-            </a:tbl>
-          </a:graphicData>
-        </a:graphic>
-      </p:graphicFrame>
-      <p:sp>
-        <p:nvSpPr>
-          <p:cNvPr id="7" name="TextBox 6"/>
-          <p:cNvSpPr txBox="1"/>
-          <p:nvPr/>
-        </p:nvSpPr>
-        <p:spPr>
-          <a:xfrm>
-            <a:off x="502920" y="4343400"/>
-            <a:ext cx="11185855" cy="228600"/>
-          </a:xfrm>
-          <a:prstGeom prst="rect">
-            <a:avLst/>
-          </a:prstGeom>
-          <a:noFill/>
-          <a:ln>
-            <a:noFill/>
-          </a:ln>
-        </p:spPr>
-        <p:txBody>
-          <a:bodyPr wrap="square" lIns="137160" rIns="137160" tIns="137160" bIns="137160" anchor="t">
-            <a:spAutoFit/>
-          </a:bodyPr>
-          <a:lstStyle/>
-          <a:p>
-            <a:pPr algn="l">
-              <a:spcAft>
-                <a:spcPts val="300"/>
-              </a:spcAft>
-            </a:pPr>
-            <a:r>
-              <a:rPr sz="1000" b="0" lang="zh-CN">
-                <a:solidFill>
-                  <a:srgbClr val="4B5563"/>
-                </a:solidFill>
-                <a:latin typeface="Microsoft YaHei Light"/>
-                <a:ea typeface="Microsoft YaHei Light"/>
-                <a:cs typeface="Microsoft YaHei Light"/>
-              </a:rPr>
-              <a:t>来源：docs/hybrid-locate-and-intervention-design.md 与后端 locators/runners 模块设计。</a:t>
-            </a:r>
-          </a:p>
-        </p:txBody>
-      </p:sp>
-      <p:sp>
-        <p:nvSpPr>
-          <p:cNvPr id="8" name="Rectangle 7"/>
+              <a:t>9/17</a:t>
+            </a:r>
+          </a:p>
+        </p:txBody>
+      </p:sp>
+      <p:pic>
+        <p:nvPicPr>
+          <p:cNvPr id="6" name="Picture 5" descr="Snipaste_2026-05-13_19-48-35.png"/>
+          <p:cNvPicPr>
+            <a:picLocks noChangeAspect="1"/>
+          </p:cNvPicPr>
+          <p:nvPr/>
+        </p:nvPicPr>
+        <p:blipFill>
+          <a:blip r:embed="rId2"/>
+          <a:stretch>
+            <a:fillRect/>
+          </a:stretch>
+        </p:blipFill>
+        <p:spPr>
+          <a:xfrm>
+            <a:off x="502920" y="1847382"/>
+            <a:ext cx="5928503" cy="3117514"/>
+          </a:xfrm>
+          <a:prstGeom prst="rect">
+            <a:avLst/>
+          </a:prstGeom>
+          <a:ln w="12700">
+            <a:solidFill>
+              <a:srgbClr val="E5E7EB"/>
+            </a:solidFill>
+          </a:ln>
+        </p:spPr>
+      </p:pic>
+      <p:sp>
+        <p:nvSpPr>
+          <p:cNvPr id="7" name="Rounded Rectangle 6"/>
           <p:cNvSpPr/>
           <p:nvPr/>
         </p:nvSpPr>
         <p:spPr>
           <a:xfrm>
-            <a:off x="502920" y="5943600"/>
-            <a:ext cx="11185855" cy="411480"/>
-          </a:xfrm>
-          <a:prstGeom prst="rect">
+            <a:off x="6705743" y="1371600"/>
+            <a:ext cx="4983031" cy="1051560"/>
+          </a:xfrm>
+          <a:prstGeom prst="roundRect">
             <a:avLst/>
           </a:prstGeom>
           <a:solidFill>
@@ -14595,7 +15222,406 @@
       </p:sp>
       <p:sp>
         <p:nvSpPr>
+          <p:cNvPr id="8" name="TextBox 7"/>
+          <p:cNvSpPr txBox="1"/>
+          <p:nvPr/>
+        </p:nvSpPr>
+        <p:spPr>
+          <a:xfrm>
+            <a:off x="6842903" y="1463040"/>
+            <a:ext cx="4708711" cy="320040"/>
+          </a:xfrm>
+          <a:prstGeom prst="rect">
+            <a:avLst/>
+          </a:prstGeom>
+          <a:noFill/>
+          <a:ln>
+            <a:noFill/>
+          </a:ln>
+        </p:spPr>
+        <p:txBody>
+          <a:bodyPr wrap="square" lIns="137160" rIns="137160" tIns="137160" bIns="137160" anchor="t">
+            <a:spAutoFit/>
+          </a:bodyPr>
+          <a:lstStyle/>
+          <a:p>
+            <a:pPr algn="l">
+              <a:spcAft>
+                <a:spcPts val="300"/>
+              </a:spcAft>
+            </a:pPr>
+            <a:r>
+              <a:rPr sz="1500" b="1" lang="zh-CN">
+                <a:solidFill>
+                  <a:srgbClr val="2563EB"/>
+                </a:solidFill>
+                <a:latin typeface="Microsoft YaHei"/>
+                <a:ea typeface="Microsoft YaHei"/>
+                <a:cs typeface="Microsoft YaHei"/>
+              </a:rPr>
+              <a:t>动作受控</a:t>
+            </a:r>
+          </a:p>
+        </p:txBody>
+      </p:sp>
+      <p:sp>
+        <p:nvSpPr>
           <p:cNvPr id="9" name="TextBox 8"/>
+          <p:cNvSpPr txBox="1"/>
+          <p:nvPr/>
+        </p:nvSpPr>
+        <p:spPr>
+          <a:xfrm>
+            <a:off x="6842903" y="1828800"/>
+            <a:ext cx="4708711" cy="548639"/>
+          </a:xfrm>
+          <a:prstGeom prst="rect">
+            <a:avLst/>
+          </a:prstGeom>
+          <a:noFill/>
+          <a:ln>
+            <a:noFill/>
+          </a:ln>
+        </p:spPr>
+        <p:txBody>
+          <a:bodyPr wrap="square" lIns="137160" rIns="137160" tIns="137160" bIns="137160" anchor="t">
+            <a:spAutoFit/>
+          </a:bodyPr>
+          <a:lstStyle/>
+          <a:p>
+            <a:pPr algn="l">
+              <a:spcAft>
+                <a:spcPts val="300"/>
+              </a:spcAft>
+            </a:pPr>
+            <a:r>
+              <a:rPr sz="800" b="0" lang="zh-CN">
+                <a:solidFill>
+                  <a:srgbClr val="4B5563"/>
+                </a:solidFill>
+                <a:latin typeface="Microsoft YaHei Light"/>
+                <a:ea typeface="Microsoft YaHei Light"/>
+                <a:cs typeface="Microsoft YaHei Light"/>
+              </a:rPr>
+              <a:t>第一阶段动作集合保持小而稳定，例如 goto、click、input、wait_for、assert_text。</a:t>
+            </a:r>
+          </a:p>
+        </p:txBody>
+      </p:sp>
+      <p:sp>
+        <p:nvSpPr>
+          <p:cNvPr id="10" name="Rounded Rectangle 9"/>
+          <p:cNvSpPr/>
+          <p:nvPr/>
+        </p:nvSpPr>
+        <p:spPr>
+          <a:xfrm>
+            <a:off x="6705743" y="2532888"/>
+            <a:ext cx="4983031" cy="1051560"/>
+          </a:xfrm>
+          <a:prstGeom prst="roundRect">
+            <a:avLst/>
+          </a:prstGeom>
+          <a:solidFill>
+            <a:srgbClr val="FFFFFF"/>
+          </a:solidFill>
+          <a:ln w="10160">
+            <a:solidFill>
+              <a:srgbClr val="E5E7EB"/>
+            </a:solidFill>
+          </a:ln>
+        </p:spPr>
+        <p:style>
+          <a:lnRef idx="1">
+            <a:schemeClr val="accent1"/>
+          </a:lnRef>
+          <a:fillRef idx="3">
+            <a:schemeClr val="accent1"/>
+          </a:fillRef>
+          <a:effectRef idx="2">
+            <a:schemeClr val="accent1"/>
+          </a:effectRef>
+          <a:fontRef idx="minor">
+            <a:schemeClr val="lt1"/>
+          </a:fontRef>
+        </p:style>
+        <p:txBody>
+          <a:bodyPr rtlCol="0" anchor="ctr"/>
+          <a:lstStyle/>
+          <a:p>
+            <a:pPr algn="ctr"/>
+          </a:p>
+        </p:txBody>
+      </p:sp>
+      <p:sp>
+        <p:nvSpPr>
+          <p:cNvPr id="11" name="TextBox 10"/>
+          <p:cNvSpPr txBox="1"/>
+          <p:nvPr/>
+        </p:nvSpPr>
+        <p:spPr>
+          <a:xfrm>
+            <a:off x="6842903" y="2624328"/>
+            <a:ext cx="4708711" cy="320040"/>
+          </a:xfrm>
+          <a:prstGeom prst="rect">
+            <a:avLst/>
+          </a:prstGeom>
+          <a:noFill/>
+          <a:ln>
+            <a:noFill/>
+          </a:ln>
+        </p:spPr>
+        <p:txBody>
+          <a:bodyPr wrap="square" lIns="137160" rIns="137160" tIns="137160" bIns="137160" anchor="t">
+            <a:spAutoFit/>
+          </a:bodyPr>
+          <a:lstStyle/>
+          <a:p>
+            <a:pPr algn="l">
+              <a:spcAft>
+                <a:spcPts val="300"/>
+              </a:spcAft>
+            </a:pPr>
+            <a:r>
+              <a:rPr sz="1500" b="1" lang="zh-CN">
+                <a:solidFill>
+                  <a:srgbClr val="16A34A"/>
+                </a:solidFill>
+                <a:latin typeface="Microsoft YaHei"/>
+                <a:ea typeface="Microsoft YaHei"/>
+                <a:cs typeface="Microsoft YaHei"/>
+              </a:rPr>
+              <a:t>变量复用</a:t>
+            </a:r>
+          </a:p>
+        </p:txBody>
+      </p:sp>
+      <p:sp>
+        <p:nvSpPr>
+          <p:cNvPr id="12" name="TextBox 11"/>
+          <p:cNvSpPr txBox="1"/>
+          <p:nvPr/>
+        </p:nvSpPr>
+        <p:spPr>
+          <a:xfrm>
+            <a:off x="6842903" y="2990088"/>
+            <a:ext cx="4708711" cy="548639"/>
+          </a:xfrm>
+          <a:prstGeom prst="rect">
+            <a:avLst/>
+          </a:prstGeom>
+          <a:noFill/>
+          <a:ln>
+            <a:noFill/>
+          </a:ln>
+        </p:spPr>
+        <p:txBody>
+          <a:bodyPr wrap="square" lIns="137160" rIns="137160" tIns="137160" bIns="137160" anchor="t">
+            <a:spAutoFit/>
+          </a:bodyPr>
+          <a:lstStyle/>
+          <a:p>
+            <a:pPr algn="l">
+              <a:spcAft>
+                <a:spcPts val="300"/>
+              </a:spcAft>
+            </a:pPr>
+            <a:r>
+              <a:rPr sz="800" b="0" lang="zh-CN">
+                <a:solidFill>
+                  <a:srgbClr val="4B5563"/>
+                </a:solidFill>
+                <a:latin typeface="Microsoft YaHei Light"/>
+                <a:ea typeface="Microsoft YaHei Light"/>
+                <a:cs typeface="Microsoft YaHei Light"/>
+              </a:rPr>
+              <a:t>支持 ${login_email}、${login_password} 等变量，占位数据可在执行时替换。</a:t>
+            </a:r>
+          </a:p>
+        </p:txBody>
+      </p:sp>
+      <p:sp>
+        <p:nvSpPr>
+          <p:cNvPr id="13" name="Rounded Rectangle 12"/>
+          <p:cNvSpPr/>
+          <p:nvPr/>
+        </p:nvSpPr>
+        <p:spPr>
+          <a:xfrm>
+            <a:off x="6705743" y="3694176"/>
+            <a:ext cx="4983031" cy="1051560"/>
+          </a:xfrm>
+          <a:prstGeom prst="roundRect">
+            <a:avLst/>
+          </a:prstGeom>
+          <a:solidFill>
+            <a:srgbClr val="FFFFFF"/>
+          </a:solidFill>
+          <a:ln w="10160">
+            <a:solidFill>
+              <a:srgbClr val="E5E7EB"/>
+            </a:solidFill>
+          </a:ln>
+        </p:spPr>
+        <p:style>
+          <a:lnRef idx="1">
+            <a:schemeClr val="accent1"/>
+          </a:lnRef>
+          <a:fillRef idx="3">
+            <a:schemeClr val="accent1"/>
+          </a:fillRef>
+          <a:effectRef idx="2">
+            <a:schemeClr val="accent1"/>
+          </a:effectRef>
+          <a:fontRef idx="minor">
+            <a:schemeClr val="lt1"/>
+          </a:fontRef>
+        </p:style>
+        <p:txBody>
+          <a:bodyPr rtlCol="0" anchor="ctr"/>
+          <a:lstStyle/>
+          <a:p>
+            <a:pPr algn="ctr"/>
+          </a:p>
+        </p:txBody>
+      </p:sp>
+      <p:sp>
+        <p:nvSpPr>
+          <p:cNvPr id="14" name="TextBox 13"/>
+          <p:cNvSpPr txBox="1"/>
+          <p:nvPr/>
+        </p:nvSpPr>
+        <p:spPr>
+          <a:xfrm>
+            <a:off x="6842903" y="3785615"/>
+            <a:ext cx="4708711" cy="320040"/>
+          </a:xfrm>
+          <a:prstGeom prst="rect">
+            <a:avLst/>
+          </a:prstGeom>
+          <a:noFill/>
+          <a:ln>
+            <a:noFill/>
+          </a:ln>
+        </p:spPr>
+        <p:txBody>
+          <a:bodyPr wrap="square" lIns="137160" rIns="137160" tIns="137160" bIns="137160" anchor="t">
+            <a:spAutoFit/>
+          </a:bodyPr>
+          <a:lstStyle/>
+          <a:p>
+            <a:pPr algn="l">
+              <a:spcAft>
+                <a:spcPts val="300"/>
+              </a:spcAft>
+            </a:pPr>
+            <a:r>
+              <a:rPr sz="1500" b="1" lang="zh-CN">
+                <a:solidFill>
+                  <a:srgbClr val="D97706"/>
+                </a:solidFill>
+                <a:latin typeface="Microsoft YaHei"/>
+                <a:ea typeface="Microsoft YaHei"/>
+                <a:cs typeface="Microsoft YaHei"/>
+              </a:rPr>
+              <a:t>执行可信</a:t>
+            </a:r>
+          </a:p>
+        </p:txBody>
+      </p:sp>
+      <p:sp>
+        <p:nvSpPr>
+          <p:cNvPr id="15" name="TextBox 14"/>
+          <p:cNvSpPr txBox="1"/>
+          <p:nvPr/>
+        </p:nvSpPr>
+        <p:spPr>
+          <a:xfrm>
+            <a:off x="6842903" y="4151376"/>
+            <a:ext cx="4708711" cy="548639"/>
+          </a:xfrm>
+          <a:prstGeom prst="rect">
+            <a:avLst/>
+          </a:prstGeom>
+          <a:noFill/>
+          <a:ln>
+            <a:noFill/>
+          </a:ln>
+        </p:spPr>
+        <p:txBody>
+          <a:bodyPr wrap="square" lIns="137160" rIns="137160" tIns="137160" bIns="137160" anchor="t">
+            <a:spAutoFit/>
+          </a:bodyPr>
+          <a:lstStyle/>
+          <a:p>
+            <a:pPr algn="l">
+              <a:spcAft>
+                <a:spcPts val="300"/>
+              </a:spcAft>
+            </a:pPr>
+            <a:r>
+              <a:rPr sz="1100" b="0" lang="zh-CN">
+                <a:solidFill>
+                  <a:srgbClr val="4B5563"/>
+                </a:solidFill>
+                <a:latin typeface="Microsoft YaHei Light"/>
+                <a:ea typeface="Microsoft YaHei Light"/>
+                <a:cs typeface="Microsoft YaHei Light"/>
+              </a:rPr>
+              <a:t>所有正式测试执行都基于结构化 DSL，而不是直接把自然语言交给浏览器。</a:t>
+            </a:r>
+          </a:p>
+        </p:txBody>
+      </p:sp>
+      <p:sp>
+        <p:nvSpPr>
+          <p:cNvPr id="16" name="Rectangle 15"/>
+          <p:cNvSpPr/>
+          <p:nvPr/>
+        </p:nvSpPr>
+        <p:spPr>
+          <a:xfrm>
+            <a:off x="502920" y="5943600"/>
+            <a:ext cx="11185855" cy="411480"/>
+          </a:xfrm>
+          <a:prstGeom prst="rect">
+            <a:avLst/>
+          </a:prstGeom>
+          <a:solidFill>
+            <a:srgbClr val="FFFFFF"/>
+          </a:solidFill>
+          <a:ln w="10160">
+            <a:solidFill>
+              <a:srgbClr val="E5E7EB"/>
+            </a:solidFill>
+          </a:ln>
+        </p:spPr>
+        <p:style>
+          <a:lnRef idx="1">
+            <a:schemeClr val="accent1"/>
+          </a:lnRef>
+          <a:fillRef idx="3">
+            <a:schemeClr val="accent1"/>
+          </a:fillRef>
+          <a:effectRef idx="2">
+            <a:schemeClr val="accent1"/>
+          </a:effectRef>
+          <a:fontRef idx="minor">
+            <a:schemeClr val="lt1"/>
+          </a:fontRef>
+        </p:style>
+        <p:txBody>
+          <a:bodyPr rtlCol="0" anchor="ctr"/>
+          <a:lstStyle/>
+          <a:p>
+            <a:pPr algn="ctr"/>
+          </a:p>
+        </p:txBody>
+      </p:sp>
+      <p:sp>
+        <p:nvSpPr>
+          <p:cNvPr id="17" name="TextBox 16"/>
           <p:cNvSpPr txBox="1"/>
           <p:nvPr/>
         </p:nvSpPr>
@@ -14632,7 +15658,7 @@
                 <a:ea typeface="Microsoft YaHei"/>
                 <a:cs typeface="Microsoft YaHei"/>
               </a:rPr>
-              <a:t>相比纯脚本定位，它更能适应页面变化；相比纯视觉定位，它更低成本、更可解释、更适合测试工程。</a:t>
+              <a:t>DSL 是本项目控制 AI 不确定性的关键工艺层。</a:t>
             </a:r>
           </a:p>
         </p:txBody>
